--- a/ders/serbest-cizim-teknikleri/02-1hafta-sunum.pptx
+++ b/ders/serbest-cizim-teknikleri/02-1hafta-sunum.pptx
@@ -39,9 +39,10 @@
     <p:sldId id="287" r:id="rId33"/>
     <p:sldId id="288" r:id="rId34"/>
     <p:sldId id="289" r:id="rId35"/>
+    <p:sldId id="290" r:id="rId36"/>
   </p:sldIdLst>
   <p:notesMasterIdLst>
-    <p:notesMasterId r:id="rId36"/>
+    <p:notesMasterId r:id="rId37"/>
   </p:notesMasterIdLst>
   <p:sldSz cx="12192000" cy="6858000"/>
   <p:notesSz cx="6858000" cy="12192000"/>
@@ -535,7 +536,7 @@
           <a:p>
             <a:r>
               <a:rPr lang="en-US" dirty="0"/>
-              <a:t>Açılış. Süre planı: teori ~55 dk, kalem tutma ~25 dk, ara 10 dk, dönem planı ve kurallar ~25 dk, dışarı çıkma 60 dk.
+              <a:t>Açılış. Ders 100 dakika (12.40–14.20). Süre planı: açılış + izlence 10 dk, tarihçe 30 dk, dönem planı ve kurallar 20 dk, kalem tutma ve sertlikler 15 dk, uygulama 20 dk, kapanış 5 dk.
 Sağdaki altı çizgi bugünün ilk egzersizi: aynı kalemle altı farklı ağırlıkta çizgi.</a:t>
             </a:r>
             <a:endParaRPr lang="en-US" dirty="0"/>
@@ -976,7 +977,7 @@
           <a:p>
             <a:r>
               <a:rPr lang="en-US" dirty="0"/>
-              <a:t>7. ve 11. hafta teslim olduğu için evre listesinde yok.</a:t>
+              <a:t>5. hafta (29 Ekim) tatil, 8. hafta quiz olduğu için evre listesinde yok.</a:t>
             </a:r>
             <a:endParaRPr lang="en-US" dirty="0"/>
           </a:p>
@@ -1857,7 +1858,7 @@
           <a:p>
             <a:r>
               <a:rPr lang="en-US" dirty="0"/>
-              <a:t>Bölüm 4: pratik bilgi. Buradan sonrası not alınacak kısım.</a:t>
+              <a:t>Bölüm 4: pratik bilgi. Buradan sonrası not alınacak kısım. İzlenceyi ekranda açık tutun.</a:t>
             </a:r>
             <a:endParaRPr lang="en-US" dirty="0"/>
           </a:p>
@@ -1945,7 +1946,8 @@
           <a:p>
             <a:r>
               <a:rPr lang="en-US" dirty="0"/>
-              <a:t>Takvimi tek tek okumayın; işaretli üç haftayı vurgulayın: 7, 11 ve 14. Geri kalanı izlencede var.</a:t>
+              <a:t>Takvimi tek tek okumayın; işaretli üç haftayı vurgulayın: 5 (tatil), 8 (quiz) ve 14.
+29 Ekim Cumhuriyet Bayramı perşembeye denk geliyor; o hafta ders yapılmayacak.</a:t>
             </a:r>
             <a:endParaRPr lang="en-US" dirty="0"/>
           </a:p>
@@ -2033,7 +2035,8 @@
           <a:p>
             <a:r>
               <a:rPr lang="en-US" dirty="0"/>
-              <a:t>Sınav olmadığını duyunca rahatlarlar; hemen ardından ev tekrarı sözleşmesini ve stüdyo mührünü duyurun.</a:t>
+              <a:t>On ölçüt izlencede tam hâliyle var; burada okumayın, izlenceye yönlendirin.
+Vurgulanacak tek şey: dönem projesi yeni bir üretim değil, zaten yaptığınız işin derlenmesi. Düzenli çalışan için ek yük yok.</a:t>
             </a:r>
             <a:endParaRPr lang="en-US" dirty="0"/>
           </a:p>
@@ -2121,7 +2124,8 @@
           <a:p>
             <a:r>
               <a:rPr lang="en-US" dirty="0"/>
-              <a:t>Bu slayt dersin en çok itiraz alacak yeri. Net olun: tekrar zorunlu ve haftalık kontrol ediliyor. Karşılığında günlük defter yükü yok.</a:t>
+              <a:t>Bu slayt dönemin en çok işe yarayan uyarısıdır. İlk haftada söylenmezse yarısı sayfalarını atar.
+Kişisel gelişim notu: “dönem başında ne yapamıyordum, şimdi ne yapabiliyorum” — bir sayfa, elle yazılabilir.</a:t>
             </a:r>
             <a:endParaRPr lang="en-US" dirty="0"/>
           </a:p>
@@ -2209,8 +2213,7 @@
           <a:p>
             <a:r>
               <a:rPr lang="en-US" dirty="0"/>
-              <a:t>Mümkünse gerçek bir örnek gösterin. Türün adı: pop-up shadow box card / layered papercut diorama. Tarihsel dayanağı Hoogstraten'in perspektif kutusu (1655-60) ve tunnel book geleneği.
-13. haftada kuru boya çalışacağız; renk serbest ama tek renk ailesi ve en az 5 değer kuralı var.</a:t>
+              <a:t>Karşılığında günlük defter yükü yok — bunu açıkça söyleyin, itirazı düşürür.</a:t>
             </a:r>
             <a:endParaRPr lang="en-US" dirty="0"/>
           </a:p>
@@ -2298,7 +2301,8 @@
           <a:p>
             <a:r>
               <a:rPr lang="en-US" dirty="0"/>
-              <a:t>Öğrencinin hedeflediği atmosfer kapalı zarfta hocada duracak; sergi sonunda hedeflenen ile algılanan karşılaştırılacak. Bu, 2. haftadaki sorunun mekân ölçeğinde tekrarı.</a:t>
+              <a:t>Mümkünse gerçek bir örnek gösterin. Türün adı: pop-up shadow box card / layered papercut diorama. Tarihsel dayanağı Hoogstraten'in perspektif kutusu (1655-60) ve tunnel book geleneği.
+13. haftada kuru boya çalışacağız; renk serbest ama tek renk ailesi ve en az 5 değer kuralı var.</a:t>
             </a:r>
             <a:endParaRPr lang="en-US" dirty="0"/>
           </a:p>
@@ -2386,7 +2390,8 @@
           <a:p>
             <a:r>
               <a:rPr lang="en-US" dirty="0"/>
-              <a:t>Bölüm 5: not alınacak kısım. Yavaş gidin.</a:t>
+              <a:t>Bu slaytta yavaş gidin ve soru alın. Dönem içindeki itirazların neredeyse tamamı bu iki maddeden çıkıyor.
+Mazeret sınavı üniversitenin yürürlükteki yönetmeliğine göre uygulanır.</a:t>
             </a:r>
             <a:endParaRPr lang="en-US" dirty="0"/>
           </a:p>
@@ -2474,7 +2479,7 @@
           <a:p>
             <a:r>
               <a:rPr lang="en-US" dirty="0"/>
-              <a:t>Son maddeyi vurgulayın: bugün dışarı çıkıyoruz. Hava durumuna göre yedek plan hazır olsun.</a:t>
+              <a:t>Son maddeyi vurgulayın: bugün de çizeceğiz. Ders anlatım saati değil, üretim saati.</a:t>
             </a:r>
             <a:endParaRPr lang="en-US" dirty="0"/>
           </a:p>
@@ -2562,8 +2567,7 @@
           <a:p>
             <a:r>
               <a:rPr lang="en-US" dirty="0"/>
-              <a:t>Devam da zorunlu: %30 devamsızlık başarısızlık. Üretim burada oluyor; kaçırılan hafta telafi edilmiyor, birikiyor.
-Mühür için küçük bir tarih kaşesi alın; 30 öğrenciye ıslak imza yorucu olur.</a:t>
+              <a:t>Bölüm 5: not alınacak kısım. Yavaş gidin ve soru alın.</a:t>
             </a:r>
             <a:endParaRPr lang="en-US" dirty="0"/>
           </a:p>
@@ -2651,7 +2655,9 @@
           <a:p>
             <a:r>
               <a:rPr lang="en-US" dirty="0"/>
-              <a:t>Kampüse yakın kırtasiyeyi söyleyin. Bütçe sıkıntısı olan öğrenciyle ders sonrası ayrı konuşun.</a:t>
+              <a:t>İlk iki kural mavi: bu ikisinden taviz yok.
+Engelli öğrenci desteği: güçlük yaşayan öğrenciler doğrudan benimle ve üniversitenin engelli öğrenci birimiyle iletişime geçsin — bunu sözlü olarak söyleyin.
+Ders kaydı KVKK kapsamında yalnızca bilgi ve onayla yapılabilir; izinsiz kayıt yasak.</a:t>
             </a:r>
             <a:endParaRPr lang="en-US" dirty="0"/>
           </a:p>
@@ -2739,7 +2745,7 @@
           <a:p>
             <a:r>
               <a:rPr lang="en-US" dirty="0"/>
-              <a:t>Dönemin mottosu. Süreç dosyası kuralı, “temiz dosya düşük not alır” maddesi ve ev tekrarı sözleşmesi hep bu cümleden çıkıyor.</a:t>
+              <a:t>Kampüse yakın kırtasiyeyi söyleyin. Bütçe sıkıntısı olan öğrenciyle ders sonrası ayrı konuşun.</a:t>
             </a:r>
             <a:endParaRPr lang="en-US" dirty="0"/>
           </a:p>
@@ -2827,10 +2833,7 @@
           <a:p>
             <a:r>
               <a:rPr lang="en-US" dirty="0"/>
-              <a:t>Süreyi tam tutun. Dışarıda dolaşın ama kritik vermeyin — bu bir ölçüm, ders değil.
-Sesli sorular sorun (yanıt beklemeden): Kaç parçadan oluşuyor? Parçalar nerede birleşiyor? En koyu yeri neresi? Neresi seni şaşırttı?
-Çizimleri toplayıp tarihleyin, kapalı bir zarfta saklayın.
-Yağmur ihtimaline karşı iç mekân yedeği: fakülte lobisinde bir nesne.</a:t>
+              <a:t>Dönemin mottosu. Süreç dosyası kuralı, “temiz dosya düşük not alır” maddesi ve ev tekrarı sözleşmesi hep bu cümleden çıkıyor.</a:t>
             </a:r>
             <a:endParaRPr lang="en-US" dirty="0"/>
           </a:p>
@@ -2918,7 +2921,10 @@
           <a:p>
             <a:r>
               <a:rPr lang="en-US" dirty="0"/>
-              <a:t>İzlenceyi ve rubriği bugün dağıtın — rubriğin ilk haftada paylaşılması ölçme kurgusunun bir parçası.</a:t>
+              <a:t>Metronom uygulamasını açın: 180 ve 150 BPM. Tempoyu öğrenci seçmesin, duysun.
+Reprodüksiyonları sırayla tek tek yansıtın; ikisi aynı anda ekranda olursa öğrenci karşılaştırır, taklit etmez.
+Süreyi siz tutun. Kutu başına 6 dakika; ilk 30 saniye kalem masada, sadece bakılır.
+Ayrıntı: 06-ustalarin-cizgileri-hoca-notlari.md</a:t>
             </a:r>
             <a:endParaRPr lang="en-US" dirty="0"/>
           </a:p>
@@ -2942,6 +2948,95 @@
             <a:fld id="{F7021451-1387-4CA6-816F-3879F97B5CBC}" type="slidenum">
               <a:rPr lang="en-US"/>
               <a:t>34</a:t>
+            </a:fld>
+            <a:endParaRPr lang="en-US"/>
+          </a:p>
+        </p:txBody>
+      </p:sp>
+    </p:spTree>
+    <p:extLst>
+      <p:ext uri="{BB962C8B-B14F-4D97-AF65-F5344CB8AC3E}">
+        <p14:creationId xmlns:p14="http://schemas.microsoft.com/office/powerpoint/2010/main" val="1024086991"/>
+      </p:ext>
+    </p:extLst>
+  </p:cSld>
+  <p:clrMapOvr>
+    <a:masterClrMapping/>
+  </p:clrMapOvr>
+</p:notes>
+</file>
+
+<file path=ppt/notesSlides/notesSlide35.xml><?xml version="1.0" encoding="utf-8"?>
+<p:notes xmlns:a="http://schemas.openxmlformats.org/drawingml/2006/main" xmlns:r="http://schemas.openxmlformats.org/officeDocument/2006/relationships" xmlns:p="http://schemas.openxmlformats.org/presentationml/2006/main">
+  <p:cSld>
+    <p:spTree>
+      <p:nvGrpSpPr>
+        <p:cNvPr id="1" name=""/>
+        <p:cNvGrpSpPr/>
+        <p:nvPr/>
+      </p:nvGrpSpPr>
+      <p:grpSpPr>
+        <a:xfrm>
+          <a:off x="0" y="0"/>
+          <a:ext cx="0" cy="0"/>
+          <a:chOff x="0" y="0"/>
+          <a:chExt cx="0" cy="0"/>
+        </a:xfrm>
+      </p:grpSpPr>
+      <p:sp>
+        <p:nvSpPr>
+          <p:cNvPr id="2" name="Slide Image Placeholder 1"/>
+          <p:cNvSpPr>
+            <a:spLocks noGrp="1" noRot="1" noChangeAspect="1"/>
+          </p:cNvSpPr>
+          <p:nvPr>
+            <p:ph type="sldImg"/>
+          </p:nvPr>
+        </p:nvSpPr>
+        <p:spPr/>
+      </p:sp>
+      <p:sp>
+        <p:nvSpPr>
+          <p:cNvPr id="3" name="Notes Placeholder 2"/>
+          <p:cNvSpPr>
+            <a:spLocks noGrp="1"/>
+          </p:cNvSpPr>
+          <p:nvPr>
+            <p:ph type="body" idx="1"/>
+          </p:nvPr>
+        </p:nvSpPr>
+        <p:spPr/>
+        <p:txBody>
+          <a:bodyPr/>
+          <a:lstStyle/>
+          <a:p>
+            <a:r>
+              <a:rPr lang="en-US" dirty="0"/>
+              <a:t>İzlenceyi bugün dağıtın ve ölçütleri ilk haftada paylaşın — bu, ölçme kurgusunun bir parçası.
+Bu hafta çizilen hafıza çizimini toplayıp tarihleyin ve saklayın: 14. haftada aynı protokol tekrarlanıp ikisi yan yana konacak.</a:t>
+            </a:r>
+            <a:endParaRPr lang="en-US" dirty="0"/>
+          </a:p>
+        </p:txBody>
+      </p:sp>
+      <p:sp>
+        <p:nvSpPr>
+          <p:cNvPr id="4" name="Slide Number Placeholder 3"/>
+          <p:cNvSpPr>
+            <a:spLocks noGrp="1"/>
+          </p:cNvSpPr>
+          <p:nvPr>
+            <p:ph type="sldNum" sz="quarter" idx="10"/>
+          </p:nvPr>
+        </p:nvSpPr>
+        <p:spPr/>
+        <p:txBody>
+          <a:bodyPr/>
+          <a:lstStyle/>
+          <a:p>
+            <a:fld id="{F7021451-1387-4CA6-816F-3879F97B5CBC}" type="slidenum">
+              <a:rPr lang="en-US"/>
+              <a:t>35</a:t>
             </a:fld>
             <a:endParaRPr lang="en-US"/>
           </a:p>
@@ -3852,7 +3947,7 @@
                 <a:ea typeface="Courier New" pitchFamily="34" charset="-122"/>
                 <a:cs typeface="Courier New" pitchFamily="34" charset="-120"/>
               </a:rPr>
-              <a:t>İÇ MİMARLIK LİSANS · 1. SINIF · 1. HAFTA</a:t>
+              <a:t>İÇ MİMARLIK VE ÇEVRE TASARIMI · IMC321 · 2026–27 GÜZ · 1. HAFTA</a:t>
             </a:r>
             <a:endParaRPr lang="en-US" sz="1300" dirty="0"/>
           </a:p>
@@ -3992,7 +4087,7 @@
                 <a:ea typeface="Courier New" pitchFamily="34" charset="-122"/>
                 <a:cs typeface="Courier New" pitchFamily="34" charset="-120"/>
               </a:rPr>
-              <a:t>9 adım  ·  4 evre  ·  14 hafta  ·  sınav yok</a:t>
+              <a:t>Perşembe 12.40–14.20  ·  Mahzen Üst Salon  ·  2 kredi / 4 AKTS  ·  seçmeli</a:t>
             </a:r>
             <a:endParaRPr lang="en-US" sz="1200" dirty="0"/>
           </a:p>
@@ -5476,7 +5571,7 @@
                 <a:ea typeface="Courier New" pitchFamily="34" charset="-122"/>
                 <a:cs typeface="Courier New" pitchFamily="34" charset="-120"/>
               </a:rPr>
-              <a:t>H1</a:t>
+              <a:t>H2</a:t>
             </a:r>
             <a:endParaRPr lang="en-US" sz="1000" dirty="0"/>
           </a:p>
@@ -6044,7 +6139,7 @@
                 <a:ea typeface="Courier New" pitchFamily="34" charset="-122"/>
                 <a:cs typeface="Courier New" pitchFamily="34" charset="-120"/>
               </a:rPr>
-              <a:t>H5</a:t>
+              <a:t>H6</a:t>
             </a:r>
             <a:endParaRPr lang="en-US" sz="1000" dirty="0"/>
           </a:p>
@@ -6186,7 +6281,7 @@
                 <a:ea typeface="Courier New" pitchFamily="34" charset="-122"/>
                 <a:cs typeface="Courier New" pitchFamily="34" charset="-120"/>
               </a:rPr>
-              <a:t>H6</a:t>
+              <a:t>H7</a:t>
             </a:r>
             <a:endParaRPr lang="en-US" sz="1000" dirty="0"/>
           </a:p>
@@ -6328,7 +6423,7 @@
                 <a:ea typeface="Courier New" pitchFamily="34" charset="-122"/>
                 <a:cs typeface="Courier New" pitchFamily="34" charset="-120"/>
               </a:rPr>
-              <a:t>H8</a:t>
+              <a:t>H9</a:t>
             </a:r>
             <a:endParaRPr lang="en-US" sz="1000" dirty="0"/>
           </a:p>
@@ -6470,7 +6565,7 @@
                 <a:ea typeface="Courier New" pitchFamily="34" charset="-122"/>
                 <a:cs typeface="Courier New" pitchFamily="34" charset="-120"/>
               </a:rPr>
-              <a:t>H9</a:t>
+              <a:t>H10</a:t>
             </a:r>
             <a:endParaRPr lang="en-US" sz="1000" dirty="0"/>
           </a:p>
@@ -6713,7 +6808,7 @@
                 <a:ea typeface="Courier New" pitchFamily="34" charset="-122"/>
                 <a:cs typeface="Courier New" pitchFamily="34" charset="-120"/>
               </a:rPr>
-              <a:t>H1–2</a:t>
+              <a:t>H2</a:t>
             </a:r>
             <a:endParaRPr lang="en-US" sz="1000" dirty="0"/>
           </a:p>
@@ -6814,7 +6909,7 @@
                 <a:ea typeface="Courier New" pitchFamily="34" charset="-122"/>
                 <a:cs typeface="Courier New" pitchFamily="34" charset="-120"/>
               </a:rPr>
-              <a:t>H3–6</a:t>
+              <a:t>H3–7</a:t>
             </a:r>
             <a:endParaRPr lang="en-US" sz="1000" dirty="0"/>
           </a:p>
@@ -6915,7 +7010,7 @@
                 <a:ea typeface="Courier New" pitchFamily="34" charset="-122"/>
                 <a:cs typeface="Courier New" pitchFamily="34" charset="-120"/>
               </a:rPr>
-              <a:t>H8–9</a:t>
+              <a:t>H9–10</a:t>
             </a:r>
             <a:endParaRPr lang="en-US" sz="1000" dirty="0"/>
           </a:p>
@@ -7016,7 +7111,7 @@
                 <a:ea typeface="Courier New" pitchFamily="34" charset="-122"/>
                 <a:cs typeface="Courier New" pitchFamily="34" charset="-120"/>
               </a:rPr>
-              <a:t>H10–14</a:t>
+              <a:t>H11–14</a:t>
             </a:r>
             <a:endParaRPr lang="en-US" sz="1000" dirty="0"/>
           </a:p>
@@ -7055,7 +7150,7 @@
                 <a:ea typeface="Calibri" pitchFamily="34" charset="-122"/>
                 <a:cs typeface="Calibri" pitchFamily="34" charset="-120"/>
               </a:rPr>
-              <a:t>7. ve 11. haftalar teslim haftalarıdır.</a:t>
+              <a:t>5. hafta (29 Ekim) ders yok  ·  8. hafta quiz.</a:t>
             </a:r>
             <a:endParaRPr lang="en-US" sz="1400" dirty="0"/>
           </a:p>
@@ -7705,7 +7800,7 @@
                 <a:ea typeface="Courier New" pitchFamily="34" charset="-122"/>
                 <a:cs typeface="Courier New" pitchFamily="34" charset="-120"/>
               </a:rPr>
-              <a:t>Hafta 3–6</a:t>
+              <a:t>Hafta 3–7</a:t>
             </a:r>
             <a:endParaRPr lang="en-US" sz="1100" dirty="0"/>
           </a:p>
@@ -7954,7 +8049,7 @@
                 <a:ea typeface="Courier New" pitchFamily="34" charset="-122"/>
                 <a:cs typeface="Courier New" pitchFamily="34" charset="-120"/>
               </a:rPr>
-              <a:t>Hafta 8–9</a:t>
+              <a:t>Hafta 9–10</a:t>
             </a:r>
             <a:endParaRPr lang="en-US" sz="1100" dirty="0"/>
           </a:p>
@@ -8164,7 +8259,7 @@
                 <a:ea typeface="Courier New" pitchFamily="34" charset="-122"/>
                 <a:cs typeface="Courier New" pitchFamily="34" charset="-120"/>
               </a:rPr>
-              <a:t>natürmort · figür · katman</a:t>
+              <a:t>natürmort · mimari gösterim · katman</a:t>
             </a:r>
             <a:endParaRPr lang="en-US" sz="1000" dirty="0"/>
           </a:p>
@@ -8203,7 +8298,7 @@
                 <a:ea typeface="Courier New" pitchFamily="34" charset="-122"/>
                 <a:cs typeface="Courier New" pitchFamily="34" charset="-120"/>
               </a:rPr>
-              <a:t>Hafta 10–14</a:t>
+              <a:t>Hafta 11–14</a:t>
             </a:r>
             <a:endParaRPr lang="en-US" sz="1100" dirty="0"/>
           </a:p>
@@ -8539,7 +8634,7 @@
                 <a:ea typeface="Courier New" pitchFamily="34" charset="-122"/>
                 <a:cs typeface="Courier New" pitchFamily="34" charset="-120"/>
               </a:rPr>
-              <a:t>Hafta 5</a:t>
+              <a:t>Hafta 6</a:t>
             </a:r>
             <a:endParaRPr lang="en-US" sz="1200" dirty="0"/>
           </a:p>
@@ -8720,7 +8815,7 @@
                 <a:ea typeface="Courier New" pitchFamily="34" charset="-122"/>
                 <a:cs typeface="Courier New" pitchFamily="34" charset="-120"/>
               </a:rPr>
-              <a:t>Hafta 5</a:t>
+              <a:t>Hafta 6</a:t>
             </a:r>
             <a:endParaRPr lang="en-US" sz="1200" dirty="0"/>
           </a:p>
@@ -8901,7 +8996,7 @@
                 <a:ea typeface="Courier New" pitchFamily="34" charset="-122"/>
                 <a:cs typeface="Courier New" pitchFamily="34" charset="-120"/>
               </a:rPr>
-              <a:t>Hafta 3 · 4 · 6</a:t>
+              <a:t>Hafta 3 · 4 · 7</a:t>
             </a:r>
             <a:endParaRPr lang="en-US" sz="1200" dirty="0"/>
           </a:p>
@@ -9082,7 +9177,7 @@
                 <a:ea typeface="Courier New" pitchFamily="34" charset="-122"/>
                 <a:cs typeface="Courier New" pitchFamily="34" charset="-120"/>
               </a:rPr>
-              <a:t>Hafta 8 · 9</a:t>
+              <a:t>Hafta 9 · 10</a:t>
             </a:r>
             <a:endParaRPr lang="en-US" sz="1200" dirty="0"/>
           </a:p>
@@ -9224,7 +9319,7 @@
                 <a:ea typeface="Calibri" pitchFamily="34" charset="-122"/>
                 <a:cs typeface="Calibri" pitchFamily="34" charset="-120"/>
               </a:rPr>
-              <a:t>natürmort, figür, katman</a:t>
+              <a:t>natürmort, mimari gösterim, katman</a:t>
             </a:r>
             <a:endParaRPr lang="en-US" sz="1500" dirty="0"/>
           </a:p>
@@ -9263,7 +9358,7 @@
                 <a:ea typeface="Courier New" pitchFamily="34" charset="-122"/>
                 <a:cs typeface="Courier New" pitchFamily="34" charset="-120"/>
               </a:rPr>
-              <a:t>Hafta 10 · 12 · 13</a:t>
+              <a:t>Hafta 11 · 12 · 13</a:t>
             </a:r>
             <a:endParaRPr lang="en-US" sz="1200" dirty="0"/>
           </a:p>
@@ -9645,7 +9740,7 @@
                 <a:ea typeface="Courier New" pitchFamily="34" charset="-122"/>
                 <a:cs typeface="Courier New" pitchFamily="34" charset="-120"/>
               </a:rPr>
-              <a:t>Bugün dışarı çıktığımızda tam olarak bunu göreceğiz:</a:t>
+              <a:t>Bu haftanın ev ödevinde tam olarak bunu göreceksiniz:</a:t>
             </a:r>
             <a:endParaRPr lang="en-US" sz="1300" dirty="0"/>
           </a:p>
@@ -14117,7 +14212,7 @@
                 <a:ea typeface="Calibri" pitchFamily="34" charset="-122"/>
                 <a:cs typeface="Calibri" pitchFamily="34" charset="-120"/>
               </a:rPr>
-              <a:t>14 hafta, iki teslim, bir sergi</a:t>
+              <a:t>14 hafta, bir quiz, iki teslim</a:t>
             </a:r>
             <a:endParaRPr lang="en-US" sz="1700" dirty="0"/>
           </a:p>
@@ -14308,7 +14403,7 @@
                 <a:ea typeface="Calibri" pitchFamily="34" charset="-122"/>
                 <a:cs typeface="Calibri" pitchFamily="34" charset="-120"/>
               </a:rPr>
-              <a:t>Giriş, kalem tutma, dışarıda gözlem</a:t>
+              <a:t>Giriş + sunum · 1 Ekim</a:t>
             </a:r>
             <a:endParaRPr lang="en-US" sz="1500" dirty="0"/>
           </a:p>
@@ -14409,7 +14504,7 @@
                 <a:ea typeface="Calibri" pitchFamily="34" charset="-122"/>
                 <a:cs typeface="Calibri" pitchFamily="34" charset="-120"/>
               </a:rPr>
-              <a:t>Nokta ve çizgi</a:t>
+              <a:t>Nokta ve çizgi · Ödev 1</a:t>
             </a:r>
             <a:endParaRPr lang="en-US" sz="1500" dirty="0"/>
           </a:p>
@@ -14510,7 +14605,7 @@
                 <a:ea typeface="Calibri" pitchFamily="34" charset="-122"/>
                 <a:cs typeface="Calibri" pitchFamily="34" charset="-120"/>
               </a:rPr>
-              <a:t>Kare, elips, üçgen</a:t>
+              <a:t>Düzlem: kare, elips, üçgen</a:t>
             </a:r>
             <a:endParaRPr lang="en-US" sz="1500" dirty="0"/>
           </a:p>
@@ -14611,7 +14706,7 @@
                 <a:ea typeface="Calibri" pitchFamily="34" charset="-122"/>
                 <a:cs typeface="Calibri" pitchFamily="34" charset="-120"/>
               </a:rPr>
-              <a:t>Hacim + dış zarf yöntemi</a:t>
+              <a:t>Hacim + dış zarf · Ödev 2</a:t>
             </a:r>
             <a:endParaRPr lang="en-US" sz="1500" dirty="0"/>
           </a:p>
@@ -14667,7 +14762,7 @@
             <a:r>
               <a:rPr lang="en-US" sz="1300" b="1" dirty="0">
                 <a:solidFill>
-                  <a:srgbClr val="959B9F"/>
+                  <a:srgbClr val="2A6289"/>
                 </a:solidFill>
                 <a:latin typeface="Courier New" pitchFamily="34" charset="0"/>
                 <a:ea typeface="Courier New" pitchFamily="34" charset="-122"/>
@@ -14704,15 +14799,15 @@
               <a:buNone/>
             </a:pPr>
             <a:r>
-              <a:rPr lang="en-US" sz="1500" dirty="0">
-                <a:solidFill>
-                  <a:srgbClr val="1B1F24"/>
+              <a:rPr lang="en-US" sz="1500" b="1" dirty="0">
+                <a:solidFill>
+                  <a:srgbClr val="2A6289"/>
                 </a:solidFill>
                 <a:latin typeface="Calibri" pitchFamily="34" charset="0"/>
                 <a:ea typeface="Calibri" pitchFamily="34" charset="-122"/>
                 <a:cs typeface="Calibri" pitchFamily="34" charset="-120"/>
               </a:rPr>
-              <a:t>Kontur ve dinamik çizim</a:t>
+              <a:t>29 EKİM — DERS YOK</a:t>
             </a:r>
             <a:endParaRPr lang="en-US" sz="1500" dirty="0"/>
           </a:p>
@@ -14813,7 +14908,7 @@
                 <a:ea typeface="Calibri" pitchFamily="34" charset="-122"/>
                 <a:cs typeface="Calibri" pitchFamily="34" charset="-120"/>
               </a:rPr>
-              <a:t>Perspektif: göz hizası</a:t>
+              <a:t>Kontur ve dinamik çizim</a:t>
             </a:r>
             <a:endParaRPr lang="en-US" sz="1500" dirty="0"/>
           </a:p>
@@ -14869,7 +14964,7 @@
             <a:r>
               <a:rPr lang="en-US" sz="1300" b="1" dirty="0">
                 <a:solidFill>
-                  <a:srgbClr val="2A6289"/>
+                  <a:srgbClr val="959B9F"/>
                 </a:solidFill>
                 <a:latin typeface="Courier New" pitchFamily="34" charset="0"/>
                 <a:ea typeface="Courier New" pitchFamily="34" charset="-122"/>
@@ -14906,15 +15001,15 @@
               <a:buNone/>
             </a:pPr>
             <a:r>
-              <a:rPr lang="en-US" sz="1500" b="1" dirty="0">
-                <a:solidFill>
-                  <a:srgbClr val="2A6289"/>
+              <a:rPr lang="en-US" sz="1500" dirty="0">
+                <a:solidFill>
+                  <a:srgbClr val="1B1F24"/>
                 </a:solidFill>
                 <a:latin typeface="Calibri" pitchFamily="34" charset="0"/>
                 <a:ea typeface="Calibri" pitchFamily="34" charset="-122"/>
                 <a:cs typeface="Calibri" pitchFamily="34" charset="-120"/>
               </a:rPr>
-              <a:t>VİZE 1 TESLİMİ</a:t>
+              <a:t>Perspektif: göz hizası</a:t>
             </a:r>
             <a:endParaRPr lang="en-US" sz="1500" dirty="0"/>
           </a:p>
@@ -14970,7 +15065,7 @@
             <a:r>
               <a:rPr lang="en-US" sz="1300" b="1" dirty="0">
                 <a:solidFill>
-                  <a:srgbClr val="959B9F"/>
+                  <a:srgbClr val="2A6289"/>
                 </a:solidFill>
                 <a:latin typeface="Courier New" pitchFamily="34" charset="0"/>
                 <a:ea typeface="Courier New" pitchFamily="34" charset="-122"/>
@@ -15007,15 +15102,15 @@
               <a:buNone/>
             </a:pPr>
             <a:r>
-              <a:rPr lang="en-US" sz="1500" dirty="0">
-                <a:solidFill>
-                  <a:srgbClr val="1B1F24"/>
+              <a:rPr lang="en-US" sz="1500" b="1" dirty="0">
+                <a:solidFill>
+                  <a:srgbClr val="2A6289"/>
                 </a:solidFill>
                 <a:latin typeface="Calibri" pitchFamily="34" charset="0"/>
                 <a:ea typeface="Calibri" pitchFamily="34" charset="-122"/>
                 <a:cs typeface="Calibri" pitchFamily="34" charset="-120"/>
               </a:rPr>
-              <a:t>Tarama ve ton</a:t>
+              <a:t>QUIZ · 19 Kasım</a:t>
             </a:r>
             <a:endParaRPr lang="en-US" sz="1500" dirty="0"/>
           </a:p>
@@ -15116,7 +15211,7 @@
                 <a:ea typeface="Calibri" pitchFamily="34" charset="-122"/>
                 <a:cs typeface="Calibri" pitchFamily="34" charset="-120"/>
               </a:rPr>
-              <a:t>Işık ve gölge</a:t>
+              <a:t>Doku: tarama teknikleri</a:t>
             </a:r>
             <a:endParaRPr lang="en-US" sz="1500" dirty="0"/>
           </a:p>
@@ -15217,7 +15312,7 @@
                 <a:ea typeface="Calibri" pitchFamily="34" charset="-122"/>
                 <a:cs typeface="Calibri" pitchFamily="34" charset="-120"/>
               </a:rPr>
-              <a:t>Natürmort</a:t>
+              <a:t>Işık ve gölge · Ödev 3</a:t>
             </a:r>
             <a:endParaRPr lang="en-US" sz="1500" dirty="0"/>
           </a:p>
@@ -15273,7 +15368,7 @@
             <a:r>
               <a:rPr lang="en-US" sz="1300" b="1" dirty="0">
                 <a:solidFill>
-                  <a:srgbClr val="2A6289"/>
+                  <a:srgbClr val="959B9F"/>
                 </a:solidFill>
                 <a:latin typeface="Courier New" pitchFamily="34" charset="0"/>
                 <a:ea typeface="Courier New" pitchFamily="34" charset="-122"/>
@@ -15310,15 +15405,15 @@
               <a:buNone/>
             </a:pPr>
             <a:r>
-              <a:rPr lang="en-US" sz="1500" b="1" dirty="0">
-                <a:solidFill>
-                  <a:srgbClr val="2A6289"/>
+              <a:rPr lang="en-US" sz="1500" dirty="0">
+                <a:solidFill>
+                  <a:srgbClr val="1B1F24"/>
                 </a:solidFill>
                 <a:latin typeface="Calibri" pitchFamily="34" charset="0"/>
                 <a:ea typeface="Calibri" pitchFamily="34" charset="-122"/>
                 <a:cs typeface="Calibri" pitchFamily="34" charset="-120"/>
               </a:rPr>
-              <a:t>VİZE 2</a:t>
+              <a:t>Natürmort</a:t>
             </a:r>
             <a:endParaRPr lang="en-US" sz="1500" dirty="0"/>
           </a:p>
@@ -15419,7 +15514,7 @@
                 <a:ea typeface="Calibri" pitchFamily="34" charset="-122"/>
                 <a:cs typeface="Calibri" pitchFamily="34" charset="-120"/>
               </a:rPr>
-              <a:t>İnsan çizimi ve mimari gösterimler</a:t>
+              <a:t>Mimari gösterimler · Ödev 4</a:t>
             </a:r>
             <a:endParaRPr lang="en-US" sz="1500" dirty="0"/>
           </a:p>
@@ -15520,7 +15615,7 @@
                 <a:ea typeface="Calibri" pitchFamily="34" charset="-122"/>
                 <a:cs typeface="Calibri" pitchFamily="34" charset="-120"/>
               </a:rPr>
-              <a:t>Diyorama katmanları + kuru boya</a:t>
+              <a:t>Katmanlı temsil + kuru boya</a:t>
             </a:r>
             <a:endParaRPr lang="en-US" sz="1500" dirty="0"/>
           </a:p>
@@ -15621,7 +15716,7 @@
                 <a:ea typeface="Calibri" pitchFamily="34" charset="-122"/>
                 <a:cs typeface="Calibri" pitchFamily="34" charset="-120"/>
               </a:rPr>
-              <a:t>FİNAL TESLİMİ ve sergi</a:t>
+              <a:t>Final projesi stüdyosu</a:t>
             </a:r>
             <a:endParaRPr lang="en-US" sz="1500" dirty="0"/>
           </a:p>
@@ -15649,6 +15744,45 @@
             <a:prstDash val="solid"/>
           </a:ln>
         </p:spPr>
+      </p:sp>
+      <p:sp>
+        <p:nvSpPr>
+          <p:cNvPr id="46" name="Text 44"/>
+          <p:cNvSpPr txBox="1"/>
+          <p:nvPr/>
+        </p:nvSpPr>
+        <p:spPr>
+          <a:xfrm>
+            <a:off x="777240" y="5943600"/>
+            <a:ext cx="10634472" cy="320040"/>
+          </a:xfrm>
+          <a:prstGeom prst="rect">
+            <a:avLst/>
+          </a:prstGeom>
+          <a:noFill/>
+          <a:ln/>
+        </p:spPr>
+        <p:txBody>
+          <a:bodyPr wrap="square" lIns="0" tIns="0" rIns="0" bIns="0" rtlCol="0" anchor="ctr"/>
+          <a:lstStyle/>
+          <a:p>
+            <a:pPr indent="0" marL="0">
+              <a:buNone/>
+            </a:pPr>
+            <a:r>
+              <a:rPr lang="en-US" sz="1400" i="1" dirty="0">
+                <a:solidFill>
+                  <a:srgbClr val="2A6289"/>
+                </a:solidFill>
+                <a:latin typeface="Calibri" pitchFamily="34" charset="0"/>
+                <a:ea typeface="Calibri" pitchFamily="34" charset="-122"/>
+                <a:cs typeface="Calibri" pitchFamily="34" charset="-120"/>
+              </a:rPr>
+              <a:t>Final projesi teslimi: fakülte sınav takvimiyle duyurulacak final sınav haftasında.</a:t>
+            </a:r>
+            <a:endParaRPr lang="en-US" sz="1400" dirty="0"/>
+          </a:p>
+        </p:txBody>
       </p:sp>
     </p:spTree>
   </p:cSld>
@@ -15757,7 +15891,7 @@
                 <a:ea typeface="Century Schoolbook" pitchFamily="34" charset="-122"/>
                 <a:cs typeface="Century Schoolbook" pitchFamily="34" charset="-120"/>
               </a:rPr>
-              <a:t>Sınav yok. Üç teslim var.</a:t>
+              <a:t>Üç bileşen. İkisi teslim, biri quiz.</a:t>
             </a:r>
             <a:endParaRPr lang="en-US" sz="3400" dirty="0"/>
           </a:p>
@@ -15772,19 +15906,22 @@
         <p:spPr>
           <a:xfrm>
             <a:off x="777240" y="1783080"/>
-            <a:ext cx="10634472" cy="457200"/>
-          </a:xfrm>
-          <a:prstGeom prst="rect">
-            <a:avLst/>
-          </a:prstGeom>
-          <a:noFill/>
-          <a:ln/>
-        </p:spPr>
-        <p:txBody>
-          <a:bodyPr wrap="square" lIns="0" tIns="0" rIns="0" bIns="0" rtlCol="0" anchor="ctr"/>
-          <a:lstStyle/>
-          <a:p>
-            <a:pPr indent="0" marL="0">
+            <a:ext cx="10634472" cy="548640"/>
+          </a:xfrm>
+          <a:prstGeom prst="rect">
+            <a:avLst/>
+          </a:prstGeom>
+          <a:noFill/>
+          <a:ln/>
+        </p:spPr>
+        <p:txBody>
+          <a:bodyPr wrap="square" lIns="0" tIns="0" rIns="0" bIns="0" rtlCol="0" anchor="ctr"/>
+          <a:lstStyle/>
+          <a:p>
+            <a:pPr indent="0" marL="0">
+              <a:lnSpc>
+                <a:spcPts val="2100"/>
+              </a:lnSpc>
               <a:buNone/>
             </a:pPr>
             <a:r>
@@ -15796,7 +15933,7 @@
                 <a:ea typeface="Calibri" pitchFamily="34" charset="-122"/>
                 <a:cs typeface="Calibri" pitchFamily="34" charset="-120"/>
               </a:rPr>
-              <a:t>Hiçbirinde sınav salonu, kapalı kapı veya süre baskısı yok. Vize 2’nin ilk yarısı sınıfta çizim yapılan bir bölümdür — sınav değil, kontrollü üretim.</a:t>
+              <a:t>Dönemin tamamı bir dönem projesi (portfolyo), bir quiz ve bir final projesi üzerinden değerlendirilir. Not verirken gözlem doğruluğu, el kontrolü, teknik yetkinlik, kavramsal karar ve süreç düzenliliği birlikte gözetilir.</a:t>
             </a:r>
             <a:endParaRPr lang="en-US" sz="1500" dirty="0"/>
           </a:p>
@@ -15810,8 +15947,8 @@
         </p:nvSpPr>
         <p:spPr>
           <a:xfrm>
-            <a:off x="777240" y="2377440"/>
-            <a:ext cx="3319272" cy="2286000"/>
+            <a:off x="777240" y="2487168"/>
+            <a:ext cx="3319272" cy="2487168"/>
           </a:xfrm>
           <a:prstGeom prst="rect">
             <a:avLst/>
@@ -15835,7 +15972,7 @@
         </p:nvSpPr>
         <p:spPr>
           <a:xfrm>
-            <a:off x="1069848" y="2560320"/>
+            <a:off x="1069848" y="2670048"/>
             <a:ext cx="2011680" cy="685800"/>
           </a:xfrm>
           <a:prstGeom prst="rect">
@@ -15860,7 +15997,7 @@
                 <a:ea typeface="Courier New" pitchFamily="34" charset="-122"/>
                 <a:cs typeface="Courier New" pitchFamily="34" charset="-120"/>
               </a:rPr>
-              <a:t>%20</a:t>
+              <a:t>%40</a:t>
             </a:r>
             <a:endParaRPr lang="en-US" sz="4000" dirty="0"/>
           </a:p>
@@ -15874,8 +16011,8 @@
         </p:nvSpPr>
         <p:spPr>
           <a:xfrm>
-            <a:off x="1069848" y="3346704"/>
-            <a:ext cx="2651760" cy="274320"/>
+            <a:off x="1069848" y="3456432"/>
+            <a:ext cx="2834640" cy="274320"/>
           </a:xfrm>
           <a:prstGeom prst="rect">
             <a:avLst/>
@@ -15899,7 +16036,7 @@
                 <a:ea typeface="Courier New" pitchFamily="34" charset="-122"/>
                 <a:cs typeface="Courier New" pitchFamily="34" charset="-120"/>
               </a:rPr>
-              <a:t>VİZE 1</a:t>
+              <a:t>DÖNEM PROJESİ</a:t>
             </a:r>
             <a:endParaRPr lang="en-US" sz="1100" dirty="0"/>
           </a:p>
@@ -15913,8 +16050,8 @@
         </p:nvSpPr>
         <p:spPr>
           <a:xfrm>
-            <a:off x="1069848" y="3657600"/>
-            <a:ext cx="2697480" cy="594360"/>
+            <a:off x="1069848" y="3767328"/>
+            <a:ext cx="2724912" cy="822960"/>
           </a:xfrm>
           <a:prstGeom prst="rect">
             <a:avLst/>
@@ -15928,12 +16065,12 @@
           <a:p>
             <a:pPr indent="0" marL="0">
               <a:lnSpc>
-                <a:spcPts val="2100"/>
+                <a:spcPts val="2000"/>
               </a:lnSpc>
               <a:buNone/>
             </a:pPr>
             <a:r>
-              <a:rPr lang="en-US" sz="1600" b="1" dirty="0">
+              <a:rPr lang="en-US" sz="1500" b="1" dirty="0">
                 <a:solidFill>
                   <a:srgbClr val="1B1F24"/>
                 </a:solidFill>
@@ -15941,9 +16078,9 @@
                 <a:ea typeface="Calibri" pitchFamily="34" charset="-122"/>
                 <a:cs typeface="Calibri" pitchFamily="34" charset="-120"/>
               </a:rPr>
-              <a:t>Küp serisi + dönem dosyası</a:t>
-            </a:r>
-            <a:endParaRPr lang="en-US" sz="1600" dirty="0"/>
+              <a:t>Portfolyo: 4 ödev + 2 ev tekrarı + derste üretilen çizimler</a:t>
+            </a:r>
+            <a:endParaRPr lang="en-US" sz="1500" dirty="0"/>
           </a:p>
         </p:txBody>
       </p:sp>
@@ -15955,8 +16092,8 @@
         </p:nvSpPr>
         <p:spPr>
           <a:xfrm>
-            <a:off x="1069848" y="4315968"/>
-            <a:ext cx="2697480" cy="274320"/>
+            <a:off x="1069848" y="4617720"/>
+            <a:ext cx="2724912" cy="274320"/>
           </a:xfrm>
           <a:prstGeom prst="rect">
             <a:avLst/>
@@ -15980,7 +16117,7 @@
                 <a:ea typeface="Courier New" pitchFamily="34" charset="-122"/>
                 <a:cs typeface="Courier New" pitchFamily="34" charset="-120"/>
               </a:rPr>
-              <a:t>Hafta 7</a:t>
+              <a:t>Hafta 14</a:t>
             </a:r>
             <a:endParaRPr lang="en-US" sz="1100" dirty="0"/>
           </a:p>
@@ -15994,8 +16131,8 @@
         </p:nvSpPr>
         <p:spPr>
           <a:xfrm>
-            <a:off x="4389120" y="2377440"/>
-            <a:ext cx="3319272" cy="2286000"/>
+            <a:off x="4389120" y="2487168"/>
+            <a:ext cx="3319272" cy="2487168"/>
           </a:xfrm>
           <a:prstGeom prst="rect">
             <a:avLst/>
@@ -16019,7 +16156,7 @@
         </p:nvSpPr>
         <p:spPr>
           <a:xfrm>
-            <a:off x="4681728" y="2560320"/>
+            <a:off x="4681728" y="2670048"/>
             <a:ext cx="2011680" cy="685800"/>
           </a:xfrm>
           <a:prstGeom prst="rect">
@@ -16058,8 +16195,8 @@
         </p:nvSpPr>
         <p:spPr>
           <a:xfrm>
-            <a:off x="4681728" y="3346704"/>
-            <a:ext cx="2651760" cy="274320"/>
+            <a:off x="4681728" y="3456432"/>
+            <a:ext cx="2834640" cy="274320"/>
           </a:xfrm>
           <a:prstGeom prst="rect">
             <a:avLst/>
@@ -16083,7 +16220,7 @@
                 <a:ea typeface="Courier New" pitchFamily="34" charset="-122"/>
                 <a:cs typeface="Courier New" pitchFamily="34" charset="-120"/>
               </a:rPr>
-              <a:t>VİZE 2</a:t>
+              <a:t>QUIZ</a:t>
             </a:r>
             <a:endParaRPr lang="en-US" sz="1100" dirty="0"/>
           </a:p>
@@ -16097,8 +16234,8 @@
         </p:nvSpPr>
         <p:spPr>
           <a:xfrm>
-            <a:off x="4681728" y="3657600"/>
-            <a:ext cx="2697480" cy="594360"/>
+            <a:off x="4681728" y="3767328"/>
+            <a:ext cx="2724912" cy="822960"/>
           </a:xfrm>
           <a:prstGeom prst="rect">
             <a:avLst/>
@@ -16112,12 +16249,12 @@
           <a:p>
             <a:pPr indent="0" marL="0">
               <a:lnSpc>
-                <a:spcPts val="2100"/>
+                <a:spcPts val="2000"/>
               </a:lnSpc>
               <a:buNone/>
             </a:pPr>
             <a:r>
-              <a:rPr lang="en-US" sz="1600" b="1" dirty="0">
+              <a:rPr lang="en-US" sz="1500" b="1" dirty="0">
                 <a:solidFill>
                   <a:srgbClr val="1B1F24"/>
                 </a:solidFill>
@@ -16125,9 +16262,9 @@
                 <a:ea typeface="Calibri" pitchFamily="34" charset="-122"/>
                 <a:cs typeface="Calibri" pitchFamily="34" charset="-120"/>
               </a:rPr>
-              <a:t>Yerinde çizim + dosya</a:t>
-            </a:r>
-            <a:endParaRPr lang="en-US" sz="1600" dirty="0"/>
+              <a:t>Yüz yüze, uygulamalı; ilk altı haftanın konuları</a:t>
+            </a:r>
+            <a:endParaRPr lang="en-US" sz="1500" dirty="0"/>
           </a:p>
         </p:txBody>
       </p:sp>
@@ -16139,8 +16276,8 @@
         </p:nvSpPr>
         <p:spPr>
           <a:xfrm>
-            <a:off x="4681728" y="4315968"/>
-            <a:ext cx="2697480" cy="274320"/>
+            <a:off x="4681728" y="4617720"/>
+            <a:ext cx="2724912" cy="274320"/>
           </a:xfrm>
           <a:prstGeom prst="rect">
             <a:avLst/>
@@ -16164,7 +16301,7 @@
                 <a:ea typeface="Courier New" pitchFamily="34" charset="-122"/>
                 <a:cs typeface="Courier New" pitchFamily="34" charset="-120"/>
               </a:rPr>
-              <a:t>Hafta 11</a:t>
+              <a:t>Hafta 8 · 19 Kasım</a:t>
             </a:r>
             <a:endParaRPr lang="en-US" sz="1100" dirty="0"/>
           </a:p>
@@ -16178,8 +16315,8 @@
         </p:nvSpPr>
         <p:spPr>
           <a:xfrm>
-            <a:off x="8001000" y="2377440"/>
-            <a:ext cx="3319272" cy="2286000"/>
+            <a:off x="8001000" y="2487168"/>
+            <a:ext cx="3319272" cy="2487168"/>
           </a:xfrm>
           <a:prstGeom prst="rect">
             <a:avLst/>
@@ -16203,7 +16340,7 @@
         </p:nvSpPr>
         <p:spPr>
           <a:xfrm>
-            <a:off x="8293608" y="2560320"/>
+            <a:off x="8293608" y="2670048"/>
             <a:ext cx="2011680" cy="685800"/>
           </a:xfrm>
           <a:prstGeom prst="rect">
@@ -16228,7 +16365,7 @@
                 <a:ea typeface="Courier New" pitchFamily="34" charset="-122"/>
                 <a:cs typeface="Courier New" pitchFamily="34" charset="-120"/>
               </a:rPr>
-              <a:t>%30</a:t>
+              <a:t>%40</a:t>
             </a:r>
             <a:endParaRPr lang="en-US" sz="4000" dirty="0"/>
           </a:p>
@@ -16242,8 +16379,8 @@
         </p:nvSpPr>
         <p:spPr>
           <a:xfrm>
-            <a:off x="8293608" y="3346704"/>
-            <a:ext cx="2651760" cy="274320"/>
+            <a:off x="8293608" y="3456432"/>
+            <a:ext cx="2834640" cy="274320"/>
           </a:xfrm>
           <a:prstGeom prst="rect">
             <a:avLst/>
@@ -16267,7 +16404,7 @@
                 <a:ea typeface="Courier New" pitchFamily="34" charset="-122"/>
                 <a:cs typeface="Courier New" pitchFamily="34" charset="-120"/>
               </a:rPr>
-              <a:t>FİNAL</a:t>
+              <a:t>FİNAL PROJESİ</a:t>
             </a:r>
             <a:endParaRPr lang="en-US" sz="1100" dirty="0"/>
           </a:p>
@@ -16281,8 +16418,8 @@
         </p:nvSpPr>
         <p:spPr>
           <a:xfrm>
-            <a:off x="8293608" y="3657600"/>
-            <a:ext cx="2697480" cy="594360"/>
+            <a:off x="8293608" y="3767328"/>
+            <a:ext cx="2724912" cy="822960"/>
           </a:xfrm>
           <a:prstGeom prst="rect">
             <a:avLst/>
@@ -16296,12 +16433,12 @@
           <a:p>
             <a:pPr indent="0" marL="0">
               <a:lnSpc>
-                <a:spcPts val="2100"/>
+                <a:spcPts val="2000"/>
               </a:lnSpc>
               <a:buNone/>
             </a:pPr>
             <a:r>
-              <a:rPr lang="en-US" sz="1600" b="1" dirty="0">
+              <a:rPr lang="en-US" sz="1500" b="1" dirty="0">
                 <a:solidFill>
                   <a:srgbClr val="1B1F24"/>
                 </a:solidFill>
@@ -16309,9 +16446,9 @@
                 <a:ea typeface="Calibri" pitchFamily="34" charset="-122"/>
                 <a:cs typeface="Calibri" pitchFamily="34" charset="-120"/>
               </a:rPr>
-              <a:t>Katman diyoraması + sergi</a:t>
-            </a:r>
-            <a:endParaRPr lang="en-US" sz="1600" dirty="0"/>
+              <a:t>Katmanlı mekân temsili</a:t>
+            </a:r>
+            <a:endParaRPr lang="en-US" sz="1500" dirty="0"/>
           </a:p>
         </p:txBody>
       </p:sp>
@@ -16323,8 +16460,8 @@
         </p:nvSpPr>
         <p:spPr>
           <a:xfrm>
-            <a:off x="8293608" y="4315968"/>
-            <a:ext cx="2697480" cy="274320"/>
+            <a:off x="8293608" y="4617720"/>
+            <a:ext cx="2724912" cy="274320"/>
           </a:xfrm>
           <a:prstGeom prst="rect">
             <a:avLst/>
@@ -16348,7 +16485,7 @@
                 <a:ea typeface="Courier New" pitchFamily="34" charset="-122"/>
                 <a:cs typeface="Courier New" pitchFamily="34" charset="-120"/>
               </a:rPr>
-              <a:t>Hafta 14</a:t>
+              <a:t>Final sınav haftası</a:t>
             </a:r>
             <a:endParaRPr lang="en-US" sz="1100" dirty="0"/>
           </a:p>
@@ -16362,24 +16499,24 @@
         </p:nvSpPr>
         <p:spPr>
           <a:xfrm>
-            <a:off x="777240" y="4983480"/>
-            <a:ext cx="10634472" cy="365760"/>
-          </a:xfrm>
-          <a:prstGeom prst="rect">
-            <a:avLst/>
-          </a:prstGeom>
-          <a:noFill/>
-          <a:ln/>
-        </p:spPr>
-        <p:txBody>
-          <a:bodyPr wrap="square" lIns="0" tIns="0" rIns="0" bIns="0" rtlCol="0" anchor="ctr"/>
-          <a:lstStyle/>
-          <a:p>
-            <a:pPr indent="0" marL="0">
-              <a:buNone/>
-            </a:pPr>
-            <a:r>
-              <a:rPr lang="en-US" sz="1500" dirty="0">
+            <a:off x="777240" y="5230368"/>
+            <a:ext cx="10634472" cy="457200"/>
+          </a:xfrm>
+          <a:prstGeom prst="rect">
+            <a:avLst/>
+          </a:prstGeom>
+          <a:noFill/>
+          <a:ln/>
+        </p:spPr>
+        <p:txBody>
+          <a:bodyPr wrap="square" lIns="0" tIns="0" rIns="0" bIns="0" rtlCol="0" anchor="ctr"/>
+          <a:lstStyle/>
+          <a:p>
+            <a:pPr indent="0" marL="0">
+              <a:buNone/>
+            </a:pPr>
+            <a:r>
+              <a:rPr lang="en-US" sz="1500" b="1" dirty="0">
                 <a:solidFill>
                   <a:srgbClr val="1B1F24"/>
                 </a:solidFill>
@@ -16387,48 +16524,93 @@
                 <a:ea typeface="Calibri" pitchFamily="34" charset="-122"/>
                 <a:cs typeface="Calibri" pitchFamily="34" charset="-120"/>
               </a:rPr>
-              <a:t>Kalan %30: haftalık stüdyo üretimi ve ev tekrarları %20  ·  Ödev A (bir şarkıyı çizgiyle anlatmak) %10</a:t>
-            </a:r>
-            <a:endParaRPr lang="en-US" sz="1500" dirty="0"/>
-          </a:p>
-        </p:txBody>
-      </p:sp>
-      <p:sp>
-        <p:nvSpPr>
-          <p:cNvPr id="21" name="Text 19"/>
-          <p:cNvSpPr txBox="1"/>
-          <p:nvPr/>
-        </p:nvSpPr>
-        <p:spPr>
-          <a:xfrm>
-            <a:off x="777240" y="5440680"/>
-            <a:ext cx="10634472" cy="365760"/>
-          </a:xfrm>
-          <a:prstGeom prst="rect">
-            <a:avLst/>
-          </a:prstGeom>
-          <a:noFill/>
-          <a:ln/>
-        </p:spPr>
-        <p:txBody>
-          <a:bodyPr wrap="square" lIns="0" tIns="0" rIns="0" bIns="0" rtlCol="0" anchor="ctr"/>
-          <a:lstStyle/>
-          <a:p>
-            <a:pPr indent="0" marL="0">
-              <a:buNone/>
-            </a:pPr>
-            <a:r>
-              <a:rPr lang="en-US" sz="1400" i="1" dirty="0">
-                <a:solidFill>
-                  <a:srgbClr val="6B747C"/>
+              <a:t>Başarı koşulu: </a:t>
+            </a:r>
+            <a:pPr indent="0" marL="0">
+              <a:buNone/>
+            </a:pPr>
+            <a:r>
+              <a:rPr lang="en-US" sz="1500" dirty="0">
+                <a:solidFill>
+                  <a:srgbClr val="1B1F24"/>
                 </a:solidFill>
                 <a:latin typeface="Calibri" pitchFamily="34" charset="0"/>
                 <a:ea typeface="Calibri" pitchFamily="34" charset="-122"/>
                 <a:cs typeface="Calibri" pitchFamily="34" charset="-120"/>
               </a:rPr>
-              <a:t>Her teslimde 5 dakikalık masa savunması var. Sorular tekniğe değil, kararlarınıza yönelik olacak.</a:t>
-            </a:r>
-            <a:endParaRPr lang="en-US" sz="1400" dirty="0"/>
+              <a:t>yarıyıl sonu başarı notunun en az </a:t>
+            </a:r>
+            <a:pPr indent="0" marL="0">
+              <a:buNone/>
+            </a:pPr>
+            <a:r>
+              <a:rPr lang="en-US" sz="1500" b="1" dirty="0">
+                <a:solidFill>
+                  <a:srgbClr val="1B1F24"/>
+                </a:solidFill>
+                <a:latin typeface="Calibri" pitchFamily="34" charset="0"/>
+                <a:ea typeface="Calibri" pitchFamily="34" charset="-122"/>
+                <a:cs typeface="Calibri" pitchFamily="34" charset="-120"/>
+              </a:rPr>
+              <a:t>60</a:t>
+            </a:r>
+            <a:pPr indent="0" marL="0">
+              <a:buNone/>
+            </a:pPr>
+            <a:r>
+              <a:rPr lang="en-US" sz="1500" dirty="0">
+                <a:solidFill>
+                  <a:srgbClr val="1B1F24"/>
+                </a:solidFill>
+                <a:latin typeface="Calibri" pitchFamily="34" charset="0"/>
+                <a:ea typeface="Calibri" pitchFamily="34" charset="-122"/>
+                <a:cs typeface="Calibri" pitchFamily="34" charset="-120"/>
+              </a:rPr>
+              <a:t> olması gerekir (CC). Bu puanın altında kalan öğrenci, tüm teslimleri yapmış olsa dahi başarısız sayılır.</a:t>
+            </a:r>
+            <a:endParaRPr lang="en-US" sz="1500" dirty="0"/>
+          </a:p>
+        </p:txBody>
+      </p:sp>
+      <p:sp>
+        <p:nvSpPr>
+          <p:cNvPr id="21" name="Text 19"/>
+          <p:cNvSpPr txBox="1"/>
+          <p:nvPr/>
+        </p:nvSpPr>
+        <p:spPr>
+          <a:xfrm>
+            <a:off x="777240" y="5760720"/>
+            <a:ext cx="10634472" cy="502920"/>
+          </a:xfrm>
+          <a:prstGeom prst="rect">
+            <a:avLst/>
+          </a:prstGeom>
+          <a:noFill/>
+          <a:ln/>
+        </p:spPr>
+        <p:txBody>
+          <a:bodyPr wrap="square" lIns="0" tIns="0" rIns="0" bIns="0" rtlCol="0" anchor="ctr"/>
+          <a:lstStyle/>
+          <a:p>
+            <a:pPr indent="0" marL="0">
+              <a:lnSpc>
+                <a:spcPts val="1600"/>
+              </a:lnSpc>
+              <a:buNone/>
+            </a:pPr>
+            <a:r>
+              <a:rPr lang="en-US" sz="1150" dirty="0">
+                <a:solidFill>
+                  <a:srgbClr val="6B747C"/>
+                </a:solidFill>
+                <a:latin typeface="Courier New" pitchFamily="34" charset="0"/>
+                <a:ea typeface="Courier New" pitchFamily="34" charset="-122"/>
+                <a:cs typeface="Courier New" pitchFamily="34" charset="-120"/>
+              </a:rPr>
+              <a:t>Ölçütler: kuruluş ve oran · çizgi kalitesi · hacim, ton ve ışık · tekniğin yerinde kullanımı · kavramsal karar · süreç düzenliliği · kritiğin işlenmesi · dosya düzeni · zamanlama · eksiksiz teslim</a:t>
+            </a:r>
+            <a:endParaRPr lang="en-US" sz="1150" dirty="0"/>
           </a:p>
         </p:txBody>
       </p:sp>
@@ -16539,7 +16721,7 @@
                 <a:ea typeface="Century Schoolbook" pitchFamily="34" charset="-122"/>
                 <a:cs typeface="Century Schoolbook" pitchFamily="34" charset="-120"/>
               </a:rPr>
-              <a:t>Ev tekrarı sözleşmesi</a:t>
+              <a:t>Dönem projesi yeni bir iş değil</a:t>
             </a:r>
             <a:endParaRPr lang="en-US" sz="3400" dirty="0"/>
           </a:p>
@@ -16554,209 +16736,262 @@
         <p:spPr>
           <a:xfrm>
             <a:off x="777240" y="1828800"/>
-            <a:ext cx="5760720" cy="411480"/>
-          </a:xfrm>
-          <a:prstGeom prst="rect">
-            <a:avLst/>
-          </a:prstGeom>
-          <a:noFill/>
-          <a:ln/>
-        </p:spPr>
-        <p:txBody>
-          <a:bodyPr wrap="square" lIns="0" tIns="0" rIns="0" bIns="0" rtlCol="0" anchor="ctr"/>
-          <a:lstStyle/>
-          <a:p>
-            <a:pPr indent="0" marL="0">
-              <a:buNone/>
-            </a:pPr>
-            <a:r>
-              <a:rPr lang="en-US" sz="2400" b="1" dirty="0">
-                <a:solidFill>
-                  <a:srgbClr val="6B747C"/>
+            <a:ext cx="5852160" cy="2377440"/>
+          </a:xfrm>
+          <a:prstGeom prst="rect">
+            <a:avLst/>
+          </a:prstGeom>
+          <a:noFill/>
+          <a:ln/>
+        </p:spPr>
+        <p:txBody>
+          <a:bodyPr wrap="square" lIns="0" tIns="0" rIns="0" bIns="0" rtlCol="0" anchor="ctr"/>
+          <a:lstStyle/>
+          <a:p>
+            <a:pPr indent="0" marL="0">
+              <a:lnSpc>
+                <a:spcPts val="2400"/>
+              </a:lnSpc>
+              <a:buNone/>
+            </a:pPr>
+            <a:r>
+              <a:rPr lang="en-US" sz="1600" dirty="0">
+                <a:solidFill>
+                  <a:srgbClr val="1B1F24"/>
+                </a:solidFill>
+                <a:latin typeface="Calibri" pitchFamily="34" charset="0"/>
+                <a:ea typeface="Calibri" pitchFamily="34" charset="-122"/>
+                <a:cs typeface="Calibri" pitchFamily="34" charset="-120"/>
+              </a:rPr>
+              <a:t>Portfolyo, dönem boyunca ürettiğiniz çalışmaların </a:t>
+            </a:r>
+            <a:pPr indent="0" marL="0">
+              <a:lnSpc>
+                <a:spcPts val="2400"/>
+              </a:lnSpc>
+              <a:buNone/>
+            </a:pPr>
+            <a:r>
+              <a:rPr lang="en-US" sz="1600" b="1" dirty="0">
+                <a:solidFill>
+                  <a:srgbClr val="1B1F24"/>
+                </a:solidFill>
+                <a:latin typeface="Calibri" pitchFamily="34" charset="0"/>
+                <a:ea typeface="Calibri" pitchFamily="34" charset="-122"/>
+                <a:cs typeface="Calibri" pitchFamily="34" charset="-120"/>
+              </a:rPr>
+              <a:t>tamamının</a:t>
+            </a:r>
+            <a:pPr indent="0" marL="0">
+              <a:lnSpc>
+                <a:spcPts val="2400"/>
+              </a:lnSpc>
+              <a:buNone/>
+            </a:pPr>
+            <a:r>
+              <a:rPr lang="en-US" sz="1600" dirty="0">
+                <a:solidFill>
+                  <a:srgbClr val="1B1F24"/>
+                </a:solidFill>
+                <a:latin typeface="Calibri" pitchFamily="34" charset="0"/>
+                <a:ea typeface="Calibri" pitchFamily="34" charset="-122"/>
+                <a:cs typeface="Calibri" pitchFamily="34" charset="-120"/>
+              </a:rPr>
+              <a:t> bir araya getirilmesidir — yeni bir üretim değil, var olanın derlenmesi.</a:t>
+            </a:r>
+            <a:endParaRPr lang="en-US" sz="1600" dirty="0"/>
+          </a:p>
+          <a:p>
+            <a:pPr indent="0" marL="0">
+              <a:lnSpc>
+                <a:spcPts val="2400"/>
+              </a:lnSpc>
+              <a:buNone/>
+            </a:pPr>
+            <a:r>
+              <a:rPr lang="en-US" sz="900" dirty="0">
+                <a:solidFill>
+                  <a:srgbClr val="1B1F24"/>
+                </a:solidFill>
+                <a:latin typeface="Calibri" pitchFamily="34" charset="0"/>
+                <a:ea typeface="Calibri" pitchFamily="34" charset="-122"/>
+                <a:cs typeface="Calibri" pitchFamily="34" charset="-120"/>
+              </a:rPr>
+              <a:t>
+</a:t>
+            </a:r>
+            <a:endParaRPr lang="en-US" sz="1600" dirty="0"/>
+          </a:p>
+          <a:p>
+            <a:pPr indent="0" marL="0">
+              <a:lnSpc>
+                <a:spcPts val="2400"/>
+              </a:lnSpc>
+              <a:buNone/>
+            </a:pPr>
+            <a:r>
+              <a:rPr lang="en-US" sz="1600" dirty="0">
+                <a:solidFill>
+                  <a:srgbClr val="1B1F24"/>
+                </a:solidFill>
+                <a:latin typeface="Calibri" pitchFamily="34" charset="0"/>
+                <a:ea typeface="Calibri" pitchFamily="34" charset="-122"/>
+                <a:cs typeface="Calibri" pitchFamily="34" charset="-120"/>
+              </a:rPr>
+              <a:t>Düzenli çalışan öğrenci için </a:t>
+            </a:r>
+            <a:pPr indent="0" marL="0">
+              <a:lnSpc>
+                <a:spcPts val="2400"/>
+              </a:lnSpc>
+              <a:buNone/>
+            </a:pPr>
+            <a:r>
+              <a:rPr lang="en-US" sz="1600" b="1" dirty="0">
+                <a:solidFill>
+                  <a:srgbClr val="1B1F24"/>
+                </a:solidFill>
+                <a:latin typeface="Calibri" pitchFamily="34" charset="0"/>
+                <a:ea typeface="Calibri" pitchFamily="34" charset="-122"/>
+                <a:cs typeface="Calibri" pitchFamily="34" charset="-120"/>
+              </a:rPr>
+              <a:t>ek bir yük oluşturmaz</a:t>
+            </a:r>
+            <a:pPr indent="0" marL="0">
+              <a:lnSpc>
+                <a:spcPts val="2400"/>
+              </a:lnSpc>
+              <a:buNone/>
+            </a:pPr>
+            <a:r>
+              <a:rPr lang="en-US" sz="1600" dirty="0">
+                <a:solidFill>
+                  <a:srgbClr val="1B1F24"/>
+                </a:solidFill>
+                <a:latin typeface="Calibri" pitchFamily="34" charset="0"/>
+                <a:ea typeface="Calibri" pitchFamily="34" charset="-122"/>
+                <a:cs typeface="Calibri" pitchFamily="34" charset="-120"/>
+              </a:rPr>
+              <a:t>; hiçbir şey saklamayan öğrenci için telafisi yoktur.</a:t>
+            </a:r>
+            <a:endParaRPr lang="en-US" sz="1600" dirty="0"/>
+          </a:p>
+        </p:txBody>
+      </p:sp>
+      <p:sp>
+        <p:nvSpPr>
+          <p:cNvPr id="5" name="Text 3"/>
+          <p:cNvSpPr txBox="1"/>
+          <p:nvPr/>
+        </p:nvSpPr>
+        <p:spPr>
+          <a:xfrm>
+            <a:off x="777240" y="4206240"/>
+            <a:ext cx="5852160" cy="914400"/>
+          </a:xfrm>
+          <a:prstGeom prst="rect">
+            <a:avLst/>
+          </a:prstGeom>
+          <a:noFill/>
+          <a:ln/>
+        </p:spPr>
+        <p:txBody>
+          <a:bodyPr wrap="square" lIns="0" tIns="0" rIns="0" bIns="0" rtlCol="0" anchor="ctr"/>
+          <a:lstStyle/>
+          <a:p>
+            <a:pPr indent="0" marL="0">
+              <a:lnSpc>
+                <a:spcPts val="3300"/>
+              </a:lnSpc>
+              <a:buNone/>
+            </a:pPr>
+            <a:r>
+              <a:rPr lang="en-US" sz="2500" b="1" dirty="0">
+                <a:solidFill>
+                  <a:srgbClr val="2A6289"/>
                 </a:solidFill>
                 <a:latin typeface="Century Schoolbook" pitchFamily="34" charset="0"/>
                 <a:ea typeface="Century Schoolbook" pitchFamily="34" charset="-122"/>
                 <a:cs typeface="Century Schoolbook" pitchFamily="34" charset="-120"/>
               </a:rPr>
-              <a:t>Günlük çizim beklentimiz yok.</a:t>
-            </a:r>
-            <a:endParaRPr lang="en-US" sz="2400" dirty="0"/>
-          </a:p>
-        </p:txBody>
-      </p:sp>
-      <p:sp>
-        <p:nvSpPr>
-          <p:cNvPr id="5" name="Text 3"/>
-          <p:cNvSpPr txBox="1"/>
-          <p:nvPr/>
-        </p:nvSpPr>
-        <p:spPr>
-          <a:xfrm>
-            <a:off x="777240" y="2423160"/>
-            <a:ext cx="5760720" cy="1737360"/>
-          </a:xfrm>
-          <a:prstGeom prst="rect">
-            <a:avLst/>
-          </a:prstGeom>
-          <a:noFill/>
-          <a:ln/>
-        </p:spPr>
-        <p:txBody>
-          <a:bodyPr wrap="square" lIns="0" tIns="0" rIns="0" bIns="0" rtlCol="0" anchor="ctr"/>
-          <a:lstStyle/>
+              <a:t>Bugünden itibaren</a:t>
+            </a:r>
+            <a:endParaRPr lang="en-US" sz="2500" dirty="0"/>
+          </a:p>
           <a:p>
             <a:pPr indent="0" marL="0">
               <a:lnSpc>
-                <a:spcPts val="4000"/>
+                <a:spcPts val="3300"/>
               </a:lnSpc>
               <a:buNone/>
             </a:pPr>
             <a:r>
-              <a:rPr lang="en-US" sz="3000" b="1" dirty="0">
-                <a:solidFill>
-                  <a:srgbClr val="1B1F24"/>
+              <a:rPr lang="en-US" sz="2500" b="1" dirty="0">
+                <a:solidFill>
+                  <a:srgbClr val="2A6289"/>
                 </a:solidFill>
                 <a:latin typeface="Century Schoolbook" pitchFamily="34" charset="0"/>
                 <a:ea typeface="Century Schoolbook" pitchFamily="34" charset="-122"/>
                 <a:cs typeface="Century Schoolbook" pitchFamily="34" charset="-120"/>
               </a:rPr>
-              <a:t>Sınıfta yaptığınız</a:t>
-            </a:r>
-            <a:endParaRPr lang="en-US" sz="3000" dirty="0"/>
-          </a:p>
+              <a:t>hiçbir sayfayı atmayın.</a:t>
+            </a:r>
+            <a:endParaRPr lang="en-US" sz="2500" dirty="0"/>
+          </a:p>
+        </p:txBody>
+      </p:sp>
+      <p:sp>
+        <p:nvSpPr>
+          <p:cNvPr id="6" name="Text 4"/>
+          <p:cNvSpPr txBox="1"/>
+          <p:nvPr/>
+        </p:nvSpPr>
+        <p:spPr>
+          <a:xfrm>
+            <a:off x="777240" y="5230368"/>
+            <a:ext cx="5852160" cy="731520"/>
+          </a:xfrm>
+          <a:prstGeom prst="rect">
+            <a:avLst/>
+          </a:prstGeom>
+          <a:noFill/>
+          <a:ln/>
+        </p:spPr>
+        <p:txBody>
+          <a:bodyPr wrap="square" lIns="0" tIns="0" rIns="0" bIns="0" rtlCol="0" anchor="ctr"/>
+          <a:lstStyle/>
           <a:p>
             <a:pPr indent="0" marL="0">
               <a:lnSpc>
-                <a:spcPts val="4000"/>
+                <a:spcPts val="2100"/>
               </a:lnSpc>
               <a:buNone/>
             </a:pPr>
             <a:r>
-              <a:rPr lang="en-US" sz="3000" b="1" dirty="0">
-                <a:solidFill>
-                  <a:srgbClr val="1B1F24"/>
-                </a:solidFill>
-                <a:latin typeface="Century Schoolbook" pitchFamily="34" charset="0"/>
-                <a:ea typeface="Century Schoolbook" pitchFamily="34" charset="-122"/>
-                <a:cs typeface="Century Schoolbook" pitchFamily="34" charset="-120"/>
-              </a:rPr>
-              <a:t>çalışmanın aynısını</a:t>
-            </a:r>
-            <a:endParaRPr lang="en-US" sz="3000" dirty="0"/>
-          </a:p>
-          <a:p>
-            <a:pPr indent="0" marL="0">
-              <a:lnSpc>
-                <a:spcPts val="4000"/>
-              </a:lnSpc>
-              <a:buNone/>
-            </a:pPr>
-            <a:r>
-              <a:rPr lang="en-US" sz="3000" b="1" dirty="0">
-                <a:solidFill>
-                  <a:srgbClr val="1B1F24"/>
-                </a:solidFill>
-                <a:latin typeface="Century Schoolbook" pitchFamily="34" charset="0"/>
-                <a:ea typeface="Century Schoolbook" pitchFamily="34" charset="-122"/>
-                <a:cs typeface="Century Schoolbook" pitchFamily="34" charset="-120"/>
-              </a:rPr>
-              <a:t>evde bir kez daha yapın.</a:t>
-            </a:r>
-            <a:endParaRPr lang="en-US" sz="3000" dirty="0"/>
-          </a:p>
-        </p:txBody>
-      </p:sp>
-      <p:sp>
-        <p:nvSpPr>
-          <p:cNvPr id="6" name="Text 4"/>
-          <p:cNvSpPr txBox="1"/>
-          <p:nvPr/>
-        </p:nvSpPr>
-        <p:spPr>
-          <a:xfrm>
-            <a:off x="777240" y="4297680"/>
-            <a:ext cx="5760720" cy="411480"/>
-          </a:xfrm>
-          <a:prstGeom prst="rect">
-            <a:avLst/>
-          </a:prstGeom>
-          <a:noFill/>
-          <a:ln/>
-        </p:spPr>
-        <p:txBody>
-          <a:bodyPr wrap="square" lIns="0" tIns="0" rIns="0" bIns="0" rtlCol="0" anchor="ctr"/>
-          <a:lstStyle/>
-          <a:p>
-            <a:pPr indent="0" marL="0">
-              <a:buNone/>
-            </a:pPr>
-            <a:r>
-              <a:rPr lang="en-US" sz="1900" b="1" dirty="0">
-                <a:solidFill>
-                  <a:srgbClr val="2A6289"/>
+              <a:rPr lang="en-US" sz="1450" dirty="0">
+                <a:solidFill>
+                  <a:srgbClr val="6B747C"/>
                 </a:solidFill>
                 <a:latin typeface="Calibri" pitchFamily="34" charset="0"/>
                 <a:ea typeface="Calibri" pitchFamily="34" charset="-122"/>
                 <a:cs typeface="Calibri" pitchFamily="34" charset="-120"/>
               </a:rPr>
-              <a:t>Ve gelecek hafta yanınızda getirin.</a:t>
-            </a:r>
-            <a:endParaRPr lang="en-US" sz="1900" dirty="0"/>
-          </a:p>
-        </p:txBody>
-      </p:sp>
-      <p:sp>
-        <p:nvSpPr>
-          <p:cNvPr id="7" name="Text 5"/>
-          <p:cNvSpPr txBox="1"/>
-          <p:nvPr/>
-        </p:nvSpPr>
-        <p:spPr>
-          <a:xfrm>
-            <a:off x="777240" y="4892040"/>
-            <a:ext cx="5760720" cy="640080"/>
-          </a:xfrm>
-          <a:prstGeom prst="rect">
-            <a:avLst/>
-          </a:prstGeom>
-          <a:noFill/>
-          <a:ln/>
-        </p:spPr>
-        <p:txBody>
-          <a:bodyPr wrap="square" lIns="0" tIns="0" rIns="0" bIns="0" rtlCol="0" anchor="ctr"/>
-          <a:lstStyle/>
-          <a:p>
-            <a:pPr indent="0" marL="0">
-              <a:lnSpc>
-                <a:spcPts val="2000"/>
-              </a:lnSpc>
-              <a:buNone/>
-            </a:pPr>
-            <a:r>
-              <a:rPr lang="en-US" sz="1400" dirty="0">
-                <a:solidFill>
-                  <a:srgbClr val="6B747C"/>
-                </a:solidFill>
-                <a:latin typeface="Calibri" pitchFamily="34" charset="0"/>
-                <a:ea typeface="Calibri" pitchFamily="34" charset="-122"/>
-                <a:cs typeface="Calibri" pitchFamily="34" charset="-120"/>
-              </a:rPr>
-              <a:t>Her hafta ilk 20 dakikada kontrol edeceğiz: ev tekrarı, sınıftaki eşiyle yan yana konur.</a:t>
-            </a:r>
-            <a:endParaRPr lang="en-US" sz="1400" dirty="0"/>
-          </a:p>
-        </p:txBody>
-      </p:sp>
-      <p:sp>
-        <p:nvSpPr>
-          <p:cNvPr id="8" name="Shape 6"/>
+              <a:t>Denemeler, yarım kalan çizimler ve yeniden yapılan çalışmalar da dosyaya girer. Ölçtüğümüz şey sonuç değil süreç.</a:t>
+            </a:r>
+            <a:endParaRPr lang="en-US" sz="1450" dirty="0"/>
+          </a:p>
+        </p:txBody>
+      </p:sp>
+      <p:sp>
+        <p:nvSpPr>
+          <p:cNvPr id="7" name="Shape 5"/>
           <p:cNvSpPr/>
           <p:nvPr/>
         </p:nvSpPr>
         <p:spPr>
           <a:xfrm>
-            <a:off x="6949440" y="1828800"/>
-            <a:ext cx="4462272" cy="3977640"/>
+            <a:off x="6949440" y="1783080"/>
+            <a:ext cx="4462272" cy="4069080"/>
           </a:xfrm>
           <a:prstGeom prst="rect">
             <a:avLst/>
@@ -16774,30 +17009,73 @@
       </p:sp>
       <p:sp>
         <p:nvSpPr>
+          <p:cNvPr id="8" name="Text 6"/>
+          <p:cNvSpPr txBox="1"/>
+          <p:nvPr/>
+        </p:nvSpPr>
+        <p:spPr>
+          <a:xfrm>
+            <a:off x="7315200" y="2057400"/>
+            <a:ext cx="3749040" cy="274320"/>
+          </a:xfrm>
+          <a:prstGeom prst="rect">
+            <a:avLst/>
+          </a:prstGeom>
+          <a:noFill/>
+          <a:ln/>
+        </p:spPr>
+        <p:txBody>
+          <a:bodyPr wrap="square" lIns="0" tIns="0" rIns="0" bIns="0" rtlCol="0" anchor="ctr"/>
+          <a:lstStyle/>
+          <a:p>
+            <a:pPr indent="0" marL="0">
+              <a:buNone/>
+            </a:pPr>
+            <a:r>
+              <a:rPr lang="en-US" sz="1100" spc="140" kern="0" dirty="0">
+                <a:solidFill>
+                  <a:srgbClr val="2A6289"/>
+                </a:solidFill>
+                <a:latin typeface="Courier New" pitchFamily="34" charset="0"/>
+                <a:ea typeface="Courier New" pitchFamily="34" charset="-122"/>
+                <a:cs typeface="Courier New" pitchFamily="34" charset="-120"/>
+              </a:rPr>
+              <a:t>DOSYADA NE OLACAK</a:t>
+            </a:r>
+            <a:endParaRPr lang="en-US" sz="1100" dirty="0"/>
+          </a:p>
+        </p:txBody>
+      </p:sp>
+      <p:sp>
+        <p:nvSpPr>
           <p:cNvPr id="9" name="Text 7"/>
           <p:cNvSpPr txBox="1"/>
           <p:nvPr/>
         </p:nvSpPr>
         <p:spPr>
           <a:xfrm>
-            <a:off x="7315200" y="2103120"/>
-            <a:ext cx="3749040" cy="365760"/>
-          </a:xfrm>
-          <a:prstGeom prst="rect">
-            <a:avLst/>
-          </a:prstGeom>
-          <a:noFill/>
-          <a:ln/>
-        </p:spPr>
-        <p:txBody>
-          <a:bodyPr wrap="square" lIns="0" tIns="0" rIns="0" bIns="0" rtlCol="0" anchor="ctr"/>
-          <a:lstStyle/>
-          <a:p>
-            <a:pPr indent="0" marL="0">
-              <a:buNone/>
-            </a:pPr>
-            <a:r>
-              <a:rPr lang="en-US" sz="1900" b="1" dirty="0">
+            <a:off x="7315200" y="2487168"/>
+            <a:ext cx="3749040" cy="2377440"/>
+          </a:xfrm>
+          <a:prstGeom prst="rect">
+            <a:avLst/>
+          </a:prstGeom>
+          <a:noFill/>
+          <a:ln/>
+        </p:spPr>
+        <p:txBody>
+          <a:bodyPr wrap="square" lIns="0" tIns="0" rIns="0" bIns="0" rtlCol="0" anchor="ctr"/>
+          <a:lstStyle/>
+          <a:p>
+            <a:pPr marL="342900" indent="-342900">
+              <a:spcAft>
+                <a:spcPts val="800"/>
+              </a:spcAft>
+              <a:buSzPct val="100000"/>
+              <a:buChar char="•"/>
+            </a:pPr>
+            <a:r>
+              <a:rPr lang="en-US" sz="1450" dirty="0">
                 <a:solidFill>
                   <a:srgbClr val="1B1F24"/>
                 </a:solidFill>
@@ -16805,38 +17083,17 @@
                 <a:ea typeface="Calibri" pitchFamily="34" charset="-122"/>
                 <a:cs typeface="Calibri" pitchFamily="34" charset="-120"/>
               </a:rPr>
-              <a:t>Neden tekrar?</a:t>
-            </a:r>
-            <a:endParaRPr lang="en-US" sz="1900" dirty="0"/>
-          </a:p>
-        </p:txBody>
-      </p:sp>
-      <p:sp>
-        <p:nvSpPr>
-          <p:cNvPr id="10" name="Text 8"/>
-          <p:cNvSpPr txBox="1"/>
-          <p:nvPr/>
-        </p:nvSpPr>
-        <p:spPr>
-          <a:xfrm>
-            <a:off x="7315200" y="2651760"/>
-            <a:ext cx="3749040" cy="3017520"/>
-          </a:xfrm>
-          <a:prstGeom prst="rect">
-            <a:avLst/>
-          </a:prstGeom>
-          <a:noFill/>
-          <a:ln/>
-        </p:spPr>
-        <p:txBody>
-          <a:bodyPr wrap="square" lIns="0" tIns="0" rIns="0" bIns="0" rtlCol="0" anchor="ctr"/>
-          <a:lstStyle/>
-          <a:p>
-            <a:pPr indent="0" marL="0">
-              <a:lnSpc>
-                <a:spcPts val="2100"/>
-              </a:lnSpc>
-              <a:buNone/>
+              <a:t>Kapak sayfası</a:t>
+            </a:r>
+            <a:endParaRPr lang="en-US" sz="1450" dirty="0"/>
+          </a:p>
+          <a:p>
+            <a:pPr marL="342900" indent="-342900">
+              <a:spcAft>
+                <a:spcPts val="800"/>
+              </a:spcAft>
+              <a:buSzPct val="100000"/>
+              <a:buChar char="•"/>
             </a:pPr>
             <a:r>
               <a:rPr lang="en-US" sz="1450" dirty="0">
@@ -16847,19 +17104,20 @@
                 <a:ea typeface="Calibri" pitchFamily="34" charset="-122"/>
                 <a:cs typeface="Calibri" pitchFamily="34" charset="-120"/>
               </a:rPr>
-              <a:t>Aynı problemi ikinci kez çözmek, iki farklı problemi bir kez çözmekten daha çok öğretir.</a:t>
+              <a:t>Bir sayfalık kişisel gelişim notu</a:t>
             </a:r>
             <a:endParaRPr lang="en-US" sz="1450" dirty="0"/>
           </a:p>
           <a:p>
-            <a:pPr indent="0" marL="0">
-              <a:lnSpc>
-                <a:spcPts val="2100"/>
-              </a:lnSpc>
-              <a:buNone/>
-            </a:pPr>
-            <a:r>
-              <a:rPr lang="en-US" sz="800" dirty="0">
+            <a:pPr marL="342900" indent="-342900">
+              <a:spcAft>
+                <a:spcPts val="800"/>
+              </a:spcAft>
+              <a:buSzPct val="100000"/>
+              <a:buChar char="•"/>
+            </a:pPr>
+            <a:r>
+              <a:rPr lang="en-US" sz="1450" dirty="0">
                 <a:solidFill>
                   <a:srgbClr val="1B1F24"/>
                 </a:solidFill>
@@ -16867,17 +17125,17 @@
                 <a:ea typeface="Calibri" pitchFamily="34" charset="-122"/>
                 <a:cs typeface="Calibri" pitchFamily="34" charset="-120"/>
               </a:rPr>
-              <a:t>
-</a:t>
+              <a:t>4 ödev</a:t>
             </a:r>
             <a:endParaRPr lang="en-US" sz="1450" dirty="0"/>
           </a:p>
           <a:p>
-            <a:pPr indent="0" marL="0">
-              <a:lnSpc>
-                <a:spcPts val="2100"/>
-              </a:lnSpc>
-              <a:buNone/>
+            <a:pPr marL="342900" indent="-342900">
+              <a:spcAft>
+                <a:spcPts val="800"/>
+              </a:spcAft>
+              <a:buSzPct val="100000"/>
+              <a:buChar char="•"/>
             </a:pPr>
             <a:r>
               <a:rPr lang="en-US" sz="1450" dirty="0">
@@ -16888,16 +17146,20 @@
                 <a:ea typeface="Calibri" pitchFamily="34" charset="-122"/>
                 <a:cs typeface="Calibri" pitchFamily="34" charset="-120"/>
               </a:rPr>
-              <a:t>Sınıftaki çalışma yönlendirilmiştir, evdeki değildir. </a:t>
-            </a:r>
-            <a:pPr indent="0" marL="0">
-              <a:lnSpc>
-                <a:spcPts val="2100"/>
-              </a:lnSpc>
-              <a:buNone/>
-            </a:pPr>
-            <a:r>
-              <a:rPr lang="en-US" sz="1450" b="1" dirty="0">
+              <a:t>2 ev tekrarı (3. ve 9. hafta)</a:t>
+            </a:r>
+            <a:endParaRPr lang="en-US" sz="1450" dirty="0"/>
+          </a:p>
+          <a:p>
+            <a:pPr marL="342900" indent="-342900">
+              <a:spcAft>
+                <a:spcPts val="800"/>
+              </a:spcAft>
+              <a:buSzPct val="100000"/>
+              <a:buChar char="•"/>
+            </a:pPr>
+            <a:r>
+              <a:rPr lang="en-US" sz="1450" dirty="0">
                 <a:solidFill>
                   <a:srgbClr val="1B1F24"/>
                 </a:solidFill>
@@ -16905,19 +17167,20 @@
                 <a:ea typeface="Calibri" pitchFamily="34" charset="-122"/>
                 <a:cs typeface="Calibri" pitchFamily="34" charset="-120"/>
               </a:rPr>
-              <a:t>Fark, öğrenmenin nerede olduğunu gösterir.</a:t>
+              <a:t>Derste üretilen tüm çizimler</a:t>
             </a:r>
             <a:endParaRPr lang="en-US" sz="1450" dirty="0"/>
           </a:p>
           <a:p>
-            <a:pPr indent="0" marL="0">
-              <a:lnSpc>
-                <a:spcPts val="2100"/>
-              </a:lnSpc>
-              <a:buNone/>
-            </a:pPr>
-            <a:r>
-              <a:rPr lang="en-US" sz="800" dirty="0">
+            <a:pPr marL="342900" indent="-342900">
+              <a:spcAft>
+                <a:spcPts val="800"/>
+              </a:spcAft>
+              <a:buSzPct val="100000"/>
+              <a:buChar char="•"/>
+            </a:pPr>
+            <a:r>
+              <a:rPr lang="en-US" sz="1450" dirty="0">
                 <a:solidFill>
                   <a:srgbClr val="1B1F24"/>
                 </a:solidFill>
@@ -16925,20 +17188,41 @@
                 <a:ea typeface="Calibri" pitchFamily="34" charset="-122"/>
                 <a:cs typeface="Calibri" pitchFamily="34" charset="-120"/>
               </a:rPr>
-              <a:t>
-</a:t>
+              <a:t>Denemeler ve yarım kalanlar</a:t>
             </a:r>
             <a:endParaRPr lang="en-US" sz="1450" dirty="0"/>
           </a:p>
+        </p:txBody>
+      </p:sp>
+      <p:sp>
+        <p:nvSpPr>
+          <p:cNvPr id="10" name="Text 8"/>
+          <p:cNvSpPr txBox="1"/>
+          <p:nvPr/>
+        </p:nvSpPr>
+        <p:spPr>
+          <a:xfrm>
+            <a:off x="7315200" y="5029200"/>
+            <a:ext cx="3749040" cy="640080"/>
+          </a:xfrm>
+          <a:prstGeom prst="rect">
+            <a:avLst/>
+          </a:prstGeom>
+          <a:noFill/>
+          <a:ln/>
+        </p:spPr>
+        <p:txBody>
+          <a:bodyPr wrap="square" lIns="0" tIns="0" rIns="0" bIns="0" rtlCol="0" anchor="ctr"/>
+          <a:lstStyle/>
           <a:p>
             <a:pPr indent="0" marL="0">
               <a:lnSpc>
-                <a:spcPts val="2100"/>
+                <a:spcPts val="2000"/>
               </a:lnSpc>
               <a:buNone/>
             </a:pPr>
             <a:r>
-              <a:rPr lang="en-US" sz="1450" dirty="0">
+              <a:rPr lang="en-US" sz="1400" b="1" dirty="0">
                 <a:solidFill>
                   <a:srgbClr val="1B1F24"/>
                 </a:solidFill>
@@ -16946,9 +17230,29 @@
                 <a:ea typeface="Calibri" pitchFamily="34" charset="-122"/>
                 <a:cs typeface="Calibri" pitchFamily="34" charset="-120"/>
               </a:rPr>
-              <a:t>Ve denetlenebilir: getirilmeyen tekrar o haftanın süreç puanını düşürür.</a:t>
-            </a:r>
-            <a:endParaRPr lang="en-US" sz="1450" dirty="0"/>
+              <a:t>Tarih sırasına göre düzenlenir.</a:t>
+            </a:r>
+            <a:endParaRPr lang="en-US" sz="1400" dirty="0"/>
+          </a:p>
+          <a:p>
+            <a:pPr indent="0" marL="0">
+              <a:lnSpc>
+                <a:spcPts val="2000"/>
+              </a:lnSpc>
+              <a:buNone/>
+            </a:pPr>
+            <a:r>
+              <a:rPr lang="en-US" sz="1400" b="1" dirty="0">
+                <a:solidFill>
+                  <a:srgbClr val="1B1F24"/>
+                </a:solidFill>
+                <a:latin typeface="Calibri" pitchFamily="34" charset="0"/>
+                <a:ea typeface="Calibri" pitchFamily="34" charset="-122"/>
+                <a:cs typeface="Calibri" pitchFamily="34" charset="-120"/>
+              </a:rPr>
+              <a:t>Teslim: 14. hafta.</a:t>
+            </a:r>
+            <a:endParaRPr lang="en-US" sz="1400" dirty="0"/>
           </a:p>
         </p:txBody>
       </p:sp>
@@ -17059,7 +17363,7 @@
                 <a:ea typeface="Century Schoolbook" pitchFamily="34" charset="-122"/>
                 <a:cs typeface="Century Schoolbook" pitchFamily="34" charset="-120"/>
               </a:rPr>
-              <a:t>Final: katman diyoraması</a:t>
+              <a:t>Ev tekrarı</a:t>
             </a:r>
             <a:endParaRPr lang="en-US" sz="3400" dirty="0"/>
           </a:p>
@@ -17074,7 +17378,46 @@
         <p:spPr>
           <a:xfrm>
             <a:off x="777240" y="1828800"/>
-            <a:ext cx="5760720" cy="2377440"/>
+            <a:ext cx="5760720" cy="411480"/>
+          </a:xfrm>
+          <a:prstGeom prst="rect">
+            <a:avLst/>
+          </a:prstGeom>
+          <a:noFill/>
+          <a:ln/>
+        </p:spPr>
+        <p:txBody>
+          <a:bodyPr wrap="square" lIns="0" tIns="0" rIns="0" bIns="0" rtlCol="0" anchor="ctr"/>
+          <a:lstStyle/>
+          <a:p>
+            <a:pPr indent="0" marL="0">
+              <a:buNone/>
+            </a:pPr>
+            <a:r>
+              <a:rPr lang="en-US" sz="2400" b="1" dirty="0">
+                <a:solidFill>
+                  <a:srgbClr val="6B747C"/>
+                </a:solidFill>
+                <a:latin typeface="Century Schoolbook" pitchFamily="34" charset="0"/>
+                <a:ea typeface="Century Schoolbook" pitchFamily="34" charset="-122"/>
+                <a:cs typeface="Century Schoolbook" pitchFamily="34" charset="-120"/>
+              </a:rPr>
+              <a:t>Günlük çizim beklentimiz yok.</a:t>
+            </a:r>
+            <a:endParaRPr lang="en-US" sz="2400" dirty="0"/>
+          </a:p>
+        </p:txBody>
+      </p:sp>
+      <p:sp>
+        <p:nvSpPr>
+          <p:cNvPr id="5" name="Text 3"/>
+          <p:cNvSpPr txBox="1"/>
+          <p:nvPr/>
+        </p:nvSpPr>
+        <p:spPr>
+          <a:xfrm>
+            <a:off x="777240" y="2423160"/>
+            <a:ext cx="5760720" cy="1737360"/>
           </a:xfrm>
           <a:prstGeom prst="rect">
             <a:avLst/>
@@ -17088,205 +17431,145 @@
           <a:p>
             <a:pPr indent="0" marL="0">
               <a:lnSpc>
-                <a:spcPts val="2300"/>
+                <a:spcPts val="4000"/>
               </a:lnSpc>
               <a:buNone/>
             </a:pPr>
             <a:r>
-              <a:rPr lang="en-US" sz="1550" dirty="0">
+              <a:rPr lang="en-US" sz="3000" b="1" dirty="0">
                 <a:solidFill>
                   <a:srgbClr val="1B1F24"/>
+                </a:solidFill>
+                <a:latin typeface="Century Schoolbook" pitchFamily="34" charset="0"/>
+                <a:ea typeface="Century Schoolbook" pitchFamily="34" charset="-122"/>
+                <a:cs typeface="Century Schoolbook" pitchFamily="34" charset="-120"/>
+              </a:rPr>
+              <a:t>Sınıfta yaptığınız</a:t>
+            </a:r>
+            <a:endParaRPr lang="en-US" sz="3000" dirty="0"/>
+          </a:p>
+          <a:p>
+            <a:pPr indent="0" marL="0">
+              <a:lnSpc>
+                <a:spcPts val="4000"/>
+              </a:lnSpc>
+              <a:buNone/>
+            </a:pPr>
+            <a:r>
+              <a:rPr lang="en-US" sz="3000" b="1" dirty="0">
+                <a:solidFill>
+                  <a:srgbClr val="1B1F24"/>
+                </a:solidFill>
+                <a:latin typeface="Century Schoolbook" pitchFamily="34" charset="0"/>
+                <a:ea typeface="Century Schoolbook" pitchFamily="34" charset="-122"/>
+                <a:cs typeface="Century Schoolbook" pitchFamily="34" charset="-120"/>
+              </a:rPr>
+              <a:t>çalışmanın aynısını</a:t>
+            </a:r>
+            <a:endParaRPr lang="en-US" sz="3000" dirty="0"/>
+          </a:p>
+          <a:p>
+            <a:pPr indent="0" marL="0">
+              <a:lnSpc>
+                <a:spcPts val="4000"/>
+              </a:lnSpc>
+              <a:buNone/>
+            </a:pPr>
+            <a:r>
+              <a:rPr lang="en-US" sz="3000" b="1" dirty="0">
+                <a:solidFill>
+                  <a:srgbClr val="1B1F24"/>
+                </a:solidFill>
+                <a:latin typeface="Century Schoolbook" pitchFamily="34" charset="0"/>
+                <a:ea typeface="Century Schoolbook" pitchFamily="34" charset="-122"/>
+                <a:cs typeface="Century Schoolbook" pitchFamily="34" charset="-120"/>
+              </a:rPr>
+              <a:t>evde bir kez daha yapın.</a:t>
+            </a:r>
+            <a:endParaRPr lang="en-US" sz="3000" dirty="0"/>
+          </a:p>
+        </p:txBody>
+      </p:sp>
+      <p:sp>
+        <p:nvSpPr>
+          <p:cNvPr id="6" name="Text 4"/>
+          <p:cNvSpPr txBox="1"/>
+          <p:nvPr/>
+        </p:nvSpPr>
+        <p:spPr>
+          <a:xfrm>
+            <a:off x="777240" y="4297680"/>
+            <a:ext cx="5760720" cy="411480"/>
+          </a:xfrm>
+          <a:prstGeom prst="rect">
+            <a:avLst/>
+          </a:prstGeom>
+          <a:noFill/>
+          <a:ln/>
+        </p:spPr>
+        <p:txBody>
+          <a:bodyPr wrap="square" lIns="0" tIns="0" rIns="0" bIns="0" rtlCol="0" anchor="ctr"/>
+          <a:lstStyle/>
+          <a:p>
+            <a:pPr indent="0" marL="0">
+              <a:buNone/>
+            </a:pPr>
+            <a:r>
+              <a:rPr lang="en-US" sz="1900" b="1" dirty="0">
+                <a:solidFill>
+                  <a:srgbClr val="2A6289"/>
                 </a:solidFill>
                 <a:latin typeface="Calibri" pitchFamily="34" charset="0"/>
                 <a:ea typeface="Calibri" pitchFamily="34" charset="-122"/>
                 <a:cs typeface="Calibri" pitchFamily="34" charset="-120"/>
               </a:rPr>
-              <a:t>Katlanınca düz duran, açılınca derinleşen bir sahne. </a:t>
-            </a:r>
+              <a:t>Ve gelecek hafta yanınızda getirin.</a:t>
+            </a:r>
+            <a:endParaRPr lang="en-US" sz="1900" dirty="0"/>
+          </a:p>
+        </p:txBody>
+      </p:sp>
+      <p:sp>
+        <p:nvSpPr>
+          <p:cNvPr id="7" name="Text 5"/>
+          <p:cNvSpPr txBox="1"/>
+          <p:nvPr/>
+        </p:nvSpPr>
+        <p:spPr>
+          <a:xfrm>
+            <a:off x="777240" y="4892040"/>
+            <a:ext cx="5760720" cy="640080"/>
+          </a:xfrm>
+          <a:prstGeom prst="rect">
+            <a:avLst/>
+          </a:prstGeom>
+          <a:noFill/>
+          <a:ln/>
+        </p:spPr>
+        <p:txBody>
+          <a:bodyPr wrap="square" lIns="0" tIns="0" rIns="0" bIns="0" rtlCol="0" anchor="ctr"/>
+          <a:lstStyle/>
+          <a:p>
             <a:pPr indent="0" marL="0">
               <a:lnSpc>
-                <a:spcPts val="2300"/>
+                <a:spcPts val="2000"/>
               </a:lnSpc>
               <a:buNone/>
             </a:pPr>
             <a:r>
-              <a:rPr lang="en-US" sz="1550" b="1" dirty="0">
-                <a:solidFill>
-                  <a:srgbClr val="1B1F24"/>
+              <a:rPr lang="en-US" sz="1400" dirty="0">
+                <a:solidFill>
+                  <a:srgbClr val="6B747C"/>
                 </a:solidFill>
                 <a:latin typeface="Calibri" pitchFamily="34" charset="0"/>
                 <a:ea typeface="Calibri" pitchFamily="34" charset="-122"/>
                 <a:cs typeface="Calibri" pitchFamily="34" charset="-120"/>
               </a:rPr>
-              <a:t>En az 8 katman</a:t>
-            </a:r>
-            <a:pPr indent="0" marL="0">
-              <a:lnSpc>
-                <a:spcPts val="2300"/>
-              </a:lnSpc>
-              <a:buNone/>
-            </a:pPr>
-            <a:r>
-              <a:rPr lang="en-US" sz="1550" dirty="0">
-                <a:solidFill>
-                  <a:srgbClr val="1B1F24"/>
-                </a:solidFill>
-                <a:latin typeface="Calibri" pitchFamily="34" charset="0"/>
-                <a:ea typeface="Calibri" pitchFamily="34" charset="-122"/>
-                <a:cs typeface="Calibri" pitchFamily="34" charset="-120"/>
-              </a:rPr>
-              <a:t>, aralarında boşluk, önde bir çerçeve. Konu serbest: bir manzara, figürler, bir iç mekân ya da tamamen grafik bir kompozisyon.</a:t>
-            </a:r>
-            <a:endParaRPr lang="en-US" sz="1550" dirty="0"/>
-          </a:p>
-          <a:p>
-            <a:pPr indent="0" marL="0">
-              <a:lnSpc>
-                <a:spcPts val="2300"/>
-              </a:lnSpc>
-              <a:buNone/>
-            </a:pPr>
-            <a:r>
-              <a:rPr lang="en-US" sz="800" dirty="0">
-                <a:solidFill>
-                  <a:srgbClr val="1B1F24"/>
-                </a:solidFill>
-                <a:latin typeface="Calibri" pitchFamily="34" charset="0"/>
-                <a:ea typeface="Calibri" pitchFamily="34" charset="-122"/>
-                <a:cs typeface="Calibri" pitchFamily="34" charset="-120"/>
-              </a:rPr>
-              <a:t>
-</a:t>
-            </a:r>
-            <a:endParaRPr lang="en-US" sz="1550" dirty="0"/>
-          </a:p>
-          <a:p>
-            <a:pPr indent="0" marL="0">
-              <a:lnSpc>
-                <a:spcPts val="2300"/>
-              </a:lnSpc>
-              <a:buNone/>
-            </a:pPr>
-            <a:r>
-              <a:rPr lang="en-US" sz="1550" dirty="0">
-                <a:solidFill>
-                  <a:srgbClr val="1B1F24"/>
-                </a:solidFill>
-                <a:latin typeface="Calibri" pitchFamily="34" charset="0"/>
-                <a:ea typeface="Calibri" pitchFamily="34" charset="-122"/>
-                <a:cs typeface="Calibri" pitchFamily="34" charset="-120"/>
-              </a:rPr>
-              <a:t>Tek kesin kural: </a:t>
-            </a:r>
-            <a:pPr indent="0" marL="0">
-              <a:lnSpc>
-                <a:spcPts val="2300"/>
-              </a:lnSpc>
-              <a:buNone/>
-            </a:pPr>
-            <a:r>
-              <a:rPr lang="en-US" sz="1550" b="1" dirty="0">
-                <a:solidFill>
-                  <a:srgbClr val="1B1F24"/>
-                </a:solidFill>
-                <a:latin typeface="Calibri" pitchFamily="34" charset="0"/>
-                <a:ea typeface="Calibri" pitchFamily="34" charset="-122"/>
-                <a:cs typeface="Calibri" pitchFamily="34" charset="-120"/>
-              </a:rPr>
-              <a:t>her katman önce elle çizilir; kesim çizimin türevidir.</a:t>
-            </a:r>
-            <a:endParaRPr lang="en-US" sz="1550" dirty="0"/>
-          </a:p>
-        </p:txBody>
-      </p:sp>
-      <p:sp>
-        <p:nvSpPr>
-          <p:cNvPr id="5" name="Text 3"/>
-          <p:cNvSpPr txBox="1"/>
-          <p:nvPr/>
-        </p:nvSpPr>
-        <p:spPr>
-          <a:xfrm>
-            <a:off x="777240" y="4370832"/>
-            <a:ext cx="5760720" cy="365760"/>
-          </a:xfrm>
-          <a:prstGeom prst="rect">
-            <a:avLst/>
-          </a:prstGeom>
-          <a:noFill/>
-          <a:ln/>
-        </p:spPr>
-        <p:txBody>
-          <a:bodyPr wrap="square" lIns="0" tIns="0" rIns="0" bIns="0" rtlCol="0" anchor="ctr"/>
-          <a:lstStyle/>
-          <a:p>
-            <a:pPr indent="0" marL="0">
-              <a:buNone/>
-            </a:pPr>
-            <a:r>
-              <a:rPr lang="en-US" sz="1700" b="1" dirty="0">
-                <a:solidFill>
-                  <a:srgbClr val="1B1F24"/>
-                </a:solidFill>
-                <a:latin typeface="Calibri" pitchFamily="34" charset="0"/>
-                <a:ea typeface="Calibri" pitchFamily="34" charset="-122"/>
-                <a:cs typeface="Calibri" pitchFamily="34" charset="-120"/>
-              </a:rPr>
-              <a:t>Asıl kararınız: değer sistemi</a:t>
-            </a:r>
-            <a:endParaRPr lang="en-US" sz="1700" dirty="0"/>
-          </a:p>
-        </p:txBody>
-      </p:sp>
-      <p:sp>
-        <p:nvSpPr>
-          <p:cNvPr id="6" name="Shape 4"/>
-          <p:cNvSpPr/>
-          <p:nvPr/>
-        </p:nvSpPr>
-        <p:spPr>
-          <a:xfrm>
-            <a:off x="777240" y="4828032"/>
-            <a:ext cx="301752" cy="457200"/>
-          </a:xfrm>
-          <a:prstGeom prst="rect">
-            <a:avLst/>
-          </a:prstGeom>
-          <a:solidFill>
-            <a:srgbClr val="232A2F"/>
-          </a:solidFill>
-          <a:ln w="12700">
-            <a:solidFill>
-              <a:srgbClr val="232A2F"/>
-            </a:solidFill>
-            <a:prstDash val="solid"/>
-          </a:ln>
-        </p:spPr>
-      </p:sp>
-      <p:sp>
-        <p:nvSpPr>
-          <p:cNvPr id="7" name="Shape 5"/>
-          <p:cNvSpPr/>
-          <p:nvPr/>
-        </p:nvSpPr>
-        <p:spPr>
-          <a:xfrm>
-            <a:off x="1124712" y="4828032"/>
-            <a:ext cx="301752" cy="457200"/>
-          </a:xfrm>
-          <a:prstGeom prst="rect">
-            <a:avLst/>
-          </a:prstGeom>
-          <a:solidFill>
-            <a:srgbClr val="414950"/>
-          </a:solidFill>
-          <a:ln w="12700">
-            <a:solidFill>
-              <a:srgbClr val="414950"/>
-            </a:solidFill>
-            <a:prstDash val="solid"/>
-          </a:ln>
-        </p:spPr>
+              <a:t>Dönemde iki ev tekrarı var: 3. hafta ve 9. hafta. İkisi de dönem projesi dosyasına girer.</a:t>
+            </a:r>
+            <a:endParaRPr lang="en-US" sz="1400" dirty="0"/>
+          </a:p>
+        </p:txBody>
       </p:sp>
       <p:sp>
         <p:nvSpPr>
@@ -17296,475 +17579,8 @@
         </p:nvSpPr>
         <p:spPr>
           <a:xfrm>
-            <a:off x="1472184" y="4828032"/>
-            <a:ext cx="301752" cy="457200"/>
-          </a:xfrm>
-          <a:prstGeom prst="rect">
-            <a:avLst/>
-          </a:prstGeom>
-          <a:solidFill>
-            <a:srgbClr val="5F676D"/>
-          </a:solidFill>
-          <a:ln w="12700">
-            <a:solidFill>
-              <a:srgbClr val="5F676D"/>
-            </a:solidFill>
-            <a:prstDash val="solid"/>
-          </a:ln>
-        </p:spPr>
-      </p:sp>
-      <p:sp>
-        <p:nvSpPr>
-          <p:cNvPr id="9" name="Shape 7"/>
-          <p:cNvSpPr/>
-          <p:nvPr/>
-        </p:nvSpPr>
-        <p:spPr>
-          <a:xfrm>
-            <a:off x="1819656" y="4828032"/>
-            <a:ext cx="301752" cy="457200"/>
-          </a:xfrm>
-          <a:prstGeom prst="rect">
-            <a:avLst/>
-          </a:prstGeom>
-          <a:solidFill>
-            <a:srgbClr val="7B8288"/>
-          </a:solidFill>
-          <a:ln w="12700">
-            <a:solidFill>
-              <a:srgbClr val="7B8288"/>
-            </a:solidFill>
-            <a:prstDash val="solid"/>
-          </a:ln>
-        </p:spPr>
-      </p:sp>
-      <p:sp>
-        <p:nvSpPr>
-          <p:cNvPr id="10" name="Shape 8"/>
-          <p:cNvSpPr/>
-          <p:nvPr/>
-        </p:nvSpPr>
-        <p:spPr>
-          <a:xfrm>
-            <a:off x="2167128" y="4828032"/>
-            <a:ext cx="301752" cy="457200"/>
-          </a:xfrm>
-          <a:prstGeom prst="rect">
-            <a:avLst/>
-          </a:prstGeom>
-          <a:solidFill>
-            <a:srgbClr val="959B9F"/>
-          </a:solidFill>
-          <a:ln w="12700">
-            <a:solidFill>
-              <a:srgbClr val="959B9F"/>
-            </a:solidFill>
-            <a:prstDash val="solid"/>
-          </a:ln>
-        </p:spPr>
-      </p:sp>
-      <p:sp>
-        <p:nvSpPr>
-          <p:cNvPr id="11" name="Shape 9"/>
-          <p:cNvSpPr/>
-          <p:nvPr/>
-        </p:nvSpPr>
-        <p:spPr>
-          <a:xfrm>
-            <a:off x="2514600" y="4828032"/>
-            <a:ext cx="301752" cy="457200"/>
-          </a:xfrm>
-          <a:prstGeom prst="rect">
-            <a:avLst/>
-          </a:prstGeom>
-          <a:solidFill>
-            <a:srgbClr val="AFB4B7"/>
-          </a:solidFill>
-          <a:ln w="12700">
-            <a:solidFill>
-              <a:srgbClr val="AFB4B7"/>
-            </a:solidFill>
-            <a:prstDash val="solid"/>
-          </a:ln>
-        </p:spPr>
-      </p:sp>
-      <p:sp>
-        <p:nvSpPr>
-          <p:cNvPr id="12" name="Shape 10"/>
-          <p:cNvSpPr/>
-          <p:nvPr/>
-        </p:nvSpPr>
-        <p:spPr>
-          <a:xfrm>
-            <a:off x="2862072" y="4828032"/>
-            <a:ext cx="301752" cy="457200"/>
-          </a:xfrm>
-          <a:prstGeom prst="rect">
-            <a:avLst/>
-          </a:prstGeom>
-          <a:solidFill>
-            <a:srgbClr val="C9CCCE"/>
-          </a:solidFill>
-          <a:ln w="12700">
-            <a:solidFill>
-              <a:srgbClr val="C9CCCE"/>
-            </a:solidFill>
-            <a:prstDash val="solid"/>
-          </a:ln>
-        </p:spPr>
-      </p:sp>
-      <p:sp>
-        <p:nvSpPr>
-          <p:cNvPr id="13" name="Shape 11"/>
-          <p:cNvSpPr/>
-          <p:nvPr/>
-        </p:nvSpPr>
-        <p:spPr>
-          <a:xfrm>
-            <a:off x="3209544" y="4828032"/>
-            <a:ext cx="301752" cy="457200"/>
-          </a:xfrm>
-          <a:prstGeom prst="rect">
-            <a:avLst/>
-          </a:prstGeom>
-          <a:solidFill>
-            <a:srgbClr val="E2E4E5"/>
-          </a:solidFill>
-          <a:ln w="12700">
-            <a:solidFill>
-              <a:srgbClr val="E2E4E5"/>
-            </a:solidFill>
-            <a:prstDash val="solid"/>
-          </a:ln>
-        </p:spPr>
-      </p:sp>
-      <p:sp>
-        <p:nvSpPr>
-          <p:cNvPr id="14" name="Text 12"/>
-          <p:cNvSpPr txBox="1"/>
-          <p:nvPr/>
-        </p:nvSpPr>
-        <p:spPr>
-          <a:xfrm>
-            <a:off x="777240" y="5358384"/>
-            <a:ext cx="2743200" cy="256032"/>
-          </a:xfrm>
-          <a:prstGeom prst="rect">
-            <a:avLst/>
-          </a:prstGeom>
-          <a:noFill/>
-          <a:ln/>
-        </p:spPr>
-        <p:txBody>
-          <a:bodyPr wrap="square" lIns="0" tIns="0" rIns="0" bIns="0" rtlCol="0" anchor="ctr"/>
-          <a:lstStyle/>
-          <a:p>
-            <a:pPr indent="0" marL="0">
-              <a:buNone/>
-            </a:pPr>
-            <a:r>
-              <a:rPr lang="en-US" sz="1050" dirty="0">
-                <a:solidFill>
-                  <a:srgbClr val="6B747C"/>
-                </a:solidFill>
-                <a:latin typeface="Courier New" pitchFamily="34" charset="0"/>
-                <a:ea typeface="Courier New" pitchFamily="34" charset="-122"/>
-                <a:cs typeface="Courier New" pitchFamily="34" charset="-120"/>
-              </a:rPr>
-              <a:t>A · mesafe mantığı</a:t>
-            </a:r>
-            <a:endParaRPr lang="en-US" sz="1050" dirty="0"/>
-          </a:p>
-        </p:txBody>
-      </p:sp>
-      <p:sp>
-        <p:nvSpPr>
-          <p:cNvPr id="15" name="Shape 13"/>
-          <p:cNvSpPr/>
-          <p:nvPr/>
-        </p:nvSpPr>
-        <p:spPr>
-          <a:xfrm>
-            <a:off x="3840480" y="4828032"/>
-            <a:ext cx="301752" cy="457200"/>
-          </a:xfrm>
-          <a:prstGeom prst="rect">
-            <a:avLst/>
-          </a:prstGeom>
-          <a:solidFill>
-            <a:srgbClr val="C9CCCE"/>
-          </a:solidFill>
-          <a:ln w="12700">
-            <a:solidFill>
-              <a:srgbClr val="C9CCCE"/>
-            </a:solidFill>
-            <a:prstDash val="solid"/>
-          </a:ln>
-        </p:spPr>
-      </p:sp>
-      <p:sp>
-        <p:nvSpPr>
-          <p:cNvPr id="16" name="Shape 14"/>
-          <p:cNvSpPr/>
-          <p:nvPr/>
-        </p:nvSpPr>
-        <p:spPr>
-          <a:xfrm>
-            <a:off x="4187952" y="4828032"/>
-            <a:ext cx="301752" cy="457200"/>
-          </a:xfrm>
-          <a:prstGeom prst="rect">
-            <a:avLst/>
-          </a:prstGeom>
-          <a:solidFill>
-            <a:srgbClr val="232A2F"/>
-          </a:solidFill>
-          <a:ln w="12700">
-            <a:solidFill>
-              <a:srgbClr val="232A2F"/>
-            </a:solidFill>
-            <a:prstDash val="solid"/>
-          </a:ln>
-        </p:spPr>
-      </p:sp>
-      <p:sp>
-        <p:nvSpPr>
-          <p:cNvPr id="17" name="Shape 15"/>
-          <p:cNvSpPr/>
-          <p:nvPr/>
-        </p:nvSpPr>
-        <p:spPr>
-          <a:xfrm>
-            <a:off x="4535424" y="4828032"/>
-            <a:ext cx="301752" cy="457200"/>
-          </a:xfrm>
-          <a:prstGeom prst="rect">
-            <a:avLst/>
-          </a:prstGeom>
-          <a:solidFill>
-            <a:srgbClr val="959B9F"/>
-          </a:solidFill>
-          <a:ln w="12700">
-            <a:solidFill>
-              <a:srgbClr val="959B9F"/>
-            </a:solidFill>
-            <a:prstDash val="solid"/>
-          </a:ln>
-        </p:spPr>
-      </p:sp>
-      <p:sp>
-        <p:nvSpPr>
-          <p:cNvPr id="18" name="Shape 16"/>
-          <p:cNvSpPr/>
-          <p:nvPr/>
-        </p:nvSpPr>
-        <p:spPr>
-          <a:xfrm>
-            <a:off x="4882896" y="4828032"/>
-            <a:ext cx="301752" cy="457200"/>
-          </a:xfrm>
-          <a:prstGeom prst="rect">
-            <a:avLst/>
-          </a:prstGeom>
-          <a:solidFill>
-            <a:srgbClr val="414950"/>
-          </a:solidFill>
-          <a:ln w="12700">
-            <a:solidFill>
-              <a:srgbClr val="414950"/>
-            </a:solidFill>
-            <a:prstDash val="solid"/>
-          </a:ln>
-        </p:spPr>
-      </p:sp>
-      <p:sp>
-        <p:nvSpPr>
-          <p:cNvPr id="19" name="Shape 17"/>
-          <p:cNvSpPr/>
-          <p:nvPr/>
-        </p:nvSpPr>
-        <p:spPr>
-          <a:xfrm>
-            <a:off x="5230368" y="4828032"/>
-            <a:ext cx="301752" cy="457200"/>
-          </a:xfrm>
-          <a:prstGeom prst="rect">
-            <a:avLst/>
-          </a:prstGeom>
-          <a:solidFill>
-            <a:srgbClr val="AFB4B7"/>
-          </a:solidFill>
-          <a:ln w="12700">
-            <a:solidFill>
-              <a:srgbClr val="AFB4B7"/>
-            </a:solidFill>
-            <a:prstDash val="solid"/>
-          </a:ln>
-        </p:spPr>
-      </p:sp>
-      <p:sp>
-        <p:nvSpPr>
-          <p:cNvPr id="20" name="Shape 18"/>
-          <p:cNvSpPr/>
-          <p:nvPr/>
-        </p:nvSpPr>
-        <p:spPr>
-          <a:xfrm>
-            <a:off x="5577840" y="4828032"/>
-            <a:ext cx="301752" cy="457200"/>
-          </a:xfrm>
-          <a:prstGeom prst="rect">
-            <a:avLst/>
-          </a:prstGeom>
-          <a:solidFill>
-            <a:srgbClr val="232A2F"/>
-          </a:solidFill>
-          <a:ln w="12700">
-            <a:solidFill>
-              <a:srgbClr val="232A2F"/>
-            </a:solidFill>
-            <a:prstDash val="solid"/>
-          </a:ln>
-        </p:spPr>
-      </p:sp>
-      <p:sp>
-        <p:nvSpPr>
-          <p:cNvPr id="21" name="Shape 19"/>
-          <p:cNvSpPr/>
-          <p:nvPr/>
-        </p:nvSpPr>
-        <p:spPr>
-          <a:xfrm>
-            <a:off x="5925312" y="4828032"/>
-            <a:ext cx="301752" cy="457200"/>
-          </a:xfrm>
-          <a:prstGeom prst="rect">
-            <a:avLst/>
-          </a:prstGeom>
-          <a:solidFill>
-            <a:srgbClr val="C9CCCE"/>
-          </a:solidFill>
-          <a:ln w="12700">
-            <a:solidFill>
-              <a:srgbClr val="C9CCCE"/>
-            </a:solidFill>
-            <a:prstDash val="solid"/>
-          </a:ln>
-        </p:spPr>
-      </p:sp>
-      <p:sp>
-        <p:nvSpPr>
-          <p:cNvPr id="22" name="Shape 20"/>
-          <p:cNvSpPr/>
-          <p:nvPr/>
-        </p:nvSpPr>
-        <p:spPr>
-          <a:xfrm>
-            <a:off x="6272784" y="4828032"/>
-            <a:ext cx="301752" cy="457200"/>
-          </a:xfrm>
-          <a:prstGeom prst="rect">
-            <a:avLst/>
-          </a:prstGeom>
-          <a:solidFill>
-            <a:srgbClr val="FAFAFA"/>
-          </a:solidFill>
-          <a:ln w="12700">
-            <a:solidFill>
-              <a:srgbClr val="FAFAFA"/>
-            </a:solidFill>
-            <a:prstDash val="solid"/>
-          </a:ln>
-        </p:spPr>
-      </p:sp>
-      <p:sp>
-        <p:nvSpPr>
-          <p:cNvPr id="23" name="Text 21"/>
-          <p:cNvSpPr txBox="1"/>
-          <p:nvPr/>
-        </p:nvSpPr>
-        <p:spPr>
-          <a:xfrm>
-            <a:off x="3840480" y="5358384"/>
-            <a:ext cx="2926080" cy="256032"/>
-          </a:xfrm>
-          <a:prstGeom prst="rect">
-            <a:avLst/>
-          </a:prstGeom>
-          <a:noFill/>
-          <a:ln/>
-        </p:spPr>
-        <p:txBody>
-          <a:bodyPr wrap="square" lIns="0" tIns="0" rIns="0" bIns="0" rtlCol="0" anchor="ctr"/>
-          <a:lstStyle/>
-          <a:p>
-            <a:pPr indent="0" marL="0">
-              <a:buNone/>
-            </a:pPr>
-            <a:r>
-              <a:rPr lang="en-US" sz="1050" dirty="0">
-                <a:solidFill>
-                  <a:srgbClr val="6B747C"/>
-                </a:solidFill>
-                <a:latin typeface="Courier New" pitchFamily="34" charset="0"/>
-                <a:ea typeface="Courier New" pitchFamily="34" charset="-122"/>
-                <a:cs typeface="Courier New" pitchFamily="34" charset="-120"/>
-              </a:rPr>
-              <a:t>B · grafik mantık (notan)</a:t>
-            </a:r>
-            <a:endParaRPr lang="en-US" sz="1050" dirty="0"/>
-          </a:p>
-        </p:txBody>
-      </p:sp>
-      <p:sp>
-        <p:nvSpPr>
-          <p:cNvPr id="24" name="Text 22"/>
-          <p:cNvSpPr txBox="1"/>
-          <p:nvPr/>
-        </p:nvSpPr>
-        <p:spPr>
-          <a:xfrm>
-            <a:off x="777240" y="5705856"/>
-            <a:ext cx="5760720" cy="292608"/>
-          </a:xfrm>
-          <a:prstGeom prst="rect">
-            <a:avLst/>
-          </a:prstGeom>
-          <a:noFill/>
-          <a:ln/>
-        </p:spPr>
-        <p:txBody>
-          <a:bodyPr wrap="square" lIns="0" tIns="0" rIns="0" bIns="0" rtlCol="0" anchor="ctr"/>
-          <a:lstStyle/>
-          <a:p>
-            <a:pPr indent="0" marL="0">
-              <a:buNone/>
-            </a:pPr>
-            <a:r>
-              <a:rPr lang="en-US" sz="1400" i="1" dirty="0">
-                <a:solidFill>
-                  <a:srgbClr val="2A6289"/>
-                </a:solidFill>
-                <a:latin typeface="Calibri" pitchFamily="34" charset="0"/>
-                <a:ea typeface="Calibri" pitchFamily="34" charset="-122"/>
-                <a:cs typeface="Calibri" pitchFamily="34" charset="-120"/>
-              </a:rPr>
-              <a:t>İkisi de doğrudur — karıştırılması yanlıştır.</a:t>
-            </a:r>
-            <a:endParaRPr lang="en-US" sz="1400" dirty="0"/>
-          </a:p>
-        </p:txBody>
-      </p:sp>
-      <p:sp>
-        <p:nvSpPr>
-          <p:cNvPr id="25" name="Shape 23"/>
-          <p:cNvSpPr/>
-          <p:nvPr/>
-        </p:nvSpPr>
-        <p:spPr>
-          <a:xfrm>
-            <a:off x="6903720" y="1737360"/>
-            <a:ext cx="4507992" cy="4114800"/>
+            <a:off x="6949440" y="1828800"/>
+            <a:ext cx="4462272" cy="3977640"/>
           </a:xfrm>
           <a:prstGeom prst="rect">
             <a:avLst/>
@@ -17782,473 +17598,181 @@
       </p:sp>
       <p:sp>
         <p:nvSpPr>
-          <p:cNvPr id="26" name="Shape 24"/>
-          <p:cNvSpPr/>
-          <p:nvPr/>
-        </p:nvSpPr>
-        <p:spPr>
-          <a:xfrm>
-            <a:off x="8951976" y="1965960"/>
-            <a:ext cx="1371600" cy="1005840"/>
-          </a:xfrm>
-          <a:prstGeom prst="rect">
-            <a:avLst/>
-          </a:prstGeom>
-          <a:solidFill>
-            <a:srgbClr val="FFFFFF"/>
-          </a:solidFill>
-          <a:ln w="12700">
-            <a:solidFill>
-              <a:srgbClr val="232A2F"/>
-            </a:solidFill>
-            <a:prstDash val="solid"/>
-          </a:ln>
-        </p:spPr>
-      </p:sp>
-      <p:sp>
-        <p:nvSpPr>
-          <p:cNvPr id="27" name="Shape 25"/>
-          <p:cNvSpPr/>
-          <p:nvPr/>
-        </p:nvSpPr>
-        <p:spPr>
-          <a:xfrm>
-            <a:off x="8750808" y="2148840"/>
-            <a:ext cx="1371600" cy="1005840"/>
-          </a:xfrm>
-          <a:prstGeom prst="rect">
-            <a:avLst/>
-          </a:prstGeom>
-          <a:solidFill>
-            <a:srgbClr val="FFFFFF"/>
-          </a:solidFill>
-          <a:ln w="12700">
-            <a:solidFill>
-              <a:srgbClr val="232A2F"/>
-            </a:solidFill>
-            <a:prstDash val="solid"/>
-          </a:ln>
-        </p:spPr>
-      </p:sp>
-      <p:sp>
-        <p:nvSpPr>
-          <p:cNvPr id="28" name="Shape 26"/>
-          <p:cNvSpPr/>
-          <p:nvPr/>
-        </p:nvSpPr>
-        <p:spPr>
-          <a:xfrm>
-            <a:off x="8549640" y="2331720"/>
-            <a:ext cx="1371600" cy="1005840"/>
-          </a:xfrm>
-          <a:prstGeom prst="rect">
-            <a:avLst/>
-          </a:prstGeom>
-          <a:solidFill>
-            <a:srgbClr val="FFFFFF"/>
-          </a:solidFill>
-          <a:ln w="12700">
-            <a:solidFill>
-              <a:srgbClr val="232A2F"/>
-            </a:solidFill>
-            <a:prstDash val="solid"/>
-          </a:ln>
-        </p:spPr>
-      </p:sp>
-      <p:sp>
-        <p:nvSpPr>
-          <p:cNvPr id="29" name="Shape 27"/>
-          <p:cNvSpPr/>
-          <p:nvPr/>
-        </p:nvSpPr>
-        <p:spPr>
-          <a:xfrm>
-            <a:off x="8348472" y="2514600"/>
-            <a:ext cx="1371600" cy="1005840"/>
-          </a:xfrm>
-          <a:prstGeom prst="rect">
-            <a:avLst/>
-          </a:prstGeom>
-          <a:solidFill>
-            <a:srgbClr val="FFFFFF"/>
-          </a:solidFill>
-          <a:ln w="12700">
-            <a:solidFill>
-              <a:srgbClr val="414950"/>
-            </a:solidFill>
-            <a:prstDash val="solid"/>
-          </a:ln>
-        </p:spPr>
-      </p:sp>
-      <p:sp>
-        <p:nvSpPr>
-          <p:cNvPr id="30" name="Shape 28"/>
-          <p:cNvSpPr/>
-          <p:nvPr/>
-        </p:nvSpPr>
-        <p:spPr>
-          <a:xfrm>
-            <a:off x="8147304" y="2697480"/>
-            <a:ext cx="1371600" cy="1005840"/>
-          </a:xfrm>
-          <a:prstGeom prst="rect">
-            <a:avLst/>
-          </a:prstGeom>
-          <a:solidFill>
-            <a:srgbClr val="FFFFFF"/>
-          </a:solidFill>
-          <a:ln w="12700">
-            <a:solidFill>
-              <a:srgbClr val="5F676D"/>
-            </a:solidFill>
-            <a:prstDash val="solid"/>
-          </a:ln>
-        </p:spPr>
-      </p:sp>
-      <p:sp>
-        <p:nvSpPr>
-          <p:cNvPr id="31" name="Shape 29"/>
-          <p:cNvSpPr/>
-          <p:nvPr/>
-        </p:nvSpPr>
-        <p:spPr>
-          <a:xfrm>
-            <a:off x="7946136" y="2880360"/>
-            <a:ext cx="1371600" cy="1005840"/>
-          </a:xfrm>
-          <a:prstGeom prst="rect">
-            <a:avLst/>
-          </a:prstGeom>
-          <a:solidFill>
-            <a:srgbClr val="FFFFFF"/>
-          </a:solidFill>
-          <a:ln w="12700">
-            <a:solidFill>
-              <a:srgbClr val="7B8288"/>
-            </a:solidFill>
-            <a:prstDash val="solid"/>
-          </a:ln>
-        </p:spPr>
-      </p:sp>
-      <p:sp>
-        <p:nvSpPr>
-          <p:cNvPr id="32" name="Shape 30"/>
-          <p:cNvSpPr/>
-          <p:nvPr/>
-        </p:nvSpPr>
-        <p:spPr>
-          <a:xfrm>
-            <a:off x="7744968" y="3063240"/>
-            <a:ext cx="1371600" cy="1005840"/>
-          </a:xfrm>
-          <a:prstGeom prst="rect">
-            <a:avLst/>
-          </a:prstGeom>
-          <a:solidFill>
-            <a:srgbClr val="FFFFFF"/>
-          </a:solidFill>
-          <a:ln w="12700">
-            <a:solidFill>
-              <a:srgbClr val="959B9F"/>
-            </a:solidFill>
-            <a:prstDash val="solid"/>
-          </a:ln>
-        </p:spPr>
-      </p:sp>
-      <p:sp>
-        <p:nvSpPr>
-          <p:cNvPr id="33" name="Shape 31"/>
-          <p:cNvSpPr/>
-          <p:nvPr/>
-        </p:nvSpPr>
-        <p:spPr>
-          <a:xfrm>
-            <a:off x="7543800" y="3246120"/>
-            <a:ext cx="1371600" cy="1005840"/>
-          </a:xfrm>
-          <a:prstGeom prst="rect">
-            <a:avLst/>
-          </a:prstGeom>
-          <a:solidFill>
-            <a:srgbClr val="FFFFFF"/>
-          </a:solidFill>
-          <a:ln w="20320">
-            <a:solidFill>
-              <a:srgbClr val="AFB4B7"/>
-            </a:solidFill>
-            <a:prstDash val="solid"/>
-          </a:ln>
-        </p:spPr>
-      </p:sp>
-      <p:sp>
-        <p:nvSpPr>
-          <p:cNvPr id="34" name="Text 32"/>
-          <p:cNvSpPr txBox="1"/>
-          <p:nvPr/>
-        </p:nvSpPr>
-        <p:spPr>
-          <a:xfrm>
-            <a:off x="7315200" y="5138928"/>
-            <a:ext cx="2743200" cy="256032"/>
-          </a:xfrm>
-          <a:prstGeom prst="rect">
-            <a:avLst/>
-          </a:prstGeom>
-          <a:noFill/>
-          <a:ln/>
-        </p:spPr>
-        <p:txBody>
-          <a:bodyPr wrap="square" lIns="0" tIns="0" rIns="0" bIns="0" rtlCol="0" anchor="ctr"/>
-          <a:lstStyle/>
-          <a:p>
-            <a:pPr indent="0" marL="0">
-              <a:buNone/>
-            </a:pPr>
-            <a:r>
-              <a:rPr lang="en-US" sz="950" dirty="0">
-                <a:solidFill>
-                  <a:srgbClr val="6B747C"/>
-                </a:solidFill>
-                <a:latin typeface="Courier New" pitchFamily="34" charset="0"/>
-                <a:ea typeface="Courier New" pitchFamily="34" charset="-122"/>
-                <a:cs typeface="Courier New" pitchFamily="34" charset="-120"/>
-              </a:rPr>
-              <a:t>8 katman, ayrı ayrı çizilir</a:t>
-            </a:r>
-            <a:endParaRPr lang="en-US" sz="950" dirty="0"/>
-          </a:p>
-        </p:txBody>
-      </p:sp>
-      <p:sp>
-        <p:nvSpPr>
-          <p:cNvPr id="35" name="Shape 33"/>
-          <p:cNvSpPr/>
-          <p:nvPr/>
-        </p:nvSpPr>
-        <p:spPr>
-          <a:xfrm>
-            <a:off x="9646920" y="3246120"/>
-            <a:ext cx="457200" cy="0"/>
-          </a:xfrm>
-          <a:prstGeom prst="line">
-            <a:avLst/>
-          </a:prstGeom>
-          <a:noFill/>
-          <a:ln w="19050">
-            <a:solidFill>
-              <a:srgbClr val="2A6289"/>
-            </a:solidFill>
-            <a:prstDash val="solid"/>
-          </a:ln>
-        </p:spPr>
-      </p:sp>
-      <p:sp>
-        <p:nvSpPr>
-          <p:cNvPr id="36" name="Shape 34"/>
-          <p:cNvSpPr/>
-          <p:nvPr/>
-        </p:nvSpPr>
-        <p:spPr>
-          <a:xfrm>
-            <a:off x="9966960" y="3108960"/>
-            <a:ext cx="146304" cy="137160"/>
-          </a:xfrm>
-          <a:prstGeom prst="line">
-            <a:avLst/>
-          </a:prstGeom>
-          <a:noFill/>
-          <a:ln w="19050">
-            <a:solidFill>
-              <a:srgbClr val="2A6289"/>
-            </a:solidFill>
-            <a:prstDash val="solid"/>
-          </a:ln>
-        </p:spPr>
-      </p:sp>
-      <p:sp>
-        <p:nvSpPr>
-          <p:cNvPr id="37" name="Shape 35"/>
-          <p:cNvSpPr/>
-          <p:nvPr/>
-        </p:nvSpPr>
-        <p:spPr>
-          <a:xfrm>
-            <a:off x="9966960" y="3383280"/>
-            <a:ext cx="146304" cy="-137160"/>
-          </a:xfrm>
-          <a:prstGeom prst="line">
-            <a:avLst/>
-          </a:prstGeom>
-          <a:noFill/>
-          <a:ln w="19050">
-            <a:solidFill>
-              <a:srgbClr val="2A6289"/>
-            </a:solidFill>
-            <a:prstDash val="solid"/>
-          </a:ln>
-        </p:spPr>
-      </p:sp>
-      <p:sp>
-        <p:nvSpPr>
-          <p:cNvPr id="38" name="Shape 36"/>
-          <p:cNvSpPr/>
-          <p:nvPr/>
-        </p:nvSpPr>
-        <p:spPr>
-          <a:xfrm>
-            <a:off x="10195560" y="2560320"/>
-            <a:ext cx="1005840" cy="1371600"/>
-          </a:xfrm>
-          <a:prstGeom prst="rect">
-            <a:avLst/>
-          </a:prstGeom>
-          <a:solidFill>
-            <a:srgbClr val="FFFFFF"/>
-          </a:solidFill>
-          <a:ln w="20320">
-            <a:solidFill>
-              <a:srgbClr val="1B1F24"/>
-            </a:solidFill>
-            <a:prstDash val="solid"/>
-          </a:ln>
-        </p:spPr>
-      </p:sp>
-      <p:sp>
-        <p:nvSpPr>
-          <p:cNvPr id="39" name="Shape 37"/>
-          <p:cNvSpPr/>
-          <p:nvPr/>
-        </p:nvSpPr>
-        <p:spPr>
-          <a:xfrm>
-            <a:off x="10241280" y="2834640"/>
-            <a:ext cx="914400" cy="182880"/>
-          </a:xfrm>
-          <a:prstGeom prst="rect">
-            <a:avLst/>
-          </a:prstGeom>
-          <a:solidFill>
-            <a:srgbClr val="414950"/>
-          </a:solidFill>
-          <a:ln w="12700">
-            <a:solidFill>
-              <a:srgbClr val="414950"/>
-            </a:solidFill>
-            <a:prstDash val="solid"/>
-          </a:ln>
-        </p:spPr>
-      </p:sp>
-      <p:sp>
-        <p:nvSpPr>
-          <p:cNvPr id="40" name="Shape 38"/>
-          <p:cNvSpPr/>
-          <p:nvPr/>
-        </p:nvSpPr>
-        <p:spPr>
-          <a:xfrm>
-            <a:off x="10241280" y="3063240"/>
-            <a:ext cx="914400" cy="182880"/>
-          </a:xfrm>
-          <a:prstGeom prst="rect">
-            <a:avLst/>
-          </a:prstGeom>
-          <a:solidFill>
-            <a:srgbClr val="7B8288"/>
-          </a:solidFill>
-          <a:ln w="12700">
-            <a:solidFill>
-              <a:srgbClr val="7B8288"/>
-            </a:solidFill>
-            <a:prstDash val="solid"/>
-          </a:ln>
-        </p:spPr>
-      </p:sp>
-      <p:sp>
-        <p:nvSpPr>
-          <p:cNvPr id="41" name="Shape 39"/>
-          <p:cNvSpPr/>
-          <p:nvPr/>
-        </p:nvSpPr>
-        <p:spPr>
-          <a:xfrm>
-            <a:off x="10241280" y="3291840"/>
-            <a:ext cx="914400" cy="182880"/>
-          </a:xfrm>
-          <a:prstGeom prst="rect">
-            <a:avLst/>
-          </a:prstGeom>
-          <a:solidFill>
-            <a:srgbClr val="AFB4B7"/>
-          </a:solidFill>
-          <a:ln w="12700">
-            <a:solidFill>
-              <a:srgbClr val="AFB4B7"/>
-            </a:solidFill>
-            <a:prstDash val="solid"/>
-          </a:ln>
-        </p:spPr>
-      </p:sp>
-      <p:sp>
-        <p:nvSpPr>
-          <p:cNvPr id="42" name="Shape 40"/>
-          <p:cNvSpPr/>
-          <p:nvPr/>
-        </p:nvSpPr>
-        <p:spPr>
-          <a:xfrm>
-            <a:off x="10241280" y="3520440"/>
-            <a:ext cx="914400" cy="182880"/>
-          </a:xfrm>
-          <a:prstGeom prst="rect">
-            <a:avLst/>
-          </a:prstGeom>
-          <a:solidFill>
-            <a:srgbClr val="E2E4E5"/>
-          </a:solidFill>
-          <a:ln w="12700">
-            <a:solidFill>
-              <a:srgbClr val="E2E4E5"/>
-            </a:solidFill>
-            <a:prstDash val="solid"/>
-          </a:ln>
-        </p:spPr>
-      </p:sp>
-      <p:sp>
-        <p:nvSpPr>
-          <p:cNvPr id="43" name="Text 41"/>
-          <p:cNvSpPr txBox="1"/>
-          <p:nvPr/>
-        </p:nvSpPr>
-        <p:spPr>
-          <a:xfrm>
-            <a:off x="10058400" y="4041648"/>
-            <a:ext cx="1371600" cy="256032"/>
-          </a:xfrm>
-          <a:prstGeom prst="rect">
-            <a:avLst/>
-          </a:prstGeom>
-          <a:noFill/>
-          <a:ln/>
-        </p:spPr>
-        <p:txBody>
-          <a:bodyPr wrap="square" lIns="0" tIns="0" rIns="0" bIns="0" rtlCol="0" anchor="ctr"/>
-          <a:lstStyle/>
-          <a:p>
-            <a:pPr indent="0" marL="0">
-              <a:buNone/>
-            </a:pPr>
-            <a:r>
-              <a:rPr lang="en-US" sz="950" dirty="0">
-                <a:solidFill>
-                  <a:srgbClr val="2A6289"/>
-                </a:solidFill>
-                <a:latin typeface="Courier New" pitchFamily="34" charset="0"/>
-                <a:ea typeface="Courier New" pitchFamily="34" charset="-122"/>
-                <a:cs typeface="Courier New" pitchFamily="34" charset="-120"/>
-              </a:rPr>
-              <a:t>önden tek sahne</a:t>
-            </a:r>
-            <a:endParaRPr lang="en-US" sz="950" dirty="0"/>
+          <p:cNvPr id="9" name="Text 7"/>
+          <p:cNvSpPr txBox="1"/>
+          <p:nvPr/>
+        </p:nvSpPr>
+        <p:spPr>
+          <a:xfrm>
+            <a:off x="7315200" y="2103120"/>
+            <a:ext cx="3749040" cy="365760"/>
+          </a:xfrm>
+          <a:prstGeom prst="rect">
+            <a:avLst/>
+          </a:prstGeom>
+          <a:noFill/>
+          <a:ln/>
+        </p:spPr>
+        <p:txBody>
+          <a:bodyPr wrap="square" lIns="0" tIns="0" rIns="0" bIns="0" rtlCol="0" anchor="ctr"/>
+          <a:lstStyle/>
+          <a:p>
+            <a:pPr indent="0" marL="0">
+              <a:buNone/>
+            </a:pPr>
+            <a:r>
+              <a:rPr lang="en-US" sz="1900" b="1" dirty="0">
+                <a:solidFill>
+                  <a:srgbClr val="1B1F24"/>
+                </a:solidFill>
+                <a:latin typeface="Calibri" pitchFamily="34" charset="0"/>
+                <a:ea typeface="Calibri" pitchFamily="34" charset="-122"/>
+                <a:cs typeface="Calibri" pitchFamily="34" charset="-120"/>
+              </a:rPr>
+              <a:t>Neden tekrar?</a:t>
+            </a:r>
+            <a:endParaRPr lang="en-US" sz="1900" dirty="0"/>
+          </a:p>
+        </p:txBody>
+      </p:sp>
+      <p:sp>
+        <p:nvSpPr>
+          <p:cNvPr id="10" name="Text 8"/>
+          <p:cNvSpPr txBox="1"/>
+          <p:nvPr/>
+        </p:nvSpPr>
+        <p:spPr>
+          <a:xfrm>
+            <a:off x="7315200" y="2651760"/>
+            <a:ext cx="3749040" cy="3017520"/>
+          </a:xfrm>
+          <a:prstGeom prst="rect">
+            <a:avLst/>
+          </a:prstGeom>
+          <a:noFill/>
+          <a:ln/>
+        </p:spPr>
+        <p:txBody>
+          <a:bodyPr wrap="square" lIns="0" tIns="0" rIns="0" bIns="0" rtlCol="0" anchor="ctr"/>
+          <a:lstStyle/>
+          <a:p>
+            <a:pPr indent="0" marL="0">
+              <a:lnSpc>
+                <a:spcPts val="2100"/>
+              </a:lnSpc>
+              <a:buNone/>
+            </a:pPr>
+            <a:r>
+              <a:rPr lang="en-US" sz="1450" dirty="0">
+                <a:solidFill>
+                  <a:srgbClr val="1B1F24"/>
+                </a:solidFill>
+                <a:latin typeface="Calibri" pitchFamily="34" charset="0"/>
+                <a:ea typeface="Calibri" pitchFamily="34" charset="-122"/>
+                <a:cs typeface="Calibri" pitchFamily="34" charset="-120"/>
+              </a:rPr>
+              <a:t>Aynı problemi ikinci kez çözmek, iki farklı problemi bir kez çözmekten daha çok öğretir.</a:t>
+            </a:r>
+            <a:endParaRPr lang="en-US" sz="1450" dirty="0"/>
+          </a:p>
+          <a:p>
+            <a:pPr indent="0" marL="0">
+              <a:lnSpc>
+                <a:spcPts val="2100"/>
+              </a:lnSpc>
+              <a:buNone/>
+            </a:pPr>
+            <a:r>
+              <a:rPr lang="en-US" sz="800" dirty="0">
+                <a:solidFill>
+                  <a:srgbClr val="1B1F24"/>
+                </a:solidFill>
+                <a:latin typeface="Calibri" pitchFamily="34" charset="0"/>
+                <a:ea typeface="Calibri" pitchFamily="34" charset="-122"/>
+                <a:cs typeface="Calibri" pitchFamily="34" charset="-120"/>
+              </a:rPr>
+              <a:t>
+</a:t>
+            </a:r>
+            <a:endParaRPr lang="en-US" sz="1450" dirty="0"/>
+          </a:p>
+          <a:p>
+            <a:pPr indent="0" marL="0">
+              <a:lnSpc>
+                <a:spcPts val="2100"/>
+              </a:lnSpc>
+              <a:buNone/>
+            </a:pPr>
+            <a:r>
+              <a:rPr lang="en-US" sz="1450" dirty="0">
+                <a:solidFill>
+                  <a:srgbClr val="1B1F24"/>
+                </a:solidFill>
+                <a:latin typeface="Calibri" pitchFamily="34" charset="0"/>
+                <a:ea typeface="Calibri" pitchFamily="34" charset="-122"/>
+                <a:cs typeface="Calibri" pitchFamily="34" charset="-120"/>
+              </a:rPr>
+              <a:t>Sınıftaki çalışma yönlendirilmiştir, evdeki değildir. </a:t>
+            </a:r>
+            <a:pPr indent="0" marL="0">
+              <a:lnSpc>
+                <a:spcPts val="2100"/>
+              </a:lnSpc>
+              <a:buNone/>
+            </a:pPr>
+            <a:r>
+              <a:rPr lang="en-US" sz="1450" b="1" dirty="0">
+                <a:solidFill>
+                  <a:srgbClr val="1B1F24"/>
+                </a:solidFill>
+                <a:latin typeface="Calibri" pitchFamily="34" charset="0"/>
+                <a:ea typeface="Calibri" pitchFamily="34" charset="-122"/>
+                <a:cs typeface="Calibri" pitchFamily="34" charset="-120"/>
+              </a:rPr>
+              <a:t>Fark, öğrenmenin nerede olduğunu gösterir.</a:t>
+            </a:r>
+            <a:endParaRPr lang="en-US" sz="1450" dirty="0"/>
+          </a:p>
+          <a:p>
+            <a:pPr indent="0" marL="0">
+              <a:lnSpc>
+                <a:spcPts val="2100"/>
+              </a:lnSpc>
+              <a:buNone/>
+            </a:pPr>
+            <a:r>
+              <a:rPr lang="en-US" sz="800" dirty="0">
+                <a:solidFill>
+                  <a:srgbClr val="1B1F24"/>
+                </a:solidFill>
+                <a:latin typeface="Calibri" pitchFamily="34" charset="0"/>
+                <a:ea typeface="Calibri" pitchFamily="34" charset="-122"/>
+                <a:cs typeface="Calibri" pitchFamily="34" charset="-120"/>
+              </a:rPr>
+              <a:t>
+</a:t>
+            </a:r>
+            <a:endParaRPr lang="en-US" sz="1450" dirty="0"/>
+          </a:p>
+          <a:p>
+            <a:pPr indent="0" marL="0">
+              <a:lnSpc>
+                <a:spcPts val="2100"/>
+              </a:lnSpc>
+              <a:buNone/>
+            </a:pPr>
+            <a:r>
+              <a:rPr lang="en-US" sz="1450" dirty="0">
+                <a:solidFill>
+                  <a:srgbClr val="1B1F24"/>
+                </a:solidFill>
+                <a:latin typeface="Calibri" pitchFamily="34" charset="0"/>
+                <a:ea typeface="Calibri" pitchFamily="34" charset="-122"/>
+                <a:cs typeface="Calibri" pitchFamily="34" charset="-120"/>
+              </a:rPr>
+              <a:t>Tekrarı sınıftaki eşiyle yan yana koyup birlikte bakacağız.</a:t>
+            </a:r>
+            <a:endParaRPr lang="en-US" sz="1450" dirty="0"/>
           </a:p>
         </p:txBody>
       </p:sp>
@@ -18266,7 +17790,7 @@
     <p:bg>
       <p:bgPr>
         <a:solidFill>
-          <a:srgbClr val="1B1F24"/>
+          <a:srgbClr val="FFFFFF"/>
         </a:solidFill>
       </p:bgPr>
     </p:bg>
@@ -18311,7 +17835,7 @@
             <a:r>
               <a:rPr lang="en-US" sz="1100" spc="160" kern="0" dirty="0">
                 <a:solidFill>
-                  <a:srgbClr val="7FA9C6"/>
+                  <a:srgbClr val="6B747C"/>
                 </a:solidFill>
                 <a:latin typeface="Courier New" pitchFamily="34" charset="0"/>
                 <a:ea typeface="Courier New" pitchFamily="34" charset="-122"/>
@@ -18331,8 +17855,8 @@
         </p:nvSpPr>
         <p:spPr>
           <a:xfrm>
-            <a:off x="777240" y="1188720"/>
-            <a:ext cx="9326880" cy="1463040"/>
+            <a:off x="777240" y="868680"/>
+            <a:ext cx="10634472" cy="914400"/>
           </a:xfrm>
           <a:prstGeom prst="rect">
             <a:avLst/>
@@ -18346,208 +17870,1212 @@
           <a:p>
             <a:pPr indent="0" marL="0">
               <a:lnSpc>
-                <a:spcPts val="5000"/>
+                <a:spcPts val="3800"/>
               </a:lnSpc>
               <a:buNone/>
             </a:pPr>
             <a:r>
-              <a:rPr lang="en-US" sz="4000" b="1" dirty="0">
-                <a:solidFill>
-                  <a:srgbClr val="FFFFFF"/>
+              <a:rPr lang="en-US" sz="3400" b="1" dirty="0">
+                <a:solidFill>
+                  <a:srgbClr val="1B1F24"/>
                 </a:solidFill>
                 <a:latin typeface="Century Schoolbook" pitchFamily="34" charset="0"/>
                 <a:ea typeface="Century Schoolbook" pitchFamily="34" charset="-122"/>
                 <a:cs typeface="Century Schoolbook" pitchFamily="34" charset="-120"/>
               </a:rPr>
-              <a:t>Dönem bir sergiyle bitiyor:</a:t>
-            </a:r>
-            <a:endParaRPr lang="en-US" sz="4000" dirty="0"/>
-          </a:p>
+              <a:t>Final projesi: katmanlı temsil</a:t>
+            </a:r>
+            <a:endParaRPr lang="en-US" sz="3400" dirty="0"/>
+          </a:p>
+        </p:txBody>
+      </p:sp>
+      <p:sp>
+        <p:nvSpPr>
+          <p:cNvPr id="4" name="Text 2"/>
+          <p:cNvSpPr txBox="1"/>
+          <p:nvPr/>
+        </p:nvSpPr>
+        <p:spPr>
+          <a:xfrm>
+            <a:off x="777240" y="1828800"/>
+            <a:ext cx="5760720" cy="2377440"/>
+          </a:xfrm>
+          <a:prstGeom prst="rect">
+            <a:avLst/>
+          </a:prstGeom>
+          <a:noFill/>
+          <a:ln/>
+        </p:spPr>
+        <p:txBody>
+          <a:bodyPr wrap="square" lIns="0" tIns="0" rIns="0" bIns="0" rtlCol="0" anchor="ctr"/>
+          <a:lstStyle/>
           <a:p>
             <a:pPr indent="0" marL="0">
               <a:lnSpc>
-                <a:spcPts val="5000"/>
+                <a:spcPts val="2300"/>
               </a:lnSpc>
               <a:buNone/>
             </a:pPr>
             <a:r>
-              <a:rPr lang="en-US" sz="4000" b="1" dirty="0">
-                <a:solidFill>
-                  <a:srgbClr val="FFFFFF"/>
-                </a:solidFill>
-                <a:latin typeface="Century Schoolbook" pitchFamily="34" charset="0"/>
-                <a:ea typeface="Century Schoolbook" pitchFamily="34" charset="-122"/>
-                <a:cs typeface="Century Schoolbook" pitchFamily="34" charset="-120"/>
-              </a:rPr>
-              <a:t>“Derinlik Odası”</a:t>
-            </a:r>
-            <a:endParaRPr lang="en-US" sz="4000" dirty="0"/>
-          </a:p>
-        </p:txBody>
-      </p:sp>
-      <p:sp>
-        <p:nvSpPr>
-          <p:cNvPr id="4" name="Text 2"/>
-          <p:cNvSpPr txBox="1"/>
-          <p:nvPr/>
-        </p:nvSpPr>
-        <p:spPr>
-          <a:xfrm>
-            <a:off x="777240" y="2880360"/>
-            <a:ext cx="8778240" cy="731520"/>
-          </a:xfrm>
-          <a:prstGeom prst="rect">
-            <a:avLst/>
-          </a:prstGeom>
-          <a:noFill/>
-          <a:ln/>
-        </p:spPr>
-        <p:txBody>
-          <a:bodyPr wrap="square" lIns="0" tIns="0" rIns="0" bIns="0" rtlCol="0" anchor="ctr"/>
-          <a:lstStyle/>
-          <a:p>
-            <a:pPr indent="0" marL="0">
-              <a:lnSpc>
-                <a:spcPts val="2500"/>
-              </a:lnSpc>
-              <a:buNone/>
-            </a:pPr>
-            <a:r>
-              <a:rPr lang="en-US" sz="1700" dirty="0">
-                <a:solidFill>
-                  <a:srgbClr val="C9CCCE"/>
+              <a:rPr lang="en-US" sz="1550" dirty="0">
+                <a:solidFill>
+                  <a:srgbClr val="1B1F24"/>
                 </a:solidFill>
                 <a:latin typeface="Calibri" pitchFamily="34" charset="0"/>
                 <a:ea typeface="Calibri" pitchFamily="34" charset="-122"/>
                 <a:cs typeface="Calibri" pitchFamily="34" charset="-120"/>
               </a:rPr>
-              <a:t>Diyoramalar göz hizasında dizilecek. Her işin yanındaki duvarda o işin katman çizimleri ve değer sistemi paftası asılı olacak.</a:t>
-            </a:r>
-            <a:endParaRPr lang="en-US" sz="1700" dirty="0"/>
-          </a:p>
-        </p:txBody>
-      </p:sp>
-      <p:sp>
-        <p:nvSpPr>
-          <p:cNvPr id="5" name="Text 3"/>
-          <p:cNvSpPr txBox="1"/>
-          <p:nvPr/>
-        </p:nvSpPr>
-        <p:spPr>
-          <a:xfrm>
-            <a:off x="777240" y="3886200"/>
-            <a:ext cx="9509760" cy="1463040"/>
-          </a:xfrm>
-          <a:prstGeom prst="rect">
-            <a:avLst/>
-          </a:prstGeom>
-          <a:noFill/>
-          <a:ln/>
-        </p:spPr>
-        <p:txBody>
-          <a:bodyPr wrap="square" lIns="0" tIns="0" rIns="0" bIns="0" rtlCol="0" anchor="ctr"/>
-          <a:lstStyle/>
-          <a:p>
+              <a:t>Elle çizilmiş kâğıt katmanların arka arkaya, aralarında boşluk bırakılarak yerleştirilmesiyle kurulan, önden izlenen bir mekân temsili. </a:t>
+            </a:r>
             <a:pPr indent="0" marL="0">
               <a:lnSpc>
-                <a:spcPts val="3400"/>
+                <a:spcPts val="2300"/>
               </a:lnSpc>
               <a:buNone/>
             </a:pPr>
             <a:r>
-              <a:rPr lang="en-US" sz="2300" i="1" dirty="0">
-                <a:solidFill>
-                  <a:srgbClr val="7FA9C6"/>
-                </a:solidFill>
-                <a:latin typeface="Century Schoolbook" pitchFamily="34" charset="0"/>
-                <a:ea typeface="Century Schoolbook" pitchFamily="34" charset="-122"/>
-                <a:cs typeface="Century Schoolbook" pitchFamily="34" charset="-120"/>
-              </a:rPr>
-              <a:t>Ziyaretçi önce sahneye bakıp derinliği yaşar.</a:t>
-            </a:r>
-            <a:endParaRPr lang="en-US" sz="2300" dirty="0"/>
-          </a:p>
-          <a:p>
-            <a:pPr indent="0" marL="0">
-              <a:lnSpc>
-                <a:spcPts val="3400"/>
-              </a:lnSpc>
-              <a:buNone/>
-            </a:pPr>
-            <a:r>
-              <a:rPr lang="en-US" sz="2300" i="1" dirty="0">
-                <a:solidFill>
-                  <a:srgbClr val="7FA9C6"/>
-                </a:solidFill>
-                <a:latin typeface="Century Schoolbook" pitchFamily="34" charset="0"/>
-                <a:ea typeface="Century Schoolbook" pitchFamily="34" charset="-122"/>
-                <a:cs typeface="Century Schoolbook" pitchFamily="34" charset="-120"/>
-              </a:rPr>
-              <a:t>Sonra yana döner ve o derinliğin sekiz düz çizimden nasıl kurulduğunu görür.</a:t>
-            </a:r>
-            <a:endParaRPr lang="en-US" sz="2300" dirty="0"/>
-          </a:p>
-        </p:txBody>
-      </p:sp>
-      <p:sp>
-        <p:nvSpPr>
-          <p:cNvPr id="6" name="Text 4"/>
-          <p:cNvSpPr txBox="1"/>
-          <p:nvPr/>
-        </p:nvSpPr>
-        <p:spPr>
-          <a:xfrm>
-            <a:off x="777240" y="5486400"/>
-            <a:ext cx="9509760" cy="822960"/>
-          </a:xfrm>
-          <a:prstGeom prst="rect">
-            <a:avLst/>
-          </a:prstGeom>
-          <a:noFill/>
-          <a:ln/>
-        </p:spPr>
-        <p:txBody>
-          <a:bodyPr wrap="square" lIns="0" tIns="0" rIns="0" bIns="0" rtlCol="0" anchor="ctr"/>
-          <a:lstStyle/>
-          <a:p>
-            <a:pPr indent="0" marL="0">
-              <a:lnSpc>
-                <a:spcPts val="2000"/>
-              </a:lnSpc>
-              <a:buNone/>
-            </a:pPr>
-            <a:r>
-              <a:rPr lang="en-US" sz="1400" dirty="0">
-                <a:solidFill>
-                  <a:srgbClr val="6B747C"/>
+              <a:rPr lang="en-US" sz="1550" b="1" dirty="0">
+                <a:solidFill>
+                  <a:srgbClr val="1B1F24"/>
                 </a:solidFill>
                 <a:latin typeface="Calibri" pitchFamily="34" charset="0"/>
                 <a:ea typeface="Calibri" pitchFamily="34" charset="-122"/>
                 <a:cs typeface="Calibri" pitchFamily="34" charset="-120"/>
               </a:rPr>
-              <a:t>Sergi bir kutlama değil — dersin son ölçme aracı. Ziyaretçiler her iş için tek bir soruyu yanıtlayacak:</a:t>
-            </a:r>
-            <a:endParaRPr lang="en-US" sz="1400" dirty="0"/>
-          </a:p>
-          <a:p>
+              <a:t>En az 8 katman</a:t>
+            </a:r>
             <a:pPr indent="0" marL="0">
               <a:lnSpc>
-                <a:spcPts val="2000"/>
+                <a:spcPts val="2300"/>
               </a:lnSpc>
               <a:buNone/>
             </a:pPr>
             <a:r>
-              <a:rPr lang="en-US" sz="1400" dirty="0">
-                <a:solidFill>
-                  <a:srgbClr val="6B747C"/>
+              <a:rPr lang="en-US" sz="1550" dirty="0">
+                <a:solidFill>
+                  <a:srgbClr val="1B1F24"/>
                 </a:solidFill>
                 <a:latin typeface="Calibri" pitchFamily="34" charset="0"/>
                 <a:ea typeface="Calibri" pitchFamily="34" charset="-122"/>
                 <a:cs typeface="Calibri" pitchFamily="34" charset="-120"/>
               </a:rPr>
-              <a:t>“Bu mekânda kendinizi nasıl hissettiniz?”</a:t>
-            </a:r>
-            <a:endParaRPr lang="en-US" sz="1400" dirty="0"/>
+              <a:t>. Konu serbest; zorunlu olan konu değil, katman mantığı ve değer sisteminin tutarlılığı.</a:t>
+            </a:r>
+            <a:endParaRPr lang="en-US" sz="1550" dirty="0"/>
+          </a:p>
+          <a:p>
+            <a:pPr indent="0" marL="0">
+              <a:lnSpc>
+                <a:spcPts val="2300"/>
+              </a:lnSpc>
+              <a:buNone/>
+            </a:pPr>
+            <a:r>
+              <a:rPr lang="en-US" sz="800" dirty="0">
+                <a:solidFill>
+                  <a:srgbClr val="1B1F24"/>
+                </a:solidFill>
+                <a:latin typeface="Calibri" pitchFamily="34" charset="0"/>
+                <a:ea typeface="Calibri" pitchFamily="34" charset="-122"/>
+                <a:cs typeface="Calibri" pitchFamily="34" charset="-120"/>
+              </a:rPr>
+              <a:t>
+</a:t>
+            </a:r>
+            <a:endParaRPr lang="en-US" sz="1550" dirty="0"/>
+          </a:p>
+          <a:p>
+            <a:pPr indent="0" marL="0">
+              <a:lnSpc>
+                <a:spcPts val="2300"/>
+              </a:lnSpc>
+              <a:buNone/>
+            </a:pPr>
+            <a:r>
+              <a:rPr lang="en-US" sz="1550" dirty="0">
+                <a:solidFill>
+                  <a:srgbClr val="1B1F24"/>
+                </a:solidFill>
+                <a:latin typeface="Calibri" pitchFamily="34" charset="0"/>
+                <a:ea typeface="Calibri" pitchFamily="34" charset="-122"/>
+                <a:cs typeface="Calibri" pitchFamily="34" charset="-120"/>
+              </a:rPr>
+              <a:t>Tek kesin kural: </a:t>
+            </a:r>
+            <a:pPr indent="0" marL="0">
+              <a:lnSpc>
+                <a:spcPts val="2300"/>
+              </a:lnSpc>
+              <a:buNone/>
+            </a:pPr>
+            <a:r>
+              <a:rPr lang="en-US" sz="1550" b="1" dirty="0">
+                <a:solidFill>
+                  <a:srgbClr val="1B1F24"/>
+                </a:solidFill>
+                <a:latin typeface="Calibri" pitchFamily="34" charset="0"/>
+                <a:ea typeface="Calibri" pitchFamily="34" charset="-122"/>
+                <a:cs typeface="Calibri" pitchFamily="34" charset="-120"/>
+              </a:rPr>
+              <a:t>her katman önce elle çizilir; kesim çizimin türevidir.</a:t>
+            </a:r>
+            <a:endParaRPr lang="en-US" sz="1550" dirty="0"/>
+          </a:p>
+        </p:txBody>
+      </p:sp>
+      <p:sp>
+        <p:nvSpPr>
+          <p:cNvPr id="5" name="Text 3"/>
+          <p:cNvSpPr txBox="1"/>
+          <p:nvPr/>
+        </p:nvSpPr>
+        <p:spPr>
+          <a:xfrm>
+            <a:off x="777240" y="4370832"/>
+            <a:ext cx="5760720" cy="365760"/>
+          </a:xfrm>
+          <a:prstGeom prst="rect">
+            <a:avLst/>
+          </a:prstGeom>
+          <a:noFill/>
+          <a:ln/>
+        </p:spPr>
+        <p:txBody>
+          <a:bodyPr wrap="square" lIns="0" tIns="0" rIns="0" bIns="0" rtlCol="0" anchor="ctr"/>
+          <a:lstStyle/>
+          <a:p>
+            <a:pPr indent="0" marL="0">
+              <a:buNone/>
+            </a:pPr>
+            <a:r>
+              <a:rPr lang="en-US" sz="1700" b="1" dirty="0">
+                <a:solidFill>
+                  <a:srgbClr val="1B1F24"/>
+                </a:solidFill>
+                <a:latin typeface="Calibri" pitchFamily="34" charset="0"/>
+                <a:ea typeface="Calibri" pitchFamily="34" charset="-122"/>
+                <a:cs typeface="Calibri" pitchFamily="34" charset="-120"/>
+              </a:rPr>
+              <a:t>Asıl kararınız: değer sistemi</a:t>
+            </a:r>
+            <a:endParaRPr lang="en-US" sz="1700" dirty="0"/>
+          </a:p>
+        </p:txBody>
+      </p:sp>
+      <p:sp>
+        <p:nvSpPr>
+          <p:cNvPr id="6" name="Shape 4"/>
+          <p:cNvSpPr/>
+          <p:nvPr/>
+        </p:nvSpPr>
+        <p:spPr>
+          <a:xfrm>
+            <a:off x="777240" y="4828032"/>
+            <a:ext cx="301752" cy="457200"/>
+          </a:xfrm>
+          <a:prstGeom prst="rect">
+            <a:avLst/>
+          </a:prstGeom>
+          <a:solidFill>
+            <a:srgbClr val="232A2F"/>
+          </a:solidFill>
+          <a:ln w="12700">
+            <a:solidFill>
+              <a:srgbClr val="232A2F"/>
+            </a:solidFill>
+            <a:prstDash val="solid"/>
+          </a:ln>
+        </p:spPr>
+      </p:sp>
+      <p:sp>
+        <p:nvSpPr>
+          <p:cNvPr id="7" name="Shape 5"/>
+          <p:cNvSpPr/>
+          <p:nvPr/>
+        </p:nvSpPr>
+        <p:spPr>
+          <a:xfrm>
+            <a:off x="1124712" y="4828032"/>
+            <a:ext cx="301752" cy="457200"/>
+          </a:xfrm>
+          <a:prstGeom prst="rect">
+            <a:avLst/>
+          </a:prstGeom>
+          <a:solidFill>
+            <a:srgbClr val="414950"/>
+          </a:solidFill>
+          <a:ln w="12700">
+            <a:solidFill>
+              <a:srgbClr val="414950"/>
+            </a:solidFill>
+            <a:prstDash val="solid"/>
+          </a:ln>
+        </p:spPr>
+      </p:sp>
+      <p:sp>
+        <p:nvSpPr>
+          <p:cNvPr id="8" name="Shape 6"/>
+          <p:cNvSpPr/>
+          <p:nvPr/>
+        </p:nvSpPr>
+        <p:spPr>
+          <a:xfrm>
+            <a:off x="1472184" y="4828032"/>
+            <a:ext cx="301752" cy="457200"/>
+          </a:xfrm>
+          <a:prstGeom prst="rect">
+            <a:avLst/>
+          </a:prstGeom>
+          <a:solidFill>
+            <a:srgbClr val="5F676D"/>
+          </a:solidFill>
+          <a:ln w="12700">
+            <a:solidFill>
+              <a:srgbClr val="5F676D"/>
+            </a:solidFill>
+            <a:prstDash val="solid"/>
+          </a:ln>
+        </p:spPr>
+      </p:sp>
+      <p:sp>
+        <p:nvSpPr>
+          <p:cNvPr id="9" name="Shape 7"/>
+          <p:cNvSpPr/>
+          <p:nvPr/>
+        </p:nvSpPr>
+        <p:spPr>
+          <a:xfrm>
+            <a:off x="1819656" y="4828032"/>
+            <a:ext cx="301752" cy="457200"/>
+          </a:xfrm>
+          <a:prstGeom prst="rect">
+            <a:avLst/>
+          </a:prstGeom>
+          <a:solidFill>
+            <a:srgbClr val="7B8288"/>
+          </a:solidFill>
+          <a:ln w="12700">
+            <a:solidFill>
+              <a:srgbClr val="7B8288"/>
+            </a:solidFill>
+            <a:prstDash val="solid"/>
+          </a:ln>
+        </p:spPr>
+      </p:sp>
+      <p:sp>
+        <p:nvSpPr>
+          <p:cNvPr id="10" name="Shape 8"/>
+          <p:cNvSpPr/>
+          <p:nvPr/>
+        </p:nvSpPr>
+        <p:spPr>
+          <a:xfrm>
+            <a:off x="2167128" y="4828032"/>
+            <a:ext cx="301752" cy="457200"/>
+          </a:xfrm>
+          <a:prstGeom prst="rect">
+            <a:avLst/>
+          </a:prstGeom>
+          <a:solidFill>
+            <a:srgbClr val="959B9F"/>
+          </a:solidFill>
+          <a:ln w="12700">
+            <a:solidFill>
+              <a:srgbClr val="959B9F"/>
+            </a:solidFill>
+            <a:prstDash val="solid"/>
+          </a:ln>
+        </p:spPr>
+      </p:sp>
+      <p:sp>
+        <p:nvSpPr>
+          <p:cNvPr id="11" name="Shape 9"/>
+          <p:cNvSpPr/>
+          <p:nvPr/>
+        </p:nvSpPr>
+        <p:spPr>
+          <a:xfrm>
+            <a:off x="2514600" y="4828032"/>
+            <a:ext cx="301752" cy="457200"/>
+          </a:xfrm>
+          <a:prstGeom prst="rect">
+            <a:avLst/>
+          </a:prstGeom>
+          <a:solidFill>
+            <a:srgbClr val="AFB4B7"/>
+          </a:solidFill>
+          <a:ln w="12700">
+            <a:solidFill>
+              <a:srgbClr val="AFB4B7"/>
+            </a:solidFill>
+            <a:prstDash val="solid"/>
+          </a:ln>
+        </p:spPr>
+      </p:sp>
+      <p:sp>
+        <p:nvSpPr>
+          <p:cNvPr id="12" name="Shape 10"/>
+          <p:cNvSpPr/>
+          <p:nvPr/>
+        </p:nvSpPr>
+        <p:spPr>
+          <a:xfrm>
+            <a:off x="2862072" y="4828032"/>
+            <a:ext cx="301752" cy="457200"/>
+          </a:xfrm>
+          <a:prstGeom prst="rect">
+            <a:avLst/>
+          </a:prstGeom>
+          <a:solidFill>
+            <a:srgbClr val="C9CCCE"/>
+          </a:solidFill>
+          <a:ln w="12700">
+            <a:solidFill>
+              <a:srgbClr val="C9CCCE"/>
+            </a:solidFill>
+            <a:prstDash val="solid"/>
+          </a:ln>
+        </p:spPr>
+      </p:sp>
+      <p:sp>
+        <p:nvSpPr>
+          <p:cNvPr id="13" name="Shape 11"/>
+          <p:cNvSpPr/>
+          <p:nvPr/>
+        </p:nvSpPr>
+        <p:spPr>
+          <a:xfrm>
+            <a:off x="3209544" y="4828032"/>
+            <a:ext cx="301752" cy="457200"/>
+          </a:xfrm>
+          <a:prstGeom prst="rect">
+            <a:avLst/>
+          </a:prstGeom>
+          <a:solidFill>
+            <a:srgbClr val="E2E4E5"/>
+          </a:solidFill>
+          <a:ln w="12700">
+            <a:solidFill>
+              <a:srgbClr val="E2E4E5"/>
+            </a:solidFill>
+            <a:prstDash val="solid"/>
+          </a:ln>
+        </p:spPr>
+      </p:sp>
+      <p:sp>
+        <p:nvSpPr>
+          <p:cNvPr id="14" name="Text 12"/>
+          <p:cNvSpPr txBox="1"/>
+          <p:nvPr/>
+        </p:nvSpPr>
+        <p:spPr>
+          <a:xfrm>
+            <a:off x="777240" y="5358384"/>
+            <a:ext cx="2743200" cy="256032"/>
+          </a:xfrm>
+          <a:prstGeom prst="rect">
+            <a:avLst/>
+          </a:prstGeom>
+          <a:noFill/>
+          <a:ln/>
+        </p:spPr>
+        <p:txBody>
+          <a:bodyPr wrap="square" lIns="0" tIns="0" rIns="0" bIns="0" rtlCol="0" anchor="ctr"/>
+          <a:lstStyle/>
+          <a:p>
+            <a:pPr indent="0" marL="0">
+              <a:buNone/>
+            </a:pPr>
+            <a:r>
+              <a:rPr lang="en-US" sz="1050" dirty="0">
+                <a:solidFill>
+                  <a:srgbClr val="6B747C"/>
+                </a:solidFill>
+                <a:latin typeface="Courier New" pitchFamily="34" charset="0"/>
+                <a:ea typeface="Courier New" pitchFamily="34" charset="-122"/>
+                <a:cs typeface="Courier New" pitchFamily="34" charset="-120"/>
+              </a:rPr>
+              <a:t>A · mesafe mantığı</a:t>
+            </a:r>
+            <a:endParaRPr lang="en-US" sz="1050" dirty="0"/>
+          </a:p>
+        </p:txBody>
+      </p:sp>
+      <p:sp>
+        <p:nvSpPr>
+          <p:cNvPr id="15" name="Shape 13"/>
+          <p:cNvSpPr/>
+          <p:nvPr/>
+        </p:nvSpPr>
+        <p:spPr>
+          <a:xfrm>
+            <a:off x="3840480" y="4828032"/>
+            <a:ext cx="301752" cy="457200"/>
+          </a:xfrm>
+          <a:prstGeom prst="rect">
+            <a:avLst/>
+          </a:prstGeom>
+          <a:solidFill>
+            <a:srgbClr val="C9CCCE"/>
+          </a:solidFill>
+          <a:ln w="12700">
+            <a:solidFill>
+              <a:srgbClr val="C9CCCE"/>
+            </a:solidFill>
+            <a:prstDash val="solid"/>
+          </a:ln>
+        </p:spPr>
+      </p:sp>
+      <p:sp>
+        <p:nvSpPr>
+          <p:cNvPr id="16" name="Shape 14"/>
+          <p:cNvSpPr/>
+          <p:nvPr/>
+        </p:nvSpPr>
+        <p:spPr>
+          <a:xfrm>
+            <a:off x="4187952" y="4828032"/>
+            <a:ext cx="301752" cy="457200"/>
+          </a:xfrm>
+          <a:prstGeom prst="rect">
+            <a:avLst/>
+          </a:prstGeom>
+          <a:solidFill>
+            <a:srgbClr val="232A2F"/>
+          </a:solidFill>
+          <a:ln w="12700">
+            <a:solidFill>
+              <a:srgbClr val="232A2F"/>
+            </a:solidFill>
+            <a:prstDash val="solid"/>
+          </a:ln>
+        </p:spPr>
+      </p:sp>
+      <p:sp>
+        <p:nvSpPr>
+          <p:cNvPr id="17" name="Shape 15"/>
+          <p:cNvSpPr/>
+          <p:nvPr/>
+        </p:nvSpPr>
+        <p:spPr>
+          <a:xfrm>
+            <a:off x="4535424" y="4828032"/>
+            <a:ext cx="301752" cy="457200"/>
+          </a:xfrm>
+          <a:prstGeom prst="rect">
+            <a:avLst/>
+          </a:prstGeom>
+          <a:solidFill>
+            <a:srgbClr val="959B9F"/>
+          </a:solidFill>
+          <a:ln w="12700">
+            <a:solidFill>
+              <a:srgbClr val="959B9F"/>
+            </a:solidFill>
+            <a:prstDash val="solid"/>
+          </a:ln>
+        </p:spPr>
+      </p:sp>
+      <p:sp>
+        <p:nvSpPr>
+          <p:cNvPr id="18" name="Shape 16"/>
+          <p:cNvSpPr/>
+          <p:nvPr/>
+        </p:nvSpPr>
+        <p:spPr>
+          <a:xfrm>
+            <a:off x="4882896" y="4828032"/>
+            <a:ext cx="301752" cy="457200"/>
+          </a:xfrm>
+          <a:prstGeom prst="rect">
+            <a:avLst/>
+          </a:prstGeom>
+          <a:solidFill>
+            <a:srgbClr val="414950"/>
+          </a:solidFill>
+          <a:ln w="12700">
+            <a:solidFill>
+              <a:srgbClr val="414950"/>
+            </a:solidFill>
+            <a:prstDash val="solid"/>
+          </a:ln>
+        </p:spPr>
+      </p:sp>
+      <p:sp>
+        <p:nvSpPr>
+          <p:cNvPr id="19" name="Shape 17"/>
+          <p:cNvSpPr/>
+          <p:nvPr/>
+        </p:nvSpPr>
+        <p:spPr>
+          <a:xfrm>
+            <a:off x="5230368" y="4828032"/>
+            <a:ext cx="301752" cy="457200"/>
+          </a:xfrm>
+          <a:prstGeom prst="rect">
+            <a:avLst/>
+          </a:prstGeom>
+          <a:solidFill>
+            <a:srgbClr val="AFB4B7"/>
+          </a:solidFill>
+          <a:ln w="12700">
+            <a:solidFill>
+              <a:srgbClr val="AFB4B7"/>
+            </a:solidFill>
+            <a:prstDash val="solid"/>
+          </a:ln>
+        </p:spPr>
+      </p:sp>
+      <p:sp>
+        <p:nvSpPr>
+          <p:cNvPr id="20" name="Shape 18"/>
+          <p:cNvSpPr/>
+          <p:nvPr/>
+        </p:nvSpPr>
+        <p:spPr>
+          <a:xfrm>
+            <a:off x="5577840" y="4828032"/>
+            <a:ext cx="301752" cy="457200"/>
+          </a:xfrm>
+          <a:prstGeom prst="rect">
+            <a:avLst/>
+          </a:prstGeom>
+          <a:solidFill>
+            <a:srgbClr val="232A2F"/>
+          </a:solidFill>
+          <a:ln w="12700">
+            <a:solidFill>
+              <a:srgbClr val="232A2F"/>
+            </a:solidFill>
+            <a:prstDash val="solid"/>
+          </a:ln>
+        </p:spPr>
+      </p:sp>
+      <p:sp>
+        <p:nvSpPr>
+          <p:cNvPr id="21" name="Shape 19"/>
+          <p:cNvSpPr/>
+          <p:nvPr/>
+        </p:nvSpPr>
+        <p:spPr>
+          <a:xfrm>
+            <a:off x="5925312" y="4828032"/>
+            <a:ext cx="301752" cy="457200"/>
+          </a:xfrm>
+          <a:prstGeom prst="rect">
+            <a:avLst/>
+          </a:prstGeom>
+          <a:solidFill>
+            <a:srgbClr val="C9CCCE"/>
+          </a:solidFill>
+          <a:ln w="12700">
+            <a:solidFill>
+              <a:srgbClr val="C9CCCE"/>
+            </a:solidFill>
+            <a:prstDash val="solid"/>
+          </a:ln>
+        </p:spPr>
+      </p:sp>
+      <p:sp>
+        <p:nvSpPr>
+          <p:cNvPr id="22" name="Shape 20"/>
+          <p:cNvSpPr/>
+          <p:nvPr/>
+        </p:nvSpPr>
+        <p:spPr>
+          <a:xfrm>
+            <a:off x="6272784" y="4828032"/>
+            <a:ext cx="301752" cy="457200"/>
+          </a:xfrm>
+          <a:prstGeom prst="rect">
+            <a:avLst/>
+          </a:prstGeom>
+          <a:solidFill>
+            <a:srgbClr val="FAFAFA"/>
+          </a:solidFill>
+          <a:ln w="12700">
+            <a:solidFill>
+              <a:srgbClr val="FAFAFA"/>
+            </a:solidFill>
+            <a:prstDash val="solid"/>
+          </a:ln>
+        </p:spPr>
+      </p:sp>
+      <p:sp>
+        <p:nvSpPr>
+          <p:cNvPr id="23" name="Text 21"/>
+          <p:cNvSpPr txBox="1"/>
+          <p:nvPr/>
+        </p:nvSpPr>
+        <p:spPr>
+          <a:xfrm>
+            <a:off x="3840480" y="5358384"/>
+            <a:ext cx="2926080" cy="256032"/>
+          </a:xfrm>
+          <a:prstGeom prst="rect">
+            <a:avLst/>
+          </a:prstGeom>
+          <a:noFill/>
+          <a:ln/>
+        </p:spPr>
+        <p:txBody>
+          <a:bodyPr wrap="square" lIns="0" tIns="0" rIns="0" bIns="0" rtlCol="0" anchor="ctr"/>
+          <a:lstStyle/>
+          <a:p>
+            <a:pPr indent="0" marL="0">
+              <a:buNone/>
+            </a:pPr>
+            <a:r>
+              <a:rPr lang="en-US" sz="1050" dirty="0">
+                <a:solidFill>
+                  <a:srgbClr val="6B747C"/>
+                </a:solidFill>
+                <a:latin typeface="Courier New" pitchFamily="34" charset="0"/>
+                <a:ea typeface="Courier New" pitchFamily="34" charset="-122"/>
+                <a:cs typeface="Courier New" pitchFamily="34" charset="-120"/>
+              </a:rPr>
+              <a:t>B · grafik mantık (notan)</a:t>
+            </a:r>
+            <a:endParaRPr lang="en-US" sz="1050" dirty="0"/>
+          </a:p>
+        </p:txBody>
+      </p:sp>
+      <p:sp>
+        <p:nvSpPr>
+          <p:cNvPr id="24" name="Text 22"/>
+          <p:cNvSpPr txBox="1"/>
+          <p:nvPr/>
+        </p:nvSpPr>
+        <p:spPr>
+          <a:xfrm>
+            <a:off x="777240" y="5687568"/>
+            <a:ext cx="5852160" cy="502920"/>
+          </a:xfrm>
+          <a:prstGeom prst="rect">
+            <a:avLst/>
+          </a:prstGeom>
+          <a:noFill/>
+          <a:ln/>
+        </p:spPr>
+        <p:txBody>
+          <a:bodyPr wrap="square" lIns="0" tIns="0" rIns="0" bIns="0" rtlCol="0" anchor="ctr"/>
+          <a:lstStyle/>
+          <a:p>
+            <a:pPr indent="0" marL="0">
+              <a:lnSpc>
+                <a:spcPts val="1900"/>
+              </a:lnSpc>
+              <a:buNone/>
+            </a:pPr>
+            <a:r>
+              <a:rPr lang="en-US" sz="1350" i="1" dirty="0">
+                <a:solidFill>
+                  <a:srgbClr val="2A6289"/>
+                </a:solidFill>
+                <a:latin typeface="Calibri" pitchFamily="34" charset="0"/>
+                <a:ea typeface="Calibri" pitchFamily="34" charset="-122"/>
+                <a:cs typeface="Calibri" pitchFamily="34" charset="-120"/>
+              </a:rPr>
+              <a:t>İkisi de doğrudur — karıştırılması yanlıştır. Ayrıntılı şartname 13. haftada yazılı olarak paylaşılacak.</a:t>
+            </a:r>
+            <a:endParaRPr lang="en-US" sz="1350" dirty="0"/>
+          </a:p>
+        </p:txBody>
+      </p:sp>
+      <p:sp>
+        <p:nvSpPr>
+          <p:cNvPr id="25" name="Shape 23"/>
+          <p:cNvSpPr/>
+          <p:nvPr/>
+        </p:nvSpPr>
+        <p:spPr>
+          <a:xfrm>
+            <a:off x="6903720" y="1737360"/>
+            <a:ext cx="4507992" cy="4114800"/>
+          </a:xfrm>
+          <a:prstGeom prst="rect">
+            <a:avLst/>
+          </a:prstGeom>
+          <a:solidFill>
+            <a:srgbClr val="F1F3F4"/>
+          </a:solidFill>
+          <a:ln w="12700">
+            <a:solidFill>
+              <a:srgbClr val="F1F3F4"/>
+            </a:solidFill>
+            <a:prstDash val="solid"/>
+          </a:ln>
+        </p:spPr>
+      </p:sp>
+      <p:sp>
+        <p:nvSpPr>
+          <p:cNvPr id="26" name="Shape 24"/>
+          <p:cNvSpPr/>
+          <p:nvPr/>
+        </p:nvSpPr>
+        <p:spPr>
+          <a:xfrm>
+            <a:off x="8951976" y="1965960"/>
+            <a:ext cx="1371600" cy="1005840"/>
+          </a:xfrm>
+          <a:prstGeom prst="rect">
+            <a:avLst/>
+          </a:prstGeom>
+          <a:solidFill>
+            <a:srgbClr val="FFFFFF"/>
+          </a:solidFill>
+          <a:ln w="12700">
+            <a:solidFill>
+              <a:srgbClr val="232A2F"/>
+            </a:solidFill>
+            <a:prstDash val="solid"/>
+          </a:ln>
+        </p:spPr>
+      </p:sp>
+      <p:sp>
+        <p:nvSpPr>
+          <p:cNvPr id="27" name="Shape 25"/>
+          <p:cNvSpPr/>
+          <p:nvPr/>
+        </p:nvSpPr>
+        <p:spPr>
+          <a:xfrm>
+            <a:off x="8750808" y="2148840"/>
+            <a:ext cx="1371600" cy="1005840"/>
+          </a:xfrm>
+          <a:prstGeom prst="rect">
+            <a:avLst/>
+          </a:prstGeom>
+          <a:solidFill>
+            <a:srgbClr val="FFFFFF"/>
+          </a:solidFill>
+          <a:ln w="12700">
+            <a:solidFill>
+              <a:srgbClr val="232A2F"/>
+            </a:solidFill>
+            <a:prstDash val="solid"/>
+          </a:ln>
+        </p:spPr>
+      </p:sp>
+      <p:sp>
+        <p:nvSpPr>
+          <p:cNvPr id="28" name="Shape 26"/>
+          <p:cNvSpPr/>
+          <p:nvPr/>
+        </p:nvSpPr>
+        <p:spPr>
+          <a:xfrm>
+            <a:off x="8549640" y="2331720"/>
+            <a:ext cx="1371600" cy="1005840"/>
+          </a:xfrm>
+          <a:prstGeom prst="rect">
+            <a:avLst/>
+          </a:prstGeom>
+          <a:solidFill>
+            <a:srgbClr val="FFFFFF"/>
+          </a:solidFill>
+          <a:ln w="12700">
+            <a:solidFill>
+              <a:srgbClr val="232A2F"/>
+            </a:solidFill>
+            <a:prstDash val="solid"/>
+          </a:ln>
+        </p:spPr>
+      </p:sp>
+      <p:sp>
+        <p:nvSpPr>
+          <p:cNvPr id="29" name="Shape 27"/>
+          <p:cNvSpPr/>
+          <p:nvPr/>
+        </p:nvSpPr>
+        <p:spPr>
+          <a:xfrm>
+            <a:off x="8348472" y="2514600"/>
+            <a:ext cx="1371600" cy="1005840"/>
+          </a:xfrm>
+          <a:prstGeom prst="rect">
+            <a:avLst/>
+          </a:prstGeom>
+          <a:solidFill>
+            <a:srgbClr val="FFFFFF"/>
+          </a:solidFill>
+          <a:ln w="12700">
+            <a:solidFill>
+              <a:srgbClr val="414950"/>
+            </a:solidFill>
+            <a:prstDash val="solid"/>
+          </a:ln>
+        </p:spPr>
+      </p:sp>
+      <p:sp>
+        <p:nvSpPr>
+          <p:cNvPr id="30" name="Shape 28"/>
+          <p:cNvSpPr/>
+          <p:nvPr/>
+        </p:nvSpPr>
+        <p:spPr>
+          <a:xfrm>
+            <a:off x="8147304" y="2697480"/>
+            <a:ext cx="1371600" cy="1005840"/>
+          </a:xfrm>
+          <a:prstGeom prst="rect">
+            <a:avLst/>
+          </a:prstGeom>
+          <a:solidFill>
+            <a:srgbClr val="FFFFFF"/>
+          </a:solidFill>
+          <a:ln w="12700">
+            <a:solidFill>
+              <a:srgbClr val="5F676D"/>
+            </a:solidFill>
+            <a:prstDash val="solid"/>
+          </a:ln>
+        </p:spPr>
+      </p:sp>
+      <p:sp>
+        <p:nvSpPr>
+          <p:cNvPr id="31" name="Shape 29"/>
+          <p:cNvSpPr/>
+          <p:nvPr/>
+        </p:nvSpPr>
+        <p:spPr>
+          <a:xfrm>
+            <a:off x="7946136" y="2880360"/>
+            <a:ext cx="1371600" cy="1005840"/>
+          </a:xfrm>
+          <a:prstGeom prst="rect">
+            <a:avLst/>
+          </a:prstGeom>
+          <a:solidFill>
+            <a:srgbClr val="FFFFFF"/>
+          </a:solidFill>
+          <a:ln w="12700">
+            <a:solidFill>
+              <a:srgbClr val="7B8288"/>
+            </a:solidFill>
+            <a:prstDash val="solid"/>
+          </a:ln>
+        </p:spPr>
+      </p:sp>
+      <p:sp>
+        <p:nvSpPr>
+          <p:cNvPr id="32" name="Shape 30"/>
+          <p:cNvSpPr/>
+          <p:nvPr/>
+        </p:nvSpPr>
+        <p:spPr>
+          <a:xfrm>
+            <a:off x="7744968" y="3063240"/>
+            <a:ext cx="1371600" cy="1005840"/>
+          </a:xfrm>
+          <a:prstGeom prst="rect">
+            <a:avLst/>
+          </a:prstGeom>
+          <a:solidFill>
+            <a:srgbClr val="FFFFFF"/>
+          </a:solidFill>
+          <a:ln w="12700">
+            <a:solidFill>
+              <a:srgbClr val="959B9F"/>
+            </a:solidFill>
+            <a:prstDash val="solid"/>
+          </a:ln>
+        </p:spPr>
+      </p:sp>
+      <p:sp>
+        <p:nvSpPr>
+          <p:cNvPr id="33" name="Shape 31"/>
+          <p:cNvSpPr/>
+          <p:nvPr/>
+        </p:nvSpPr>
+        <p:spPr>
+          <a:xfrm>
+            <a:off x="7543800" y="3246120"/>
+            <a:ext cx="1371600" cy="1005840"/>
+          </a:xfrm>
+          <a:prstGeom prst="rect">
+            <a:avLst/>
+          </a:prstGeom>
+          <a:solidFill>
+            <a:srgbClr val="FFFFFF"/>
+          </a:solidFill>
+          <a:ln w="20320">
+            <a:solidFill>
+              <a:srgbClr val="AFB4B7"/>
+            </a:solidFill>
+            <a:prstDash val="solid"/>
+          </a:ln>
+        </p:spPr>
+      </p:sp>
+      <p:sp>
+        <p:nvSpPr>
+          <p:cNvPr id="34" name="Text 32"/>
+          <p:cNvSpPr txBox="1"/>
+          <p:nvPr/>
+        </p:nvSpPr>
+        <p:spPr>
+          <a:xfrm>
+            <a:off x="7315200" y="5138928"/>
+            <a:ext cx="2743200" cy="256032"/>
+          </a:xfrm>
+          <a:prstGeom prst="rect">
+            <a:avLst/>
+          </a:prstGeom>
+          <a:noFill/>
+          <a:ln/>
+        </p:spPr>
+        <p:txBody>
+          <a:bodyPr wrap="square" lIns="0" tIns="0" rIns="0" bIns="0" rtlCol="0" anchor="ctr"/>
+          <a:lstStyle/>
+          <a:p>
+            <a:pPr indent="0" marL="0">
+              <a:buNone/>
+            </a:pPr>
+            <a:r>
+              <a:rPr lang="en-US" sz="950" dirty="0">
+                <a:solidFill>
+                  <a:srgbClr val="6B747C"/>
+                </a:solidFill>
+                <a:latin typeface="Courier New" pitchFamily="34" charset="0"/>
+                <a:ea typeface="Courier New" pitchFamily="34" charset="-122"/>
+                <a:cs typeface="Courier New" pitchFamily="34" charset="-120"/>
+              </a:rPr>
+              <a:t>katmanlar ayrı ayrı çizilir</a:t>
+            </a:r>
+            <a:endParaRPr lang="en-US" sz="950" dirty="0"/>
+          </a:p>
+        </p:txBody>
+      </p:sp>
+      <p:sp>
+        <p:nvSpPr>
+          <p:cNvPr id="35" name="Shape 33"/>
+          <p:cNvSpPr/>
+          <p:nvPr/>
+        </p:nvSpPr>
+        <p:spPr>
+          <a:xfrm>
+            <a:off x="9646920" y="3246120"/>
+            <a:ext cx="457200" cy="0"/>
+          </a:xfrm>
+          <a:prstGeom prst="line">
+            <a:avLst/>
+          </a:prstGeom>
+          <a:noFill/>
+          <a:ln w="19050">
+            <a:solidFill>
+              <a:srgbClr val="2A6289"/>
+            </a:solidFill>
+            <a:prstDash val="solid"/>
+          </a:ln>
+        </p:spPr>
+      </p:sp>
+      <p:sp>
+        <p:nvSpPr>
+          <p:cNvPr id="36" name="Shape 34"/>
+          <p:cNvSpPr/>
+          <p:nvPr/>
+        </p:nvSpPr>
+        <p:spPr>
+          <a:xfrm>
+            <a:off x="9966960" y="3108960"/>
+            <a:ext cx="146304" cy="137160"/>
+          </a:xfrm>
+          <a:prstGeom prst="line">
+            <a:avLst/>
+          </a:prstGeom>
+          <a:noFill/>
+          <a:ln w="19050">
+            <a:solidFill>
+              <a:srgbClr val="2A6289"/>
+            </a:solidFill>
+            <a:prstDash val="solid"/>
+          </a:ln>
+        </p:spPr>
+      </p:sp>
+      <p:sp>
+        <p:nvSpPr>
+          <p:cNvPr id="37" name="Shape 35"/>
+          <p:cNvSpPr/>
+          <p:nvPr/>
+        </p:nvSpPr>
+        <p:spPr>
+          <a:xfrm>
+            <a:off x="9966960" y="3383280"/>
+            <a:ext cx="146304" cy="-137160"/>
+          </a:xfrm>
+          <a:prstGeom prst="line">
+            <a:avLst/>
+          </a:prstGeom>
+          <a:noFill/>
+          <a:ln w="19050">
+            <a:solidFill>
+              <a:srgbClr val="2A6289"/>
+            </a:solidFill>
+            <a:prstDash val="solid"/>
+          </a:ln>
+        </p:spPr>
+      </p:sp>
+      <p:sp>
+        <p:nvSpPr>
+          <p:cNvPr id="38" name="Shape 36"/>
+          <p:cNvSpPr/>
+          <p:nvPr/>
+        </p:nvSpPr>
+        <p:spPr>
+          <a:xfrm>
+            <a:off x="10195560" y="2560320"/>
+            <a:ext cx="1005840" cy="1371600"/>
+          </a:xfrm>
+          <a:prstGeom prst="rect">
+            <a:avLst/>
+          </a:prstGeom>
+          <a:solidFill>
+            <a:srgbClr val="FFFFFF"/>
+          </a:solidFill>
+          <a:ln w="20320">
+            <a:solidFill>
+              <a:srgbClr val="1B1F24"/>
+            </a:solidFill>
+            <a:prstDash val="solid"/>
+          </a:ln>
+        </p:spPr>
+      </p:sp>
+      <p:sp>
+        <p:nvSpPr>
+          <p:cNvPr id="39" name="Shape 37"/>
+          <p:cNvSpPr/>
+          <p:nvPr/>
+        </p:nvSpPr>
+        <p:spPr>
+          <a:xfrm>
+            <a:off x="10241280" y="2834640"/>
+            <a:ext cx="914400" cy="182880"/>
+          </a:xfrm>
+          <a:prstGeom prst="rect">
+            <a:avLst/>
+          </a:prstGeom>
+          <a:solidFill>
+            <a:srgbClr val="414950"/>
+          </a:solidFill>
+          <a:ln w="12700">
+            <a:solidFill>
+              <a:srgbClr val="414950"/>
+            </a:solidFill>
+            <a:prstDash val="solid"/>
+          </a:ln>
+        </p:spPr>
+      </p:sp>
+      <p:sp>
+        <p:nvSpPr>
+          <p:cNvPr id="40" name="Shape 38"/>
+          <p:cNvSpPr/>
+          <p:nvPr/>
+        </p:nvSpPr>
+        <p:spPr>
+          <a:xfrm>
+            <a:off x="10241280" y="3063240"/>
+            <a:ext cx="914400" cy="182880"/>
+          </a:xfrm>
+          <a:prstGeom prst="rect">
+            <a:avLst/>
+          </a:prstGeom>
+          <a:solidFill>
+            <a:srgbClr val="7B8288"/>
+          </a:solidFill>
+          <a:ln w="12700">
+            <a:solidFill>
+              <a:srgbClr val="7B8288"/>
+            </a:solidFill>
+            <a:prstDash val="solid"/>
+          </a:ln>
+        </p:spPr>
+      </p:sp>
+      <p:sp>
+        <p:nvSpPr>
+          <p:cNvPr id="41" name="Shape 39"/>
+          <p:cNvSpPr/>
+          <p:nvPr/>
+        </p:nvSpPr>
+        <p:spPr>
+          <a:xfrm>
+            <a:off x="10241280" y="3291840"/>
+            <a:ext cx="914400" cy="182880"/>
+          </a:xfrm>
+          <a:prstGeom prst="rect">
+            <a:avLst/>
+          </a:prstGeom>
+          <a:solidFill>
+            <a:srgbClr val="AFB4B7"/>
+          </a:solidFill>
+          <a:ln w="12700">
+            <a:solidFill>
+              <a:srgbClr val="AFB4B7"/>
+            </a:solidFill>
+            <a:prstDash val="solid"/>
+          </a:ln>
+        </p:spPr>
+      </p:sp>
+      <p:sp>
+        <p:nvSpPr>
+          <p:cNvPr id="42" name="Shape 40"/>
+          <p:cNvSpPr/>
+          <p:nvPr/>
+        </p:nvSpPr>
+        <p:spPr>
+          <a:xfrm>
+            <a:off x="10241280" y="3520440"/>
+            <a:ext cx="914400" cy="182880"/>
+          </a:xfrm>
+          <a:prstGeom prst="rect">
+            <a:avLst/>
+          </a:prstGeom>
+          <a:solidFill>
+            <a:srgbClr val="E2E4E5"/>
+          </a:solidFill>
+          <a:ln w="12700">
+            <a:solidFill>
+              <a:srgbClr val="E2E4E5"/>
+            </a:solidFill>
+            <a:prstDash val="solid"/>
+          </a:ln>
+        </p:spPr>
+      </p:sp>
+      <p:sp>
+        <p:nvSpPr>
+          <p:cNvPr id="43" name="Text 41"/>
+          <p:cNvSpPr txBox="1"/>
+          <p:nvPr/>
+        </p:nvSpPr>
+        <p:spPr>
+          <a:xfrm>
+            <a:off x="10058400" y="4041648"/>
+            <a:ext cx="1371600" cy="256032"/>
+          </a:xfrm>
+          <a:prstGeom prst="rect">
+            <a:avLst/>
+          </a:prstGeom>
+          <a:noFill/>
+          <a:ln/>
+        </p:spPr>
+        <p:txBody>
+          <a:bodyPr wrap="square" lIns="0" tIns="0" rIns="0" bIns="0" rtlCol="0" anchor="ctr"/>
+          <a:lstStyle/>
+          <a:p>
+            <a:pPr indent="0" marL="0">
+              <a:buNone/>
+            </a:pPr>
+            <a:r>
+              <a:rPr lang="en-US" sz="950" dirty="0">
+                <a:solidFill>
+                  <a:srgbClr val="2A6289"/>
+                </a:solidFill>
+                <a:latin typeface="Courier New" pitchFamily="34" charset="0"/>
+                <a:ea typeface="Courier New" pitchFamily="34" charset="-122"/>
+                <a:cs typeface="Courier New" pitchFamily="34" charset="-120"/>
+              </a:rPr>
+              <a:t>önden tek sahne</a:t>
+            </a:r>
+            <a:endParaRPr lang="en-US" sz="950" dirty="0"/>
           </a:p>
         </p:txBody>
       </p:sp>
@@ -18591,34 +19119,34 @@
         </p:nvSpPr>
         <p:spPr>
           <a:xfrm>
-            <a:off x="777240" y="1600200"/>
-            <a:ext cx="2926080" cy="1737360"/>
-          </a:xfrm>
-          <a:prstGeom prst="rect">
-            <a:avLst/>
-          </a:prstGeom>
-          <a:noFill/>
-          <a:ln/>
-        </p:spPr>
-        <p:txBody>
-          <a:bodyPr wrap="square" lIns="0" tIns="0" rIns="0" bIns="0" rtlCol="0" anchor="ctr"/>
-          <a:lstStyle/>
-          <a:p>
-            <a:pPr indent="0" marL="0">
-              <a:buNone/>
-            </a:pPr>
-            <a:r>
-              <a:rPr lang="en-US" sz="11000" b="1" dirty="0">
-                <a:solidFill>
-                  <a:srgbClr val="2A6289"/>
+            <a:off x="777240" y="475488"/>
+            <a:ext cx="10634472" cy="274320"/>
+          </a:xfrm>
+          <a:prstGeom prst="rect">
+            <a:avLst/>
+          </a:prstGeom>
+          <a:noFill/>
+          <a:ln/>
+        </p:spPr>
+        <p:txBody>
+          <a:bodyPr wrap="square" lIns="0" tIns="0" rIns="0" bIns="0" rtlCol="0" anchor="ctr"/>
+          <a:lstStyle/>
+          <a:p>
+            <a:pPr indent="0" marL="0">
+              <a:buNone/>
+            </a:pPr>
+            <a:r>
+              <a:rPr lang="en-US" sz="1100" spc="160" kern="0" dirty="0">
+                <a:solidFill>
+                  <a:srgbClr val="7FA9C6"/>
                 </a:solidFill>
                 <a:latin typeface="Courier New" pitchFamily="34" charset="0"/>
                 <a:ea typeface="Courier New" pitchFamily="34" charset="-122"/>
                 <a:cs typeface="Courier New" pitchFamily="34" charset="-120"/>
               </a:rPr>
-              <a:t>05</a:t>
-            </a:r>
-            <a:endParaRPr lang="en-US" sz="11000" dirty="0"/>
+              <a:t>BÖLÜM 4 · DÖNEM PLANI</a:t>
+            </a:r>
+            <a:endParaRPr lang="en-US" sz="1100" dirty="0"/>
           </a:p>
         </p:txBody>
       </p:sp>
@@ -18630,24 +19158,27 @@
         </p:nvSpPr>
         <p:spPr>
           <a:xfrm>
-            <a:off x="777240" y="3429000"/>
-            <a:ext cx="10634472" cy="822960"/>
-          </a:xfrm>
-          <a:prstGeom prst="rect">
-            <a:avLst/>
-          </a:prstGeom>
-          <a:noFill/>
-          <a:ln/>
-        </p:spPr>
-        <p:txBody>
-          <a:bodyPr wrap="square" lIns="0" tIns="0" rIns="0" bIns="0" rtlCol="0" anchor="ctr"/>
-          <a:lstStyle/>
-          <a:p>
-            <a:pPr indent="0" marL="0">
-              <a:buNone/>
-            </a:pPr>
-            <a:r>
-              <a:rPr lang="en-US" sz="4400" b="1" dirty="0">
+            <a:off x="777240" y="1188720"/>
+            <a:ext cx="9326880" cy="1463040"/>
+          </a:xfrm>
+          <a:prstGeom prst="rect">
+            <a:avLst/>
+          </a:prstGeom>
+          <a:noFill/>
+          <a:ln/>
+        </p:spPr>
+        <p:txBody>
+          <a:bodyPr wrap="square" lIns="0" tIns="0" rIns="0" bIns="0" rtlCol="0" anchor="ctr"/>
+          <a:lstStyle/>
+          <a:p>
+            <a:pPr indent="0" marL="0">
+              <a:lnSpc>
+                <a:spcPts val="5000"/>
+              </a:lnSpc>
+              <a:buNone/>
+            </a:pPr>
+            <a:r>
+              <a:rPr lang="en-US" sz="4000" b="1" dirty="0">
                 <a:solidFill>
                   <a:srgbClr val="FFFFFF"/>
                 </a:solidFill>
@@ -18655,9 +19186,29 @@
                 <a:ea typeface="Century Schoolbook" pitchFamily="34" charset="-122"/>
                 <a:cs typeface="Century Schoolbook" pitchFamily="34" charset="-120"/>
               </a:rPr>
-              <a:t>Kurallar ve malzeme</a:t>
-            </a:r>
-            <a:endParaRPr lang="en-US" sz="4400" dirty="0"/>
+              <a:t>İki şey pazarlığa kapalı:</a:t>
+            </a:r>
+            <a:endParaRPr lang="en-US" sz="4000" dirty="0"/>
+          </a:p>
+          <a:p>
+            <a:pPr indent="0" marL="0">
+              <a:lnSpc>
+                <a:spcPts val="5000"/>
+              </a:lnSpc>
+              <a:buNone/>
+            </a:pPr>
+            <a:r>
+              <a:rPr lang="en-US" sz="4000" b="1" dirty="0">
+                <a:solidFill>
+                  <a:srgbClr val="FFFFFF"/>
+                </a:solidFill>
+                <a:latin typeface="Century Schoolbook" pitchFamily="34" charset="0"/>
+                <a:ea typeface="Century Schoolbook" pitchFamily="34" charset="-122"/>
+                <a:cs typeface="Century Schoolbook" pitchFamily="34" charset="-120"/>
+              </a:rPr>
+              <a:t>devam ve teslim tarihi</a:t>
+            </a:r>
+            <a:endParaRPr lang="en-US" sz="4000" dirty="0"/>
           </a:p>
         </p:txBody>
       </p:sp>
@@ -18669,24 +19220,66 @@
         </p:nvSpPr>
         <p:spPr>
           <a:xfrm>
-            <a:off x="777240" y="4315968"/>
-            <a:ext cx="8778240" cy="548640"/>
-          </a:xfrm>
-          <a:prstGeom prst="rect">
-            <a:avLst/>
-          </a:prstGeom>
-          <a:noFill/>
-          <a:ln/>
-        </p:spPr>
-        <p:txBody>
-          <a:bodyPr wrap="square" lIns="0" tIns="0" rIns="0" bIns="0" rtlCol="0" anchor="ctr"/>
-          <a:lstStyle/>
-          <a:p>
-            <a:pPr indent="0" marL="0">
-              <a:buNone/>
-            </a:pPr>
-            <a:r>
-              <a:rPr lang="en-US" sz="1700" dirty="0">
+            <a:off x="777240" y="3017520"/>
+            <a:ext cx="1828800" cy="822960"/>
+          </a:xfrm>
+          <a:prstGeom prst="rect">
+            <a:avLst/>
+          </a:prstGeom>
+          <a:noFill/>
+          <a:ln/>
+        </p:spPr>
+        <p:txBody>
+          <a:bodyPr wrap="square" lIns="0" tIns="0" rIns="0" bIns="0" rtlCol="0" anchor="ctr"/>
+          <a:lstStyle/>
+          <a:p>
+            <a:pPr indent="0" marL="0">
+              <a:buNone/>
+            </a:pPr>
+            <a:r>
+              <a:rPr lang="en-US" sz="4600" b="1" dirty="0">
+                <a:solidFill>
+                  <a:srgbClr val="2A6289"/>
+                </a:solidFill>
+                <a:latin typeface="Courier New" pitchFamily="34" charset="0"/>
+                <a:ea typeface="Courier New" pitchFamily="34" charset="-122"/>
+                <a:cs typeface="Courier New" pitchFamily="34" charset="-120"/>
+              </a:rPr>
+              <a:t>%80</a:t>
+            </a:r>
+            <a:endParaRPr lang="en-US" sz="4600" dirty="0"/>
+          </a:p>
+        </p:txBody>
+      </p:sp>
+      <p:sp>
+        <p:nvSpPr>
+          <p:cNvPr id="5" name="Text 3"/>
+          <p:cNvSpPr txBox="1"/>
+          <p:nvPr/>
+        </p:nvSpPr>
+        <p:spPr>
+          <a:xfrm>
+            <a:off x="777240" y="3950208"/>
+            <a:ext cx="5029200" cy="1371600"/>
+          </a:xfrm>
+          <a:prstGeom prst="rect">
+            <a:avLst/>
+          </a:prstGeom>
+          <a:noFill/>
+          <a:ln/>
+        </p:spPr>
+        <p:txBody>
+          <a:bodyPr wrap="square" lIns="0" tIns="0" rIns="0" bIns="0" rtlCol="0" anchor="ctr"/>
+          <a:lstStyle/>
+          <a:p>
+            <a:pPr indent="0" marL="0">
+              <a:lnSpc>
+                <a:spcPts val="2200"/>
+              </a:lnSpc>
+              <a:buNone/>
+            </a:pPr>
+            <a:r>
+              <a:rPr lang="en-US" sz="1500" dirty="0">
                 <a:solidFill>
                   <a:srgbClr val="C9CCCE"/>
                 </a:solidFill>
@@ -18694,9 +19287,213 @@
                 <a:ea typeface="Calibri" pitchFamily="34" charset="-122"/>
                 <a:cs typeface="Calibri" pitchFamily="34" charset="-120"/>
               </a:rPr>
-              <a:t>Beş kural, bir alışveriş listesi</a:t>
-            </a:r>
-            <a:endParaRPr lang="en-US" sz="1700" dirty="0"/>
+              <a:t>Derslerin en az %80'ine devam zorunlu. Her ders bir kez ıslak imza alınır; imzayı takip etmek öğrencinin sorumluluğundadır, sonradan imza talebi kabul edilmez.</a:t>
+            </a:r>
+            <a:endParaRPr lang="en-US" sz="1500" dirty="0"/>
+          </a:p>
+        </p:txBody>
+      </p:sp>
+      <p:sp>
+        <p:nvSpPr>
+          <p:cNvPr id="6" name="Text 4"/>
+          <p:cNvSpPr txBox="1"/>
+          <p:nvPr/>
+        </p:nvSpPr>
+        <p:spPr>
+          <a:xfrm>
+            <a:off x="777240" y="5440680"/>
+            <a:ext cx="5029200" cy="457200"/>
+          </a:xfrm>
+          <a:prstGeom prst="rect">
+            <a:avLst/>
+          </a:prstGeom>
+          <a:noFill/>
+          <a:ln/>
+        </p:spPr>
+        <p:txBody>
+          <a:bodyPr wrap="square" lIns="0" tIns="0" rIns="0" bIns="0" rtlCol="0" anchor="ctr"/>
+          <a:lstStyle/>
+          <a:p>
+            <a:pPr indent="0" marL="0">
+              <a:lnSpc>
+                <a:spcPts val="2000"/>
+              </a:lnSpc>
+              <a:buNone/>
+            </a:pPr>
+            <a:r>
+              <a:rPr lang="en-US" sz="1400" b="1" dirty="0">
+                <a:solidFill>
+                  <a:srgbClr val="FFFFFF"/>
+                </a:solidFill>
+                <a:latin typeface="Calibri" pitchFamily="34" charset="0"/>
+                <a:ea typeface="Calibri" pitchFamily="34" charset="-122"/>
+                <a:cs typeface="Calibri" pitchFamily="34" charset="-120"/>
+              </a:rPr>
+              <a:t>Sınırı aşan öğrenci final projesini teslim edemez.</a:t>
+            </a:r>
+            <a:endParaRPr lang="en-US" sz="1400" dirty="0"/>
+          </a:p>
+        </p:txBody>
+      </p:sp>
+      <p:sp>
+        <p:nvSpPr>
+          <p:cNvPr id="7" name="Text 5"/>
+          <p:cNvSpPr txBox="1"/>
+          <p:nvPr/>
+        </p:nvSpPr>
+        <p:spPr>
+          <a:xfrm>
+            <a:off x="6355080" y="3017520"/>
+            <a:ext cx="1828800" cy="822960"/>
+          </a:xfrm>
+          <a:prstGeom prst="rect">
+            <a:avLst/>
+          </a:prstGeom>
+          <a:noFill/>
+          <a:ln/>
+        </p:spPr>
+        <p:txBody>
+          <a:bodyPr wrap="square" lIns="0" tIns="0" rIns="0" bIns="0" rtlCol="0" anchor="ctr"/>
+          <a:lstStyle/>
+          <a:p>
+            <a:pPr indent="0" marL="0">
+              <a:buNone/>
+            </a:pPr>
+            <a:r>
+              <a:rPr lang="en-US" sz="4600" b="1" dirty="0">
+                <a:solidFill>
+                  <a:srgbClr val="2A6289"/>
+                </a:solidFill>
+                <a:latin typeface="Courier New" pitchFamily="34" charset="0"/>
+                <a:ea typeface="Courier New" pitchFamily="34" charset="-122"/>
+                <a:cs typeface="Courier New" pitchFamily="34" charset="-120"/>
+              </a:rPr>
+              <a:t>0</a:t>
+            </a:r>
+            <a:endParaRPr lang="en-US" sz="4600" dirty="0"/>
+          </a:p>
+        </p:txBody>
+      </p:sp>
+      <p:sp>
+        <p:nvSpPr>
+          <p:cNvPr id="8" name="Text 6"/>
+          <p:cNvSpPr txBox="1"/>
+          <p:nvPr/>
+        </p:nvSpPr>
+        <p:spPr>
+          <a:xfrm>
+            <a:off x="6355080" y="3950208"/>
+            <a:ext cx="5029200" cy="1371600"/>
+          </a:xfrm>
+          <a:prstGeom prst="rect">
+            <a:avLst/>
+          </a:prstGeom>
+          <a:noFill/>
+          <a:ln/>
+        </p:spPr>
+        <p:txBody>
+          <a:bodyPr wrap="square" lIns="0" tIns="0" rIns="0" bIns="0" rtlCol="0" anchor="ctr"/>
+          <a:lstStyle/>
+          <a:p>
+            <a:pPr indent="0" marL="0">
+              <a:lnSpc>
+                <a:spcPts val="2200"/>
+              </a:lnSpc>
+              <a:buNone/>
+            </a:pPr>
+            <a:r>
+              <a:rPr lang="en-US" sz="1500" dirty="0">
+                <a:solidFill>
+                  <a:srgbClr val="C9CCCE"/>
+                </a:solidFill>
+                <a:latin typeface="Calibri" pitchFamily="34" charset="0"/>
+                <a:ea typeface="Calibri" pitchFamily="34" charset="-122"/>
+                <a:cs typeface="Calibri" pitchFamily="34" charset="-120"/>
+              </a:rPr>
+              <a:t>Geç teslim kabul edilmez. Ödevler hem fiziksel olarak derse getirilir hem de ders platformuna yüklenir; e-posta ile gönderilen ödev kabul edilmez.</a:t>
+            </a:r>
+            <a:endParaRPr lang="en-US" sz="1500" dirty="0"/>
+          </a:p>
+        </p:txBody>
+      </p:sp>
+      <p:sp>
+        <p:nvSpPr>
+          <p:cNvPr id="9" name="Text 7"/>
+          <p:cNvSpPr txBox="1"/>
+          <p:nvPr/>
+        </p:nvSpPr>
+        <p:spPr>
+          <a:xfrm>
+            <a:off x="6355080" y="5440680"/>
+            <a:ext cx="5029200" cy="457200"/>
+          </a:xfrm>
+          <a:prstGeom prst="rect">
+            <a:avLst/>
+          </a:prstGeom>
+          <a:noFill/>
+          <a:ln/>
+        </p:spPr>
+        <p:txBody>
+          <a:bodyPr wrap="square" lIns="0" tIns="0" rIns="0" bIns="0" rtlCol="0" anchor="ctr"/>
+          <a:lstStyle/>
+          <a:p>
+            <a:pPr indent="0" marL="0">
+              <a:lnSpc>
+                <a:spcPts val="2000"/>
+              </a:lnSpc>
+              <a:buNone/>
+            </a:pPr>
+            <a:r>
+              <a:rPr lang="en-US" sz="1400" b="1" dirty="0">
+                <a:solidFill>
+                  <a:srgbClr val="FFFFFF"/>
+                </a:solidFill>
+                <a:latin typeface="Calibri" pitchFamily="34" charset="0"/>
+                <a:ea typeface="Calibri" pitchFamily="34" charset="-122"/>
+                <a:cs typeface="Calibri" pitchFamily="34" charset="-120"/>
+              </a:rPr>
+              <a:t>Yetişemeyecekseniz tarihten önce haber verin.</a:t>
+            </a:r>
+            <a:endParaRPr lang="en-US" sz="1400" dirty="0"/>
+          </a:p>
+        </p:txBody>
+      </p:sp>
+      <p:sp>
+        <p:nvSpPr>
+          <p:cNvPr id="10" name="Text 8"/>
+          <p:cNvSpPr txBox="1"/>
+          <p:nvPr/>
+        </p:nvSpPr>
+        <p:spPr>
+          <a:xfrm>
+            <a:off x="777240" y="6126480"/>
+            <a:ext cx="10241280" cy="365760"/>
+          </a:xfrm>
+          <a:prstGeom prst="rect">
+            <a:avLst/>
+          </a:prstGeom>
+          <a:noFill/>
+          <a:ln/>
+        </p:spPr>
+        <p:txBody>
+          <a:bodyPr wrap="square" lIns="0" tIns="0" rIns="0" bIns="0" rtlCol="0" anchor="ctr"/>
+          <a:lstStyle/>
+          <a:p>
+            <a:pPr indent="0" marL="0">
+              <a:buNone/>
+            </a:pPr>
+            <a:r>
+              <a:rPr lang="en-US" sz="1150" dirty="0">
+                <a:solidFill>
+                  <a:srgbClr val="6B747C"/>
+                </a:solidFill>
+                <a:latin typeface="Courier New" pitchFamily="34" charset="0"/>
+                <a:ea typeface="Courier New" pitchFamily="34" charset="-122"/>
+                <a:cs typeface="Courier New" pitchFamily="34" charset="-120"/>
+              </a:rPr>
+              <a:t>Dijital teslimlerinizi yükledikten sonra indirip kontrol edin. Bozuk ya da boş dosyaların sorumluluğu öğrenciye aittir.</a:t>
+            </a:r>
+            <a:endParaRPr lang="en-US" sz="1150" dirty="0"/>
           </a:p>
         </p:txBody>
       </p:sp>
@@ -19287,7 +20084,7 @@
                 <a:ea typeface="Calibri" pitchFamily="34" charset="-122"/>
                 <a:cs typeface="Calibri" pitchFamily="34" charset="-120"/>
               </a:rPr>
-              <a:t>14 hafta, iki teslim, bir sergi</a:t>
+              <a:t>14 hafta, bir quiz, iki teslim</a:t>
             </a:r>
             <a:endParaRPr lang="en-US" sz="1300" dirty="0"/>
           </a:p>
@@ -19407,7 +20204,7 @@
                 <a:ea typeface="Calibri" pitchFamily="34" charset="-122"/>
                 <a:cs typeface="Calibri" pitchFamily="34" charset="-120"/>
               </a:rPr>
-              <a:t>Ev tekrarı sözleşmesi ve alışveriş listesi</a:t>
+              <a:t>Neye uyacağız, ne alacağız</a:t>
             </a:r>
             <a:endParaRPr lang="en-US" sz="1300" dirty="0"/>
           </a:p>
@@ -19485,7 +20282,7 @@
                 <a:ea typeface="Calibri" pitchFamily="34" charset="-122"/>
                 <a:cs typeface="Calibri" pitchFamily="34" charset="-120"/>
               </a:rPr>
-              <a:t>Dışarı çıkıyoruz</a:t>
+              <a:t>Uygulama</a:t>
             </a:r>
             <a:endParaRPr lang="en-US" sz="1700" dirty="0"/>
           </a:p>
@@ -19527,7 +20324,7 @@
                 <a:ea typeface="Calibri" pitchFamily="34" charset="-122"/>
                 <a:cs typeface="Calibri" pitchFamily="34" charset="-120"/>
               </a:rPr>
-              <a:t>Dersin son 60 dakikası: ilk çiziminiz</a:t>
+              <a:t>Ustaların çizgileri: bugünün ilk iki kutusu</a:t>
             </a:r>
             <a:endParaRPr lang="en-US" sz="1300" dirty="0"/>
           </a:p>
@@ -19547,7 +20344,7 @@
     <p:bg>
       <p:bgPr>
         <a:solidFill>
-          <a:srgbClr val="FFFFFF"/>
+          <a:srgbClr val="1B1F24"/>
         </a:solidFill>
       </p:bgPr>
     </p:bg>
@@ -19573,34 +20370,34 @@
         </p:nvSpPr>
         <p:spPr>
           <a:xfrm>
-            <a:off x="777240" y="475488"/>
-            <a:ext cx="10634472" cy="274320"/>
-          </a:xfrm>
-          <a:prstGeom prst="rect">
-            <a:avLst/>
-          </a:prstGeom>
-          <a:noFill/>
-          <a:ln/>
-        </p:spPr>
-        <p:txBody>
-          <a:bodyPr wrap="square" lIns="0" tIns="0" rIns="0" bIns="0" rtlCol="0" anchor="ctr"/>
-          <a:lstStyle/>
-          <a:p>
-            <a:pPr indent="0" marL="0">
-              <a:buNone/>
-            </a:pPr>
-            <a:r>
-              <a:rPr lang="en-US" sz="1100" spc="160" kern="0" dirty="0">
-                <a:solidFill>
-                  <a:srgbClr val="6B747C"/>
+            <a:off x="777240" y="1600200"/>
+            <a:ext cx="2926080" cy="1737360"/>
+          </a:xfrm>
+          <a:prstGeom prst="rect">
+            <a:avLst/>
+          </a:prstGeom>
+          <a:noFill/>
+          <a:ln/>
+        </p:spPr>
+        <p:txBody>
+          <a:bodyPr wrap="square" lIns="0" tIns="0" rIns="0" bIns="0" rtlCol="0" anchor="ctr"/>
+          <a:lstStyle/>
+          <a:p>
+            <a:pPr indent="0" marL="0">
+              <a:buNone/>
+            </a:pPr>
+            <a:r>
+              <a:rPr lang="en-US" sz="11000" b="1" dirty="0">
+                <a:solidFill>
+                  <a:srgbClr val="2A6289"/>
                 </a:solidFill>
                 <a:latin typeface="Courier New" pitchFamily="34" charset="0"/>
                 <a:ea typeface="Courier New" pitchFamily="34" charset="-122"/>
                 <a:cs typeface="Courier New" pitchFamily="34" charset="-120"/>
               </a:rPr>
-              <a:t>BÖLÜM 5 · KURALLAR</a:t>
-            </a:r>
-            <a:endParaRPr lang="en-US" sz="1100" dirty="0"/>
+              <a:t>05</a:t>
+            </a:r>
+            <a:endParaRPr lang="en-US" sz="11000" dirty="0"/>
           </a:p>
         </p:txBody>
       </p:sp>
@@ -19612,801 +20409,73 @@
         </p:nvSpPr>
         <p:spPr>
           <a:xfrm>
-            <a:off x="777240" y="868680"/>
-            <a:ext cx="10634472" cy="914400"/>
-          </a:xfrm>
-          <a:prstGeom prst="rect">
-            <a:avLst/>
-          </a:prstGeom>
-          <a:noFill/>
-          <a:ln/>
-        </p:spPr>
-        <p:txBody>
-          <a:bodyPr wrap="square" lIns="0" tIns="0" rIns="0" bIns="0" rtlCol="0" anchor="ctr"/>
-          <a:lstStyle/>
-          <a:p>
-            <a:pPr indent="0" marL="0">
-              <a:lnSpc>
-                <a:spcPts val="3800"/>
-              </a:lnSpc>
-              <a:buNone/>
-            </a:pPr>
-            <a:r>
-              <a:rPr lang="en-US" sz="3400" b="1" dirty="0">
-                <a:solidFill>
-                  <a:srgbClr val="1B1F24"/>
+            <a:off x="777240" y="3429000"/>
+            <a:ext cx="10634472" cy="822960"/>
+          </a:xfrm>
+          <a:prstGeom prst="rect">
+            <a:avLst/>
+          </a:prstGeom>
+          <a:noFill/>
+          <a:ln/>
+        </p:spPr>
+        <p:txBody>
+          <a:bodyPr wrap="square" lIns="0" tIns="0" rIns="0" bIns="0" rtlCol="0" anchor="ctr"/>
+          <a:lstStyle/>
+          <a:p>
+            <a:pPr indent="0" marL="0">
+              <a:buNone/>
+            </a:pPr>
+            <a:r>
+              <a:rPr lang="en-US" sz="4400" b="1" dirty="0">
+                <a:solidFill>
+                  <a:srgbClr val="FFFFFF"/>
                 </a:solidFill>
                 <a:latin typeface="Century Schoolbook" pitchFamily="34" charset="0"/>
                 <a:ea typeface="Century Schoolbook" pitchFamily="34" charset="-122"/>
                 <a:cs typeface="Century Schoolbook" pitchFamily="34" charset="-120"/>
               </a:rPr>
-              <a:t>Beş kural</a:t>
-            </a:r>
-            <a:endParaRPr lang="en-US" sz="3400" dirty="0"/>
-          </a:p>
-        </p:txBody>
-      </p:sp>
-      <p:sp>
-        <p:nvSpPr>
-          <p:cNvPr id="4" name="Shape 2"/>
-          <p:cNvSpPr/>
-          <p:nvPr/>
-        </p:nvSpPr>
-        <p:spPr>
-          <a:xfrm>
-            <a:off x="777240" y="1847088"/>
-            <a:ext cx="365760" cy="365760"/>
-          </a:xfrm>
-          <a:prstGeom prst="ellipse">
-            <a:avLst/>
-          </a:prstGeom>
-          <a:solidFill>
-            <a:srgbClr val="2A6289"/>
-          </a:solidFill>
-          <a:ln w="12700">
-            <a:solidFill>
-              <a:srgbClr val="2A6289"/>
-            </a:solidFill>
-            <a:prstDash val="solid"/>
-          </a:ln>
-        </p:spPr>
-      </p:sp>
-      <p:sp>
-        <p:nvSpPr>
-          <p:cNvPr id="5" name="Text 3"/>
-          <p:cNvSpPr txBox="1"/>
-          <p:nvPr/>
-        </p:nvSpPr>
-        <p:spPr>
-          <a:xfrm>
-            <a:off x="777240" y="1911096"/>
-            <a:ext cx="365760" cy="256032"/>
-          </a:xfrm>
-          <a:prstGeom prst="rect">
-            <a:avLst/>
-          </a:prstGeom>
-          <a:noFill/>
-          <a:ln/>
-        </p:spPr>
-        <p:txBody>
-          <a:bodyPr wrap="square" lIns="0" tIns="0" rIns="0" bIns="0" rtlCol="0" anchor="ctr"/>
-          <a:lstStyle/>
-          <a:p>
-            <a:pPr algn="ctr" indent="0" marL="0">
-              <a:buNone/>
-            </a:pPr>
-            <a:r>
-              <a:rPr lang="en-US" sz="1300" b="1" dirty="0">
-                <a:solidFill>
-                  <a:srgbClr val="FFFFFF"/>
-                </a:solidFill>
-                <a:latin typeface="Courier New" pitchFamily="34" charset="0"/>
-                <a:ea typeface="Courier New" pitchFamily="34" charset="-122"/>
-                <a:cs typeface="Courier New" pitchFamily="34" charset="-120"/>
-              </a:rPr>
-              <a:t>1</a:t>
-            </a:r>
-            <a:endParaRPr lang="en-US" sz="1300" dirty="0"/>
-          </a:p>
-        </p:txBody>
-      </p:sp>
-      <p:sp>
-        <p:nvSpPr>
-          <p:cNvPr id="6" name="Text 4"/>
-          <p:cNvSpPr txBox="1"/>
-          <p:nvPr/>
-        </p:nvSpPr>
-        <p:spPr>
-          <a:xfrm>
-            <a:off x="1325880" y="1847088"/>
-            <a:ext cx="4480560" cy="320040"/>
-          </a:xfrm>
-          <a:prstGeom prst="rect">
-            <a:avLst/>
-          </a:prstGeom>
-          <a:noFill/>
-          <a:ln/>
-        </p:spPr>
-        <p:txBody>
-          <a:bodyPr wrap="square" lIns="0" tIns="0" rIns="0" bIns="0" rtlCol="0" anchor="ctr"/>
-          <a:lstStyle/>
-          <a:p>
-            <a:pPr indent="0" marL="0">
-              <a:buNone/>
-            </a:pPr>
-            <a:r>
-              <a:rPr lang="en-US" sz="1700" b="1" dirty="0">
-                <a:solidFill>
-                  <a:srgbClr val="2A6289"/>
+              <a:t>Kurallar ve malzeme</a:t>
+            </a:r>
+            <a:endParaRPr lang="en-US" sz="4400" dirty="0"/>
+          </a:p>
+        </p:txBody>
+      </p:sp>
+      <p:sp>
+        <p:nvSpPr>
+          <p:cNvPr id="4" name="Text 2"/>
+          <p:cNvSpPr txBox="1"/>
+          <p:nvPr/>
+        </p:nvSpPr>
+        <p:spPr>
+          <a:xfrm>
+            <a:off x="777240" y="4315968"/>
+            <a:ext cx="8778240" cy="548640"/>
+          </a:xfrm>
+          <a:prstGeom prst="rect">
+            <a:avLst/>
+          </a:prstGeom>
+          <a:noFill/>
+          <a:ln/>
+        </p:spPr>
+        <p:txBody>
+          <a:bodyPr wrap="square" lIns="0" tIns="0" rIns="0" bIns="0" rtlCol="0" anchor="ctr"/>
+          <a:lstStyle/>
+          <a:p>
+            <a:pPr indent="0" marL="0">
+              <a:buNone/>
+            </a:pPr>
+            <a:r>
+              <a:rPr lang="en-US" sz="1700" dirty="0">
+                <a:solidFill>
+                  <a:srgbClr val="C9CCCE"/>
                 </a:solidFill>
                 <a:latin typeface="Calibri" pitchFamily="34" charset="0"/>
                 <a:ea typeface="Calibri" pitchFamily="34" charset="-122"/>
                 <a:cs typeface="Calibri" pitchFamily="34" charset="-120"/>
               </a:rPr>
-              <a:t>Ev tekrarı</a:t>
+              <a:t>Altı kural, bir alışveriş listesi</a:t>
             </a:r>
             <a:endParaRPr lang="en-US" sz="1700" dirty="0"/>
-          </a:p>
-        </p:txBody>
-      </p:sp>
-      <p:sp>
-        <p:nvSpPr>
-          <p:cNvPr id="7" name="Text 5"/>
-          <p:cNvSpPr txBox="1"/>
-          <p:nvPr/>
-        </p:nvSpPr>
-        <p:spPr>
-          <a:xfrm>
-            <a:off x="1325880" y="2212848"/>
-            <a:ext cx="4526280" cy="914400"/>
-          </a:xfrm>
-          <a:prstGeom prst="rect">
-            <a:avLst/>
-          </a:prstGeom>
-          <a:noFill/>
-          <a:ln/>
-        </p:spPr>
-        <p:txBody>
-          <a:bodyPr wrap="square" lIns="0" tIns="0" rIns="0" bIns="0" rtlCol="0" anchor="ctr"/>
-          <a:lstStyle/>
-          <a:p>
-            <a:pPr indent="0" marL="0">
-              <a:lnSpc>
-                <a:spcPts val="1900"/>
-              </a:lnSpc>
-              <a:buNone/>
-            </a:pPr>
-            <a:r>
-              <a:rPr lang="en-US" sz="1350" dirty="0">
-                <a:solidFill>
-                  <a:srgbClr val="1B1F24"/>
-                </a:solidFill>
-                <a:latin typeface="Calibri" pitchFamily="34" charset="0"/>
-                <a:ea typeface="Calibri" pitchFamily="34" charset="-122"/>
-                <a:cs typeface="Calibri" pitchFamily="34" charset="-120"/>
-              </a:rPr>
-              <a:t>Sınıfta yapılanın aynısı evde bir kez daha yapılır ve getirilir. Her hafta ilk 20 dakikada kontrol edilir.</a:t>
-            </a:r>
-            <a:endParaRPr lang="en-US" sz="1350" dirty="0"/>
-          </a:p>
-        </p:txBody>
-      </p:sp>
-      <p:sp>
-        <p:nvSpPr>
-          <p:cNvPr id="8" name="Shape 6"/>
-          <p:cNvSpPr/>
-          <p:nvPr/>
-        </p:nvSpPr>
-        <p:spPr>
-          <a:xfrm>
-            <a:off x="6217920" y="1847088"/>
-            <a:ext cx="365760" cy="365760"/>
-          </a:xfrm>
-          <a:prstGeom prst="ellipse">
-            <a:avLst/>
-          </a:prstGeom>
-          <a:solidFill>
-            <a:srgbClr val="C9CCCE"/>
-          </a:solidFill>
-          <a:ln w="12700">
-            <a:solidFill>
-              <a:srgbClr val="C9CCCE"/>
-            </a:solidFill>
-            <a:prstDash val="solid"/>
-          </a:ln>
-        </p:spPr>
-      </p:sp>
-      <p:sp>
-        <p:nvSpPr>
-          <p:cNvPr id="9" name="Text 7"/>
-          <p:cNvSpPr txBox="1"/>
-          <p:nvPr/>
-        </p:nvSpPr>
-        <p:spPr>
-          <a:xfrm>
-            <a:off x="6217920" y="1911096"/>
-            <a:ext cx="365760" cy="256032"/>
-          </a:xfrm>
-          <a:prstGeom prst="rect">
-            <a:avLst/>
-          </a:prstGeom>
-          <a:noFill/>
-          <a:ln/>
-        </p:spPr>
-        <p:txBody>
-          <a:bodyPr wrap="square" lIns="0" tIns="0" rIns="0" bIns="0" rtlCol="0" anchor="ctr"/>
-          <a:lstStyle/>
-          <a:p>
-            <a:pPr algn="ctr" indent="0" marL="0">
-              <a:buNone/>
-            </a:pPr>
-            <a:r>
-              <a:rPr lang="en-US" sz="1300" b="1" dirty="0">
-                <a:solidFill>
-                  <a:srgbClr val="1B1F24"/>
-                </a:solidFill>
-                <a:latin typeface="Courier New" pitchFamily="34" charset="0"/>
-                <a:ea typeface="Courier New" pitchFamily="34" charset="-122"/>
-                <a:cs typeface="Courier New" pitchFamily="34" charset="-120"/>
-              </a:rPr>
-              <a:t>2</a:t>
-            </a:r>
-            <a:endParaRPr lang="en-US" sz="1300" dirty="0"/>
-          </a:p>
-        </p:txBody>
-      </p:sp>
-      <p:sp>
-        <p:nvSpPr>
-          <p:cNvPr id="10" name="Text 8"/>
-          <p:cNvSpPr txBox="1"/>
-          <p:nvPr/>
-        </p:nvSpPr>
-        <p:spPr>
-          <a:xfrm>
-            <a:off x="6766560" y="1847088"/>
-            <a:ext cx="4480560" cy="320040"/>
-          </a:xfrm>
-          <a:prstGeom prst="rect">
-            <a:avLst/>
-          </a:prstGeom>
-          <a:noFill/>
-          <a:ln/>
-        </p:spPr>
-        <p:txBody>
-          <a:bodyPr wrap="square" lIns="0" tIns="0" rIns="0" bIns="0" rtlCol="0" anchor="ctr"/>
-          <a:lstStyle/>
-          <a:p>
-            <a:pPr indent="0" marL="0">
-              <a:buNone/>
-            </a:pPr>
-            <a:r>
-              <a:rPr lang="en-US" sz="1700" b="1" dirty="0">
-                <a:solidFill>
-                  <a:srgbClr val="1B1F24"/>
-                </a:solidFill>
-                <a:latin typeface="Calibri" pitchFamily="34" charset="0"/>
-                <a:ea typeface="Calibri" pitchFamily="34" charset="-122"/>
-                <a:cs typeface="Calibri" pitchFamily="34" charset="-120"/>
-              </a:rPr>
-              <a:t>Stüdyo mührü</a:t>
-            </a:r>
-            <a:endParaRPr lang="en-US" sz="1700" dirty="0"/>
-          </a:p>
-        </p:txBody>
-      </p:sp>
-      <p:sp>
-        <p:nvSpPr>
-          <p:cNvPr id="11" name="Text 9"/>
-          <p:cNvSpPr txBox="1"/>
-          <p:nvPr/>
-        </p:nvSpPr>
-        <p:spPr>
-          <a:xfrm>
-            <a:off x="6766560" y="2212848"/>
-            <a:ext cx="4526280" cy="914400"/>
-          </a:xfrm>
-          <a:prstGeom prst="rect">
-            <a:avLst/>
-          </a:prstGeom>
-          <a:noFill/>
-          <a:ln/>
-        </p:spPr>
-        <p:txBody>
-          <a:bodyPr wrap="square" lIns="0" tIns="0" rIns="0" bIns="0" rtlCol="0" anchor="ctr"/>
-          <a:lstStyle/>
-          <a:p>
-            <a:pPr indent="0" marL="0">
-              <a:lnSpc>
-                <a:spcPts val="1900"/>
-              </a:lnSpc>
-              <a:buNone/>
-            </a:pPr>
-            <a:r>
-              <a:rPr lang="en-US" sz="1350" dirty="0">
-                <a:solidFill>
-                  <a:srgbClr val="1B1F24"/>
-                </a:solidFill>
-                <a:latin typeface="Calibri" pitchFamily="34" charset="0"/>
-                <a:ea typeface="Calibri" pitchFamily="34" charset="-122"/>
-                <a:cs typeface="Calibri" pitchFamily="34" charset="-120"/>
-              </a:rPr>
-              <a:t>Her ders sonunda o gün stüdyoda ürettiğiniz sayfaları tarihleyip paraflayacağım. Teslim dosyalarında sayfaların en az %60’ı paraflı olmak zorunda.</a:t>
-            </a:r>
-            <a:endParaRPr lang="en-US" sz="1350" dirty="0"/>
-          </a:p>
-        </p:txBody>
-      </p:sp>
-      <p:sp>
-        <p:nvSpPr>
-          <p:cNvPr id="12" name="Shape 10"/>
-          <p:cNvSpPr/>
-          <p:nvPr/>
-        </p:nvSpPr>
-        <p:spPr>
-          <a:xfrm>
-            <a:off x="777240" y="3264408"/>
-            <a:ext cx="365760" cy="365760"/>
-          </a:xfrm>
-          <a:prstGeom prst="ellipse">
-            <a:avLst/>
-          </a:prstGeom>
-          <a:solidFill>
-            <a:srgbClr val="C9CCCE"/>
-          </a:solidFill>
-          <a:ln w="12700">
-            <a:solidFill>
-              <a:srgbClr val="C9CCCE"/>
-            </a:solidFill>
-            <a:prstDash val="solid"/>
-          </a:ln>
-        </p:spPr>
-      </p:sp>
-      <p:sp>
-        <p:nvSpPr>
-          <p:cNvPr id="13" name="Text 11"/>
-          <p:cNvSpPr txBox="1"/>
-          <p:nvPr/>
-        </p:nvSpPr>
-        <p:spPr>
-          <a:xfrm>
-            <a:off x="777240" y="3328416"/>
-            <a:ext cx="365760" cy="256032"/>
-          </a:xfrm>
-          <a:prstGeom prst="rect">
-            <a:avLst/>
-          </a:prstGeom>
-          <a:noFill/>
-          <a:ln/>
-        </p:spPr>
-        <p:txBody>
-          <a:bodyPr wrap="square" lIns="0" tIns="0" rIns="0" bIns="0" rtlCol="0" anchor="ctr"/>
-          <a:lstStyle/>
-          <a:p>
-            <a:pPr algn="ctr" indent="0" marL="0">
-              <a:buNone/>
-            </a:pPr>
-            <a:r>
-              <a:rPr lang="en-US" sz="1300" b="1" dirty="0">
-                <a:solidFill>
-                  <a:srgbClr val="1B1F24"/>
-                </a:solidFill>
-                <a:latin typeface="Courier New" pitchFamily="34" charset="0"/>
-                <a:ea typeface="Courier New" pitchFamily="34" charset="-122"/>
-                <a:cs typeface="Courier New" pitchFamily="34" charset="-120"/>
-              </a:rPr>
-              <a:t>3</a:t>
-            </a:r>
-            <a:endParaRPr lang="en-US" sz="1300" dirty="0"/>
-          </a:p>
-        </p:txBody>
-      </p:sp>
-      <p:sp>
-        <p:nvSpPr>
-          <p:cNvPr id="14" name="Text 12"/>
-          <p:cNvSpPr txBox="1"/>
-          <p:nvPr/>
-        </p:nvSpPr>
-        <p:spPr>
-          <a:xfrm>
-            <a:off x="1325880" y="3264408"/>
-            <a:ext cx="4480560" cy="320040"/>
-          </a:xfrm>
-          <a:prstGeom prst="rect">
-            <a:avLst/>
-          </a:prstGeom>
-          <a:noFill/>
-          <a:ln/>
-        </p:spPr>
-        <p:txBody>
-          <a:bodyPr wrap="square" lIns="0" tIns="0" rIns="0" bIns="0" rtlCol="0" anchor="ctr"/>
-          <a:lstStyle/>
-          <a:p>
-            <a:pPr indent="0" marL="0">
-              <a:buNone/>
-            </a:pPr>
-            <a:r>
-              <a:rPr lang="en-US" sz="1700" b="1" dirty="0">
-                <a:solidFill>
-                  <a:srgbClr val="1B1F24"/>
-                </a:solidFill>
-                <a:latin typeface="Calibri" pitchFamily="34" charset="0"/>
-                <a:ea typeface="Calibri" pitchFamily="34" charset="-122"/>
-                <a:cs typeface="Calibri" pitchFamily="34" charset="-120"/>
-              </a:rPr>
-              <a:t>Cetvel yok</a:t>
-            </a:r>
-            <a:endParaRPr lang="en-US" sz="1700" dirty="0"/>
-          </a:p>
-        </p:txBody>
-      </p:sp>
-      <p:sp>
-        <p:nvSpPr>
-          <p:cNvPr id="15" name="Text 13"/>
-          <p:cNvSpPr txBox="1"/>
-          <p:nvPr/>
-        </p:nvSpPr>
-        <p:spPr>
-          <a:xfrm>
-            <a:off x="1325880" y="3630168"/>
-            <a:ext cx="4526280" cy="914400"/>
-          </a:xfrm>
-          <a:prstGeom prst="rect">
-            <a:avLst/>
-          </a:prstGeom>
-          <a:noFill/>
-          <a:ln/>
-        </p:spPr>
-        <p:txBody>
-          <a:bodyPr wrap="square" lIns="0" tIns="0" rIns="0" bIns="0" rtlCol="0" anchor="ctr"/>
-          <a:lstStyle/>
-          <a:p>
-            <a:pPr indent="0" marL="0">
-              <a:lnSpc>
-                <a:spcPts val="1900"/>
-              </a:lnSpc>
-              <a:buNone/>
-            </a:pPr>
-            <a:r>
-              <a:rPr lang="en-US" sz="1350" dirty="0">
-                <a:solidFill>
-                  <a:srgbClr val="1B1F24"/>
-                </a:solidFill>
-                <a:latin typeface="Calibri" pitchFamily="34" charset="0"/>
-                <a:ea typeface="Calibri" pitchFamily="34" charset="-122"/>
-                <a:cs typeface="Calibri" pitchFamily="34" charset="-120"/>
-              </a:rPr>
-              <a:t>Hiçbir haftada cetvel, gönye veya şablon kullanılmıyor. Perspektif haftası dâhil. Dersin adı serbest çizim.</a:t>
-            </a:r>
-            <a:endParaRPr lang="en-US" sz="1350" dirty="0"/>
-          </a:p>
-        </p:txBody>
-      </p:sp>
-      <p:sp>
-        <p:nvSpPr>
-          <p:cNvPr id="16" name="Shape 14"/>
-          <p:cNvSpPr/>
-          <p:nvPr/>
-        </p:nvSpPr>
-        <p:spPr>
-          <a:xfrm>
-            <a:off x="6217920" y="3264408"/>
-            <a:ext cx="365760" cy="365760"/>
-          </a:xfrm>
-          <a:prstGeom prst="ellipse">
-            <a:avLst/>
-          </a:prstGeom>
-          <a:solidFill>
-            <a:srgbClr val="C9CCCE"/>
-          </a:solidFill>
-          <a:ln w="12700">
-            <a:solidFill>
-              <a:srgbClr val="C9CCCE"/>
-            </a:solidFill>
-            <a:prstDash val="solid"/>
-          </a:ln>
-        </p:spPr>
-      </p:sp>
-      <p:sp>
-        <p:nvSpPr>
-          <p:cNvPr id="17" name="Text 15"/>
-          <p:cNvSpPr txBox="1"/>
-          <p:nvPr/>
-        </p:nvSpPr>
-        <p:spPr>
-          <a:xfrm>
-            <a:off x="6217920" y="3328416"/>
-            <a:ext cx="365760" cy="256032"/>
-          </a:xfrm>
-          <a:prstGeom prst="rect">
-            <a:avLst/>
-          </a:prstGeom>
-          <a:noFill/>
-          <a:ln/>
-        </p:spPr>
-        <p:txBody>
-          <a:bodyPr wrap="square" lIns="0" tIns="0" rIns="0" bIns="0" rtlCol="0" anchor="ctr"/>
-          <a:lstStyle/>
-          <a:p>
-            <a:pPr algn="ctr" indent="0" marL="0">
-              <a:buNone/>
-            </a:pPr>
-            <a:r>
-              <a:rPr lang="en-US" sz="1300" b="1" dirty="0">
-                <a:solidFill>
-                  <a:srgbClr val="1B1F24"/>
-                </a:solidFill>
-                <a:latin typeface="Courier New" pitchFamily="34" charset="0"/>
-                <a:ea typeface="Courier New" pitchFamily="34" charset="-122"/>
-                <a:cs typeface="Courier New" pitchFamily="34" charset="-120"/>
-              </a:rPr>
-              <a:t>4</a:t>
-            </a:r>
-            <a:endParaRPr lang="en-US" sz="1300" dirty="0"/>
-          </a:p>
-        </p:txBody>
-      </p:sp>
-      <p:sp>
-        <p:nvSpPr>
-          <p:cNvPr id="18" name="Text 16"/>
-          <p:cNvSpPr txBox="1"/>
-          <p:nvPr/>
-        </p:nvSpPr>
-        <p:spPr>
-          <a:xfrm>
-            <a:off x="6766560" y="3264408"/>
-            <a:ext cx="4480560" cy="320040"/>
-          </a:xfrm>
-          <a:prstGeom prst="rect">
-            <a:avLst/>
-          </a:prstGeom>
-          <a:noFill/>
-          <a:ln/>
-        </p:spPr>
-        <p:txBody>
-          <a:bodyPr wrap="square" lIns="0" tIns="0" rIns="0" bIns="0" rtlCol="0" anchor="ctr"/>
-          <a:lstStyle/>
-          <a:p>
-            <a:pPr indent="0" marL="0">
-              <a:buNone/>
-            </a:pPr>
-            <a:r>
-              <a:rPr lang="en-US" sz="1700" b="1" dirty="0">
-                <a:solidFill>
-                  <a:srgbClr val="1B1F24"/>
-                </a:solidFill>
-                <a:latin typeface="Calibri" pitchFamily="34" charset="0"/>
-                <a:ea typeface="Calibri" pitchFamily="34" charset="-122"/>
-                <a:cs typeface="Calibri" pitchFamily="34" charset="-120"/>
-              </a:rPr>
-              <a:t>Süreç dosyası zorunlu</a:t>
-            </a:r>
-            <a:endParaRPr lang="en-US" sz="1700" dirty="0"/>
-          </a:p>
-        </p:txBody>
-      </p:sp>
-      <p:sp>
-        <p:nvSpPr>
-          <p:cNvPr id="19" name="Text 17"/>
-          <p:cNvSpPr txBox="1"/>
-          <p:nvPr/>
-        </p:nvSpPr>
-        <p:spPr>
-          <a:xfrm>
-            <a:off x="6766560" y="3630168"/>
-            <a:ext cx="4526280" cy="914400"/>
-          </a:xfrm>
-          <a:prstGeom prst="rect">
-            <a:avLst/>
-          </a:prstGeom>
-          <a:noFill/>
-          <a:ln/>
-        </p:spPr>
-        <p:txBody>
-          <a:bodyPr wrap="square" lIns="0" tIns="0" rIns="0" bIns="0" rtlCol="0" anchor="ctr"/>
-          <a:lstStyle/>
-          <a:p>
-            <a:pPr indent="0" marL="0">
-              <a:lnSpc>
-                <a:spcPts val="1900"/>
-              </a:lnSpc>
-              <a:buNone/>
-            </a:pPr>
-            <a:r>
-              <a:rPr lang="en-US" sz="1350" dirty="0">
-                <a:solidFill>
-                  <a:srgbClr val="1B1F24"/>
-                </a:solidFill>
-                <a:latin typeface="Calibri" pitchFamily="34" charset="0"/>
-                <a:ea typeface="Calibri" pitchFamily="34" charset="-122"/>
-                <a:cs typeface="Calibri" pitchFamily="34" charset="-120"/>
-              </a:rPr>
-              <a:t>Reddedilen denemeler, yırtılan sayfalar, ilk taslaklar dâhil teslim edilir. Temiz bir süreç dosyası düşük not alır.</a:t>
-            </a:r>
-            <a:endParaRPr lang="en-US" sz="1350" dirty="0"/>
-          </a:p>
-        </p:txBody>
-      </p:sp>
-      <p:sp>
-        <p:nvSpPr>
-          <p:cNvPr id="20" name="Shape 18"/>
-          <p:cNvSpPr/>
-          <p:nvPr/>
-        </p:nvSpPr>
-        <p:spPr>
-          <a:xfrm>
-            <a:off x="777240" y="4681728"/>
-            <a:ext cx="365760" cy="365760"/>
-          </a:xfrm>
-          <a:prstGeom prst="ellipse">
-            <a:avLst/>
-          </a:prstGeom>
-          <a:solidFill>
-            <a:srgbClr val="C9CCCE"/>
-          </a:solidFill>
-          <a:ln w="12700">
-            <a:solidFill>
-              <a:srgbClr val="C9CCCE"/>
-            </a:solidFill>
-            <a:prstDash val="solid"/>
-          </a:ln>
-        </p:spPr>
-      </p:sp>
-      <p:sp>
-        <p:nvSpPr>
-          <p:cNvPr id="21" name="Text 19"/>
-          <p:cNvSpPr txBox="1"/>
-          <p:nvPr/>
-        </p:nvSpPr>
-        <p:spPr>
-          <a:xfrm>
-            <a:off x="777240" y="4745736"/>
-            <a:ext cx="365760" cy="256032"/>
-          </a:xfrm>
-          <a:prstGeom prst="rect">
-            <a:avLst/>
-          </a:prstGeom>
-          <a:noFill/>
-          <a:ln/>
-        </p:spPr>
-        <p:txBody>
-          <a:bodyPr wrap="square" lIns="0" tIns="0" rIns="0" bIns="0" rtlCol="0" anchor="ctr"/>
-          <a:lstStyle/>
-          <a:p>
-            <a:pPr algn="ctr" indent="0" marL="0">
-              <a:buNone/>
-            </a:pPr>
-            <a:r>
-              <a:rPr lang="en-US" sz="1300" b="1" dirty="0">
-                <a:solidFill>
-                  <a:srgbClr val="1B1F24"/>
-                </a:solidFill>
-                <a:latin typeface="Courier New" pitchFamily="34" charset="0"/>
-                <a:ea typeface="Courier New" pitchFamily="34" charset="-122"/>
-                <a:cs typeface="Courier New" pitchFamily="34" charset="-120"/>
-              </a:rPr>
-              <a:t>5</a:t>
-            </a:r>
-            <a:endParaRPr lang="en-US" sz="1300" dirty="0"/>
-          </a:p>
-        </p:txBody>
-      </p:sp>
-      <p:sp>
-        <p:nvSpPr>
-          <p:cNvPr id="22" name="Text 20"/>
-          <p:cNvSpPr txBox="1"/>
-          <p:nvPr/>
-        </p:nvSpPr>
-        <p:spPr>
-          <a:xfrm>
-            <a:off x="1325880" y="4681728"/>
-            <a:ext cx="4480560" cy="320040"/>
-          </a:xfrm>
-          <a:prstGeom prst="rect">
-            <a:avLst/>
-          </a:prstGeom>
-          <a:noFill/>
-          <a:ln/>
-        </p:spPr>
-        <p:txBody>
-          <a:bodyPr wrap="square" lIns="0" tIns="0" rIns="0" bIns="0" rtlCol="0" anchor="ctr"/>
-          <a:lstStyle/>
-          <a:p>
-            <a:pPr indent="0" marL="0">
-              <a:buNone/>
-            </a:pPr>
-            <a:r>
-              <a:rPr lang="en-US" sz="1700" b="1" dirty="0">
-                <a:solidFill>
-                  <a:srgbClr val="1B1F24"/>
-                </a:solidFill>
-                <a:latin typeface="Calibri" pitchFamily="34" charset="0"/>
-                <a:ea typeface="Calibri" pitchFamily="34" charset="-122"/>
-                <a:cs typeface="Calibri" pitchFamily="34" charset="-120"/>
-              </a:rPr>
-              <a:t>Şablon ve yapay zekâ yok</a:t>
-            </a:r>
-            <a:endParaRPr lang="en-US" sz="1700" dirty="0"/>
-          </a:p>
-        </p:txBody>
-      </p:sp>
-      <p:sp>
-        <p:nvSpPr>
-          <p:cNvPr id="23" name="Text 21"/>
-          <p:cNvSpPr txBox="1"/>
-          <p:nvPr/>
-        </p:nvSpPr>
-        <p:spPr>
-          <a:xfrm>
-            <a:off x="1325880" y="5047488"/>
-            <a:ext cx="4526280" cy="914400"/>
-          </a:xfrm>
-          <a:prstGeom prst="rect">
-            <a:avLst/>
-          </a:prstGeom>
-          <a:noFill/>
-          <a:ln/>
-        </p:spPr>
-        <p:txBody>
-          <a:bodyPr wrap="square" lIns="0" tIns="0" rIns="0" bIns="0" rtlCol="0" anchor="ctr"/>
-          <a:lstStyle/>
-          <a:p>
-            <a:pPr indent="0" marL="0">
-              <a:lnSpc>
-                <a:spcPts val="1900"/>
-              </a:lnSpc>
-              <a:buNone/>
-            </a:pPr>
-            <a:r>
-              <a:rPr lang="en-US" sz="1350" dirty="0">
-                <a:solidFill>
-                  <a:srgbClr val="1B1F24"/>
-                </a:solidFill>
-                <a:latin typeface="Calibri" pitchFamily="34" charset="0"/>
-                <a:ea typeface="Calibri" pitchFamily="34" charset="-122"/>
-                <a:cs typeface="Calibri" pitchFamily="34" charset="-120"/>
-              </a:rPr>
-              <a:t>Hazır kesim şablonu, indirilmiş dosya, plotter kesimi ve üretken yapay zekâ görseli kullanılmaz.</a:t>
-            </a:r>
-            <a:endParaRPr lang="en-US" sz="1350" dirty="0"/>
-          </a:p>
-        </p:txBody>
-      </p:sp>
-      <p:sp>
-        <p:nvSpPr>
-          <p:cNvPr id="24" name="Text 22"/>
-          <p:cNvSpPr txBox="1"/>
-          <p:nvPr/>
-        </p:nvSpPr>
-        <p:spPr>
-          <a:xfrm>
-            <a:off x="777240" y="5623560"/>
-            <a:ext cx="10634472" cy="365760"/>
-          </a:xfrm>
-          <a:prstGeom prst="rect">
-            <a:avLst/>
-          </a:prstGeom>
-          <a:noFill/>
-          <a:ln/>
-        </p:spPr>
-        <p:txBody>
-          <a:bodyPr wrap="square" lIns="0" tIns="0" rIns="0" bIns="0" rtlCol="0" anchor="ctr"/>
-          <a:lstStyle/>
-          <a:p>
-            <a:pPr indent="0" marL="0">
-              <a:buNone/>
-            </a:pPr>
-            <a:r>
-              <a:rPr lang="en-US" sz="1400" i="1" dirty="0">
-                <a:solidFill>
-                  <a:srgbClr val="2A6289"/>
-                </a:solidFill>
-                <a:latin typeface="Calibri" pitchFamily="34" charset="0"/>
-                <a:ea typeface="Calibri" pitchFamily="34" charset="-122"/>
-                <a:cs typeface="Calibri" pitchFamily="34" charset="-120"/>
-              </a:rPr>
-              <a:t>Ev tekrarlarından birini, kritiği uygulayarak 13. haftaya kadar bir kez yeniden teslim edebilirsiniz. Bu ders öğrenmeyi ödüllendirir.</a:t>
-            </a:r>
-            <a:endParaRPr lang="en-US" sz="1400" dirty="0"/>
           </a:p>
         </p:txBody>
       </p:sp>
@@ -20517,7 +20586,7 @@
                 <a:ea typeface="Century Schoolbook" pitchFamily="34" charset="-122"/>
                 <a:cs typeface="Century Schoolbook" pitchFamily="34" charset="-120"/>
               </a:rPr>
-              <a:t>Malzeme listesi</a:t>
+              <a:t>Altı kural</a:t>
             </a:r>
             <a:endParaRPr lang="en-US" sz="3400" dirty="0"/>
           </a:p>
@@ -20525,63 +20594,169 @@
       </p:sp>
       <p:sp>
         <p:nvSpPr>
-          <p:cNvPr id="4" name="Text 2"/>
-          <p:cNvSpPr txBox="1"/>
-          <p:nvPr/>
-        </p:nvSpPr>
-        <p:spPr>
-          <a:xfrm>
-            <a:off x="777240" y="1755648"/>
-            <a:ext cx="10634472" cy="502920"/>
-          </a:xfrm>
-          <a:prstGeom prst="rect">
-            <a:avLst/>
-          </a:prstGeom>
-          <a:noFill/>
-          <a:ln/>
-        </p:spPr>
-        <p:txBody>
-          <a:bodyPr wrap="square" lIns="0" tIns="0" rIns="0" bIns="0" rtlCol="0" anchor="ctr"/>
-          <a:lstStyle/>
-          <a:p>
-            <a:pPr indent="0" marL="0">
-              <a:buNone/>
-            </a:pPr>
-            <a:r>
-              <a:rPr lang="en-US" sz="1500" dirty="0">
-                <a:solidFill>
-                  <a:srgbClr val="6B747C"/>
+          <p:cNvPr id="4" name="Shape 2"/>
+          <p:cNvSpPr/>
+          <p:nvPr/>
+        </p:nvSpPr>
+        <p:spPr>
+          <a:xfrm>
+            <a:off x="777240" y="1801368"/>
+            <a:ext cx="365760" cy="365760"/>
+          </a:xfrm>
+          <a:prstGeom prst="ellipse">
+            <a:avLst/>
+          </a:prstGeom>
+          <a:solidFill>
+            <a:srgbClr val="2A6289"/>
+          </a:solidFill>
+          <a:ln w="12700">
+            <a:solidFill>
+              <a:srgbClr val="2A6289"/>
+            </a:solidFill>
+            <a:prstDash val="solid"/>
+          </a:ln>
+        </p:spPr>
+      </p:sp>
+      <p:sp>
+        <p:nvSpPr>
+          <p:cNvPr id="5" name="Text 3"/>
+          <p:cNvSpPr txBox="1"/>
+          <p:nvPr/>
+        </p:nvSpPr>
+        <p:spPr>
+          <a:xfrm>
+            <a:off x="777240" y="1865376"/>
+            <a:ext cx="365760" cy="256032"/>
+          </a:xfrm>
+          <a:prstGeom prst="rect">
+            <a:avLst/>
+          </a:prstGeom>
+          <a:noFill/>
+          <a:ln/>
+        </p:spPr>
+        <p:txBody>
+          <a:bodyPr wrap="square" lIns="0" tIns="0" rIns="0" bIns="0" rtlCol="0" anchor="ctr"/>
+          <a:lstStyle/>
+          <a:p>
+            <a:pPr algn="ctr" indent="0" marL="0">
+              <a:buNone/>
+            </a:pPr>
+            <a:r>
+              <a:rPr lang="en-US" sz="1300" b="1" dirty="0">
+                <a:solidFill>
+                  <a:srgbClr val="FFFFFF"/>
+                </a:solidFill>
+                <a:latin typeface="Courier New" pitchFamily="34" charset="0"/>
+                <a:ea typeface="Courier New" pitchFamily="34" charset="-122"/>
+                <a:cs typeface="Courier New" pitchFamily="34" charset="-120"/>
+              </a:rPr>
+              <a:t>1</a:t>
+            </a:r>
+            <a:endParaRPr lang="en-US" sz="1300" dirty="0"/>
+          </a:p>
+        </p:txBody>
+      </p:sp>
+      <p:sp>
+        <p:nvSpPr>
+          <p:cNvPr id="6" name="Text 4"/>
+          <p:cNvSpPr txBox="1"/>
+          <p:nvPr/>
+        </p:nvSpPr>
+        <p:spPr>
+          <a:xfrm>
+            <a:off x="1325880" y="1801368"/>
+            <a:ext cx="4480560" cy="320040"/>
+          </a:xfrm>
+          <a:prstGeom prst="rect">
+            <a:avLst/>
+          </a:prstGeom>
+          <a:noFill/>
+          <a:ln/>
+        </p:spPr>
+        <p:txBody>
+          <a:bodyPr wrap="square" lIns="0" tIns="0" rIns="0" bIns="0" rtlCol="0" anchor="ctr"/>
+          <a:lstStyle/>
+          <a:p>
+            <a:pPr indent="0" marL="0">
+              <a:buNone/>
+            </a:pPr>
+            <a:r>
+              <a:rPr lang="en-US" sz="1650" b="1" dirty="0">
+                <a:solidFill>
+                  <a:srgbClr val="2A6289"/>
                 </a:solidFill>
                 <a:latin typeface="Calibri" pitchFamily="34" charset="0"/>
                 <a:ea typeface="Calibri" pitchFamily="34" charset="-122"/>
                 <a:cs typeface="Calibri" pitchFamily="34" charset="-120"/>
               </a:rPr>
-              <a:t>Gelecek haftaya kadar temin edilmeli. İlk beş hafta tek bir 2B kalem ve defterle de geçilebilir — kimse malzeme yüzünden geri kalmasın.</a:t>
-            </a:r>
-            <a:endParaRPr lang="en-US" sz="1500" dirty="0"/>
-          </a:p>
-        </p:txBody>
-      </p:sp>
-      <p:sp>
-        <p:nvSpPr>
-          <p:cNvPr id="5" name="Shape 3"/>
+              <a:t>Cetvel yok</a:t>
+            </a:r>
+            <a:endParaRPr lang="en-US" sz="1650" dirty="0"/>
+          </a:p>
+        </p:txBody>
+      </p:sp>
+      <p:sp>
+        <p:nvSpPr>
+          <p:cNvPr id="7" name="Text 5"/>
+          <p:cNvSpPr txBox="1"/>
+          <p:nvPr/>
+        </p:nvSpPr>
+        <p:spPr>
+          <a:xfrm>
+            <a:off x="1325880" y="2167128"/>
+            <a:ext cx="4526280" cy="914400"/>
+          </a:xfrm>
+          <a:prstGeom prst="rect">
+            <a:avLst/>
+          </a:prstGeom>
+          <a:noFill/>
+          <a:ln/>
+        </p:spPr>
+        <p:txBody>
+          <a:bodyPr wrap="square" lIns="0" tIns="0" rIns="0" bIns="0" rtlCol="0" anchor="ctr"/>
+          <a:lstStyle/>
+          <a:p>
+            <a:pPr indent="0" marL="0">
+              <a:lnSpc>
+                <a:spcPts val="1800"/>
+              </a:lnSpc>
+              <a:buNone/>
+            </a:pPr>
+            <a:r>
+              <a:rPr lang="en-US" sz="1300" dirty="0">
+                <a:solidFill>
+                  <a:srgbClr val="1B1F24"/>
+                </a:solidFill>
+                <a:latin typeface="Calibri" pitchFamily="34" charset="0"/>
+                <a:ea typeface="Calibri" pitchFamily="34" charset="-122"/>
+                <a:cs typeface="Calibri" pitchFamily="34" charset="-120"/>
+              </a:rPr>
+              <a:t>Hiçbir haftada cetvel, gönye veya şablon kullanılmıyor. Perspektif haftası dâhil. Dersin adı serbest çizim.</a:t>
+            </a:r>
+            <a:endParaRPr lang="en-US" sz="1300" dirty="0"/>
+          </a:p>
+        </p:txBody>
+      </p:sp>
+      <p:sp>
+        <p:nvSpPr>
+          <p:cNvPr id="8" name="Shape 6"/>
           <p:cNvSpPr/>
           <p:nvPr/>
         </p:nvSpPr>
         <p:spPr>
           <a:xfrm>
-            <a:off x="777240" y="2286000"/>
-            <a:ext cx="5148072" cy="3383280"/>
-          </a:xfrm>
-          <a:prstGeom prst="rect">
+            <a:off x="6217920" y="1801368"/>
+            <a:ext cx="365760" cy="365760"/>
+          </a:xfrm>
+          <a:prstGeom prst="ellipse">
             <a:avLst/>
           </a:prstGeom>
           <a:solidFill>
-            <a:srgbClr val="F1F3F4"/>
+            <a:srgbClr val="2A6289"/>
           </a:solidFill>
           <a:ln w="12700">
             <a:solidFill>
-              <a:srgbClr val="F1F3F4"/>
+              <a:srgbClr val="2A6289"/>
             </a:solidFill>
             <a:prstDash val="solid"/>
           </a:ln>
@@ -20589,94 +20764,111 @@
       </p:sp>
       <p:sp>
         <p:nvSpPr>
-          <p:cNvPr id="6" name="Text 4"/>
-          <p:cNvSpPr txBox="1"/>
-          <p:nvPr/>
-        </p:nvSpPr>
-        <p:spPr>
-          <a:xfrm>
-            <a:off x="1124712" y="2542032"/>
-            <a:ext cx="2743200" cy="274320"/>
-          </a:xfrm>
-          <a:prstGeom prst="rect">
-            <a:avLst/>
-          </a:prstGeom>
-          <a:noFill/>
-          <a:ln/>
-        </p:spPr>
-        <p:txBody>
-          <a:bodyPr wrap="square" lIns="0" tIns="0" rIns="0" bIns="0" rtlCol="0" anchor="ctr"/>
-          <a:lstStyle/>
-          <a:p>
-            <a:pPr indent="0" marL="0">
-              <a:buNone/>
-            </a:pPr>
-            <a:r>
-              <a:rPr lang="en-US" sz="1100" spc="160" kern="0" dirty="0">
-                <a:solidFill>
-                  <a:srgbClr val="2A6289"/>
+          <p:cNvPr id="9" name="Text 7"/>
+          <p:cNvSpPr txBox="1"/>
+          <p:nvPr/>
+        </p:nvSpPr>
+        <p:spPr>
+          <a:xfrm>
+            <a:off x="6217920" y="1865376"/>
+            <a:ext cx="365760" cy="256032"/>
+          </a:xfrm>
+          <a:prstGeom prst="rect">
+            <a:avLst/>
+          </a:prstGeom>
+          <a:noFill/>
+          <a:ln/>
+        </p:spPr>
+        <p:txBody>
+          <a:bodyPr wrap="square" lIns="0" tIns="0" rIns="0" bIns="0" rtlCol="0" anchor="ctr"/>
+          <a:lstStyle/>
+          <a:p>
+            <a:pPr algn="ctr" indent="0" marL="0">
+              <a:buNone/>
+            </a:pPr>
+            <a:r>
+              <a:rPr lang="en-US" sz="1300" b="1" dirty="0">
+                <a:solidFill>
+                  <a:srgbClr val="FFFFFF"/>
                 </a:solidFill>
                 <a:latin typeface="Courier New" pitchFamily="34" charset="0"/>
                 <a:ea typeface="Courier New" pitchFamily="34" charset="-122"/>
                 <a:cs typeface="Courier New" pitchFamily="34" charset="-120"/>
               </a:rPr>
-              <a:t>ZORUNLU</a:t>
-            </a:r>
-            <a:endParaRPr lang="en-US" sz="1100" dirty="0"/>
-          </a:p>
-        </p:txBody>
-      </p:sp>
-      <p:sp>
-        <p:nvSpPr>
-          <p:cNvPr id="7" name="Text 5"/>
-          <p:cNvSpPr txBox="1"/>
-          <p:nvPr/>
-        </p:nvSpPr>
-        <p:spPr>
-          <a:xfrm>
-            <a:off x="1124712" y="2880360"/>
-            <a:ext cx="4526280" cy="2606040"/>
-          </a:xfrm>
-          <a:prstGeom prst="rect">
-            <a:avLst/>
-          </a:prstGeom>
-          <a:noFill/>
-          <a:ln/>
-        </p:spPr>
-        <p:txBody>
-          <a:bodyPr wrap="square" lIns="0" tIns="0" rIns="0" bIns="0" rtlCol="0" anchor="ctr"/>
-          <a:lstStyle/>
-          <a:p>
-            <a:pPr marL="342900" indent="-342900">
-              <a:spcAft>
-                <a:spcPts val="700"/>
-              </a:spcAft>
-              <a:buSzPct val="100000"/>
-              <a:buChar char="•"/>
-            </a:pPr>
-            <a:r>
-              <a:rPr lang="en-US" sz="1350" dirty="0">
-                <a:solidFill>
-                  <a:srgbClr val="1B1F24"/>
+              <a:t>2</a:t>
+            </a:r>
+            <a:endParaRPr lang="en-US" sz="1300" dirty="0"/>
+          </a:p>
+        </p:txBody>
+      </p:sp>
+      <p:sp>
+        <p:nvSpPr>
+          <p:cNvPr id="10" name="Text 8"/>
+          <p:cNvSpPr txBox="1"/>
+          <p:nvPr/>
+        </p:nvSpPr>
+        <p:spPr>
+          <a:xfrm>
+            <a:off x="6766560" y="1801368"/>
+            <a:ext cx="4480560" cy="320040"/>
+          </a:xfrm>
+          <a:prstGeom prst="rect">
+            <a:avLst/>
+          </a:prstGeom>
+          <a:noFill/>
+          <a:ln/>
+        </p:spPr>
+        <p:txBody>
+          <a:bodyPr wrap="square" lIns="0" tIns="0" rIns="0" bIns="0" rtlCol="0" anchor="ctr"/>
+          <a:lstStyle/>
+          <a:p>
+            <a:pPr indent="0" marL="0">
+              <a:buNone/>
+            </a:pPr>
+            <a:r>
+              <a:rPr lang="en-US" sz="1650" b="1" dirty="0">
+                <a:solidFill>
+                  <a:srgbClr val="2A6289"/>
                 </a:solidFill>
                 <a:latin typeface="Calibri" pitchFamily="34" charset="0"/>
                 <a:ea typeface="Calibri" pitchFamily="34" charset="-122"/>
                 <a:cs typeface="Calibri" pitchFamily="34" charset="-120"/>
               </a:rPr>
-              <a:t>A4 dikişli eskiz defteri + A3 eskiz bloğu</a:t>
-            </a:r>
-            <a:endParaRPr lang="en-US" sz="1350" dirty="0"/>
-          </a:p>
-          <a:p>
-            <a:pPr marL="342900" indent="-342900">
-              <a:spcAft>
-                <a:spcPts val="700"/>
-              </a:spcAft>
-              <a:buSzPct val="100000"/>
-              <a:buChar char="•"/>
-            </a:pPr>
-            <a:r>
-              <a:rPr lang="en-US" sz="1350" dirty="0">
+              <a:t>Yapay zekâ yok</a:t>
+            </a:r>
+            <a:endParaRPr lang="en-US" sz="1650" dirty="0"/>
+          </a:p>
+        </p:txBody>
+      </p:sp>
+      <p:sp>
+        <p:nvSpPr>
+          <p:cNvPr id="11" name="Text 9"/>
+          <p:cNvSpPr txBox="1"/>
+          <p:nvPr/>
+        </p:nvSpPr>
+        <p:spPr>
+          <a:xfrm>
+            <a:off x="6766560" y="2167128"/>
+            <a:ext cx="4526280" cy="914400"/>
+          </a:xfrm>
+          <a:prstGeom prst="rect">
+            <a:avLst/>
+          </a:prstGeom>
+          <a:noFill/>
+          <a:ln/>
+        </p:spPr>
+        <p:txBody>
+          <a:bodyPr wrap="square" lIns="0" tIns="0" rIns="0" bIns="0" rtlCol="0" anchor="ctr"/>
+          <a:lstStyle/>
+          <a:p>
+            <a:pPr indent="0" marL="0">
+              <a:lnSpc>
+                <a:spcPts val="1800"/>
+              </a:lnSpc>
+              <a:buNone/>
+            </a:pPr>
+            <a:r>
+              <a:rPr lang="en-US" sz="1300" dirty="0">
                 <a:solidFill>
                   <a:srgbClr val="1B1F24"/>
                 </a:solidFill>
@@ -20684,20 +20876,102 @@
                 <a:ea typeface="Calibri" pitchFamily="34" charset="-122"/>
                 <a:cs typeface="Calibri" pitchFamily="34" charset="-120"/>
               </a:rPr>
-              <a:t>Kurşun kalem: 2H, HB, 2B, 4B, 6B</a:t>
-            </a:r>
-            <a:endParaRPr lang="en-US" sz="1350" dirty="0"/>
-          </a:p>
-          <a:p>
-            <a:pPr marL="342900" indent="-342900">
-              <a:spcAft>
-                <a:spcPts val="700"/>
-              </a:spcAft>
-              <a:buSzPct val="100000"/>
-              <a:buChar char="•"/>
-            </a:pPr>
-            <a:r>
-              <a:rPr lang="en-US" sz="1350" dirty="0">
+              <a:t>Üretken yapay zekâ ile oluşturulmuş görüntüler teslim edilen çalışmalarda kullanılamaz. Bu ders el–göz–zihin döngüsünü ölçer.</a:t>
+            </a:r>
+            <a:endParaRPr lang="en-US" sz="1300" dirty="0"/>
+          </a:p>
+        </p:txBody>
+      </p:sp>
+      <p:sp>
+        <p:nvSpPr>
+          <p:cNvPr id="12" name="Shape 10"/>
+          <p:cNvSpPr/>
+          <p:nvPr/>
+        </p:nvSpPr>
+        <p:spPr>
+          <a:xfrm>
+            <a:off x="777240" y="3191256"/>
+            <a:ext cx="365760" cy="365760"/>
+          </a:xfrm>
+          <a:prstGeom prst="ellipse">
+            <a:avLst/>
+          </a:prstGeom>
+          <a:solidFill>
+            <a:srgbClr val="C9CCCE"/>
+          </a:solidFill>
+          <a:ln w="12700">
+            <a:solidFill>
+              <a:srgbClr val="C9CCCE"/>
+            </a:solidFill>
+            <a:prstDash val="solid"/>
+          </a:ln>
+        </p:spPr>
+      </p:sp>
+      <p:sp>
+        <p:nvSpPr>
+          <p:cNvPr id="13" name="Text 11"/>
+          <p:cNvSpPr txBox="1"/>
+          <p:nvPr/>
+        </p:nvSpPr>
+        <p:spPr>
+          <a:xfrm>
+            <a:off x="777240" y="3255264"/>
+            <a:ext cx="365760" cy="256032"/>
+          </a:xfrm>
+          <a:prstGeom prst="rect">
+            <a:avLst/>
+          </a:prstGeom>
+          <a:noFill/>
+          <a:ln/>
+        </p:spPr>
+        <p:txBody>
+          <a:bodyPr wrap="square" lIns="0" tIns="0" rIns="0" bIns="0" rtlCol="0" anchor="ctr"/>
+          <a:lstStyle/>
+          <a:p>
+            <a:pPr algn="ctr" indent="0" marL="0">
+              <a:buNone/>
+            </a:pPr>
+            <a:r>
+              <a:rPr lang="en-US" sz="1300" b="1" dirty="0">
+                <a:solidFill>
+                  <a:srgbClr val="1B1F24"/>
+                </a:solidFill>
+                <a:latin typeface="Courier New" pitchFamily="34" charset="0"/>
+                <a:ea typeface="Courier New" pitchFamily="34" charset="-122"/>
+                <a:cs typeface="Courier New" pitchFamily="34" charset="-120"/>
+              </a:rPr>
+              <a:t>3</a:t>
+            </a:r>
+            <a:endParaRPr lang="en-US" sz="1300" dirty="0"/>
+          </a:p>
+        </p:txBody>
+      </p:sp>
+      <p:sp>
+        <p:nvSpPr>
+          <p:cNvPr id="14" name="Text 12"/>
+          <p:cNvSpPr txBox="1"/>
+          <p:nvPr/>
+        </p:nvSpPr>
+        <p:spPr>
+          <a:xfrm>
+            <a:off x="1325880" y="3191256"/>
+            <a:ext cx="4480560" cy="320040"/>
+          </a:xfrm>
+          <a:prstGeom prst="rect">
+            <a:avLst/>
+          </a:prstGeom>
+          <a:noFill/>
+          <a:ln/>
+        </p:spPr>
+        <p:txBody>
+          <a:bodyPr wrap="square" lIns="0" tIns="0" rIns="0" bIns="0" rtlCol="0" anchor="ctr"/>
+          <a:lstStyle/>
+          <a:p>
+            <a:pPr indent="0" marL="0">
+              <a:buNone/>
+            </a:pPr>
+            <a:r>
+              <a:rPr lang="en-US" sz="1650" b="1" dirty="0">
                 <a:solidFill>
                   <a:srgbClr val="1B1F24"/>
                 </a:solidFill>
@@ -20705,20 +20979,41 @@
                 <a:ea typeface="Calibri" pitchFamily="34" charset="-122"/>
                 <a:cs typeface="Calibri" pitchFamily="34" charset="-120"/>
               </a:rPr>
-              <a:t>İnce kömür kalem + kömür çubuk</a:t>
-            </a:r>
-            <a:endParaRPr lang="en-US" sz="1350" dirty="0"/>
-          </a:p>
-          <a:p>
-            <a:pPr marL="342900" indent="-342900">
-              <a:spcAft>
-                <a:spcPts val="700"/>
-              </a:spcAft>
-              <a:buSzPct val="100000"/>
-              <a:buChar char="•"/>
-            </a:pPr>
-            <a:r>
-              <a:rPr lang="en-US" sz="1350" dirty="0">
+              <a:t>Referans fotoğraf serbest</a:t>
+            </a:r>
+            <a:endParaRPr lang="en-US" sz="1650" dirty="0"/>
+          </a:p>
+        </p:txBody>
+      </p:sp>
+      <p:sp>
+        <p:nvSpPr>
+          <p:cNvPr id="15" name="Text 13"/>
+          <p:cNvSpPr txBox="1"/>
+          <p:nvPr/>
+        </p:nvSpPr>
+        <p:spPr>
+          <a:xfrm>
+            <a:off x="1325880" y="3557016"/>
+            <a:ext cx="4526280" cy="914400"/>
+          </a:xfrm>
+          <a:prstGeom prst="rect">
+            <a:avLst/>
+          </a:prstGeom>
+          <a:noFill/>
+          <a:ln/>
+        </p:spPr>
+        <p:txBody>
+          <a:bodyPr wrap="square" lIns="0" tIns="0" rIns="0" bIns="0" rtlCol="0" anchor="ctr"/>
+          <a:lstStyle/>
+          <a:p>
+            <a:pPr indent="0" marL="0">
+              <a:lnSpc>
+                <a:spcPts val="1800"/>
+              </a:lnSpc>
+              <a:buNone/>
+            </a:pPr>
+            <a:r>
+              <a:rPr lang="en-US" sz="1300" dirty="0">
                 <a:solidFill>
                   <a:srgbClr val="1B1F24"/>
                 </a:solidFill>
@@ -20726,20 +21021,102 @@
                 <a:ea typeface="Calibri" pitchFamily="34" charset="-122"/>
                 <a:cs typeface="Calibri" pitchFamily="34" charset="-120"/>
               </a:rPr>
-              <a:t>Fineliner 0.1 / 0.3 / 0.5, siyah</a:t>
-            </a:r>
-            <a:endParaRPr lang="en-US" sz="1350" dirty="0"/>
-          </a:p>
-          <a:p>
-            <a:pPr marL="342900" indent="-342900">
-              <a:spcAft>
-                <a:spcPts val="700"/>
-              </a:spcAft>
-              <a:buSzPct val="100000"/>
-              <a:buChar char="•"/>
-            </a:pPr>
-            <a:r>
-              <a:rPr lang="en-US" sz="1350" dirty="0">
+              <a:t>Kaynağı belirtmek koşuluyla. Ancak fotoğraftan birebir kopya, gözlem çiziminin yerine geçmez.</a:t>
+            </a:r>
+            <a:endParaRPr lang="en-US" sz="1300" dirty="0"/>
+          </a:p>
+        </p:txBody>
+      </p:sp>
+      <p:sp>
+        <p:nvSpPr>
+          <p:cNvPr id="16" name="Shape 14"/>
+          <p:cNvSpPr/>
+          <p:nvPr/>
+        </p:nvSpPr>
+        <p:spPr>
+          <a:xfrm>
+            <a:off x="6217920" y="3191256"/>
+            <a:ext cx="365760" cy="365760"/>
+          </a:xfrm>
+          <a:prstGeom prst="ellipse">
+            <a:avLst/>
+          </a:prstGeom>
+          <a:solidFill>
+            <a:srgbClr val="C9CCCE"/>
+          </a:solidFill>
+          <a:ln w="12700">
+            <a:solidFill>
+              <a:srgbClr val="C9CCCE"/>
+            </a:solidFill>
+            <a:prstDash val="solid"/>
+          </a:ln>
+        </p:spPr>
+      </p:sp>
+      <p:sp>
+        <p:nvSpPr>
+          <p:cNvPr id="17" name="Text 15"/>
+          <p:cNvSpPr txBox="1"/>
+          <p:nvPr/>
+        </p:nvSpPr>
+        <p:spPr>
+          <a:xfrm>
+            <a:off x="6217920" y="3255264"/>
+            <a:ext cx="365760" cy="256032"/>
+          </a:xfrm>
+          <a:prstGeom prst="rect">
+            <a:avLst/>
+          </a:prstGeom>
+          <a:noFill/>
+          <a:ln/>
+        </p:spPr>
+        <p:txBody>
+          <a:bodyPr wrap="square" lIns="0" tIns="0" rIns="0" bIns="0" rtlCol="0" anchor="ctr"/>
+          <a:lstStyle/>
+          <a:p>
+            <a:pPr algn="ctr" indent="0" marL="0">
+              <a:buNone/>
+            </a:pPr>
+            <a:r>
+              <a:rPr lang="en-US" sz="1300" b="1" dirty="0">
+                <a:solidFill>
+                  <a:srgbClr val="1B1F24"/>
+                </a:solidFill>
+                <a:latin typeface="Courier New" pitchFamily="34" charset="0"/>
+                <a:ea typeface="Courier New" pitchFamily="34" charset="-122"/>
+                <a:cs typeface="Courier New" pitchFamily="34" charset="-120"/>
+              </a:rPr>
+              <a:t>4</a:t>
+            </a:r>
+            <a:endParaRPr lang="en-US" sz="1300" dirty="0"/>
+          </a:p>
+        </p:txBody>
+      </p:sp>
+      <p:sp>
+        <p:nvSpPr>
+          <p:cNvPr id="18" name="Text 16"/>
+          <p:cNvSpPr txBox="1"/>
+          <p:nvPr/>
+        </p:nvSpPr>
+        <p:spPr>
+          <a:xfrm>
+            <a:off x="6766560" y="3191256"/>
+            <a:ext cx="4480560" cy="320040"/>
+          </a:xfrm>
+          <a:prstGeom prst="rect">
+            <a:avLst/>
+          </a:prstGeom>
+          <a:noFill/>
+          <a:ln/>
+        </p:spPr>
+        <p:txBody>
+          <a:bodyPr wrap="square" lIns="0" tIns="0" rIns="0" bIns="0" rtlCol="0" anchor="ctr"/>
+          <a:lstStyle/>
+          <a:p>
+            <a:pPr indent="0" marL="0">
+              <a:buNone/>
+            </a:pPr>
+            <a:r>
+              <a:rPr lang="en-US" sz="1650" b="1" dirty="0">
                 <a:solidFill>
                   <a:srgbClr val="1B1F24"/>
                 </a:solidFill>
@@ -20747,20 +21124,41 @@
                 <a:ea typeface="Calibri" pitchFamily="34" charset="-122"/>
                 <a:cs typeface="Calibri" pitchFamily="34" charset="-120"/>
               </a:rPr>
-              <a:t>Gri marker seti, 3 ton</a:t>
-            </a:r>
-            <a:endParaRPr lang="en-US" sz="1350" dirty="0"/>
-          </a:p>
-          <a:p>
-            <a:pPr marL="342900" indent="-342900">
-              <a:spcAft>
-                <a:spcPts val="700"/>
-              </a:spcAft>
-              <a:buSzPct val="100000"/>
-              <a:buChar char="•"/>
-            </a:pPr>
-            <a:r>
-              <a:rPr lang="en-US" sz="1350" dirty="0">
+              <a:t>Üretim ders saatinde olur</a:t>
+            </a:r>
+            <a:endParaRPr lang="en-US" sz="1650" dirty="0"/>
+          </a:p>
+        </p:txBody>
+      </p:sp>
+      <p:sp>
+        <p:nvSpPr>
+          <p:cNvPr id="19" name="Text 17"/>
+          <p:cNvSpPr txBox="1"/>
+          <p:nvPr/>
+        </p:nvSpPr>
+        <p:spPr>
+          <a:xfrm>
+            <a:off x="6766560" y="3557016"/>
+            <a:ext cx="4526280" cy="914400"/>
+          </a:xfrm>
+          <a:prstGeom prst="rect">
+            <a:avLst/>
+          </a:prstGeom>
+          <a:noFill/>
+          <a:ln/>
+        </p:spPr>
+        <p:txBody>
+          <a:bodyPr wrap="square" lIns="0" tIns="0" rIns="0" bIns="0" rtlCol="0" anchor="ctr"/>
+          <a:lstStyle/>
+          <a:p>
+            <a:pPr indent="0" marL="0">
+              <a:lnSpc>
+                <a:spcPts val="1800"/>
+              </a:lnSpc>
+              <a:buNone/>
+            </a:pPr>
+            <a:r>
+              <a:rPr lang="en-US" sz="1300" dirty="0">
                 <a:solidFill>
                   <a:srgbClr val="1B1F24"/>
                 </a:solidFill>
@@ -20768,20 +21166,102 @@
                 <a:ea typeface="Calibri" pitchFamily="34" charset="-122"/>
                 <a:cs typeface="Calibri" pitchFamily="34" charset="-120"/>
               </a:rPr>
-              <a:t>Hamur silgi + normal silgi + kalemtıraş</a:t>
-            </a:r>
-            <a:endParaRPr lang="en-US" sz="1350" dirty="0"/>
-          </a:p>
-          <a:p>
-            <a:pPr marL="342900" indent="-342900">
-              <a:spcAft>
-                <a:spcPts val="700"/>
-              </a:spcAft>
-              <a:buSzPct val="100000"/>
-              <a:buChar char="•"/>
-            </a:pPr>
-            <a:r>
-              <a:rPr lang="en-US" sz="1350" dirty="0">
+              <a:t>Ders, evde yapılan işin gösterildiği bir saat değil. Her hafta kalem ve defterinizle gelin, burada çizin.</a:t>
+            </a:r>
+            <a:endParaRPr lang="en-US" sz="1300" dirty="0"/>
+          </a:p>
+        </p:txBody>
+      </p:sp>
+      <p:sp>
+        <p:nvSpPr>
+          <p:cNvPr id="20" name="Shape 18"/>
+          <p:cNvSpPr/>
+          <p:nvPr/>
+        </p:nvSpPr>
+        <p:spPr>
+          <a:xfrm>
+            <a:off x="777240" y="4581144"/>
+            <a:ext cx="365760" cy="365760"/>
+          </a:xfrm>
+          <a:prstGeom prst="ellipse">
+            <a:avLst/>
+          </a:prstGeom>
+          <a:solidFill>
+            <a:srgbClr val="C9CCCE"/>
+          </a:solidFill>
+          <a:ln w="12700">
+            <a:solidFill>
+              <a:srgbClr val="C9CCCE"/>
+            </a:solidFill>
+            <a:prstDash val="solid"/>
+          </a:ln>
+        </p:spPr>
+      </p:sp>
+      <p:sp>
+        <p:nvSpPr>
+          <p:cNvPr id="21" name="Text 19"/>
+          <p:cNvSpPr txBox="1"/>
+          <p:nvPr/>
+        </p:nvSpPr>
+        <p:spPr>
+          <a:xfrm>
+            <a:off x="777240" y="4645152"/>
+            <a:ext cx="365760" cy="256032"/>
+          </a:xfrm>
+          <a:prstGeom prst="rect">
+            <a:avLst/>
+          </a:prstGeom>
+          <a:noFill/>
+          <a:ln/>
+        </p:spPr>
+        <p:txBody>
+          <a:bodyPr wrap="square" lIns="0" tIns="0" rIns="0" bIns="0" rtlCol="0" anchor="ctr"/>
+          <a:lstStyle/>
+          <a:p>
+            <a:pPr algn="ctr" indent="0" marL="0">
+              <a:buNone/>
+            </a:pPr>
+            <a:r>
+              <a:rPr lang="en-US" sz="1300" b="1" dirty="0">
+                <a:solidFill>
+                  <a:srgbClr val="1B1F24"/>
+                </a:solidFill>
+                <a:latin typeface="Courier New" pitchFamily="34" charset="0"/>
+                <a:ea typeface="Courier New" pitchFamily="34" charset="-122"/>
+                <a:cs typeface="Courier New" pitchFamily="34" charset="-120"/>
+              </a:rPr>
+              <a:t>5</a:t>
+            </a:r>
+            <a:endParaRPr lang="en-US" sz="1300" dirty="0"/>
+          </a:p>
+        </p:txBody>
+      </p:sp>
+      <p:sp>
+        <p:nvSpPr>
+          <p:cNvPr id="22" name="Text 20"/>
+          <p:cNvSpPr txBox="1"/>
+          <p:nvPr/>
+        </p:nvSpPr>
+        <p:spPr>
+          <a:xfrm>
+            <a:off x="1325880" y="4581144"/>
+            <a:ext cx="4480560" cy="320040"/>
+          </a:xfrm>
+          <a:prstGeom prst="rect">
+            <a:avLst/>
+          </a:prstGeom>
+          <a:noFill/>
+          <a:ln/>
+        </p:spPr>
+        <p:txBody>
+          <a:bodyPr wrap="square" lIns="0" tIns="0" rIns="0" bIns="0" rtlCol="0" anchor="ctr"/>
+          <a:lstStyle/>
+          <a:p>
+            <a:pPr indent="0" marL="0">
+              <a:buNone/>
+            </a:pPr>
+            <a:r>
+              <a:rPr lang="en-US" sz="1650" b="1" dirty="0">
                 <a:solidFill>
                   <a:srgbClr val="1B1F24"/>
                 </a:solidFill>
@@ -20789,32 +21269,74 @@
                 <a:ea typeface="Calibri" pitchFamily="34" charset="-122"/>
                 <a:cs typeface="Calibri" pitchFamily="34" charset="-120"/>
               </a:rPr>
-              <a:t>Kâğıt kıskacı ve A3 çizim altlığı</a:t>
-            </a:r>
-            <a:endParaRPr lang="en-US" sz="1350" dirty="0"/>
-          </a:p>
-        </p:txBody>
-      </p:sp>
-      <p:sp>
-        <p:nvSpPr>
-          <p:cNvPr id="8" name="Shape 6"/>
+              <a:t>Hiçbir sayfa atılmaz</a:t>
+            </a:r>
+            <a:endParaRPr lang="en-US" sz="1650" dirty="0"/>
+          </a:p>
+        </p:txBody>
+      </p:sp>
+      <p:sp>
+        <p:nvSpPr>
+          <p:cNvPr id="23" name="Text 21"/>
+          <p:cNvSpPr txBox="1"/>
+          <p:nvPr/>
+        </p:nvSpPr>
+        <p:spPr>
+          <a:xfrm>
+            <a:off x="1325880" y="4946904"/>
+            <a:ext cx="4526280" cy="914400"/>
+          </a:xfrm>
+          <a:prstGeom prst="rect">
+            <a:avLst/>
+          </a:prstGeom>
+          <a:noFill/>
+          <a:ln/>
+        </p:spPr>
+        <p:txBody>
+          <a:bodyPr wrap="square" lIns="0" tIns="0" rIns="0" bIns="0" rtlCol="0" anchor="ctr"/>
+          <a:lstStyle/>
+          <a:p>
+            <a:pPr indent="0" marL="0">
+              <a:lnSpc>
+                <a:spcPts val="1800"/>
+              </a:lnSpc>
+              <a:buNone/>
+            </a:pPr>
+            <a:r>
+              <a:rPr lang="en-US" sz="1300" dirty="0">
+                <a:solidFill>
+                  <a:srgbClr val="1B1F24"/>
+                </a:solidFill>
+                <a:latin typeface="Calibri" pitchFamily="34" charset="0"/>
+                <a:ea typeface="Calibri" pitchFamily="34" charset="-122"/>
+                <a:cs typeface="Calibri" pitchFamily="34" charset="-120"/>
+              </a:rPr>
+              <a:t>Denemeler, yarım kalanlar ve yeniden yapılanlar dâhil her şey dönem projesi dosyasına girer. Temiz bir dosya düşük not alır.</a:t>
+            </a:r>
+            <a:endParaRPr lang="en-US" sz="1300" dirty="0"/>
+          </a:p>
+        </p:txBody>
+      </p:sp>
+      <p:sp>
+        <p:nvSpPr>
+          <p:cNvPr id="24" name="Shape 22"/>
           <p:cNvSpPr/>
           <p:nvPr/>
         </p:nvSpPr>
         <p:spPr>
           <a:xfrm>
-            <a:off x="6263640" y="2286000"/>
-            <a:ext cx="5148072" cy="3383280"/>
-          </a:xfrm>
-          <a:prstGeom prst="rect">
+            <a:off x="6217920" y="4581144"/>
+            <a:ext cx="365760" cy="365760"/>
+          </a:xfrm>
+          <a:prstGeom prst="ellipse">
             <a:avLst/>
           </a:prstGeom>
           <a:solidFill>
-            <a:srgbClr val="F1F3F4"/>
+            <a:srgbClr val="C9CCCE"/>
           </a:solidFill>
           <a:ln w="12700">
             <a:solidFill>
-              <a:srgbClr val="F1F3F4"/>
+              <a:srgbClr val="C9CCCE"/>
             </a:solidFill>
             <a:prstDash val="solid"/>
           </a:ln>
@@ -20822,73 +21344,69 @@
       </p:sp>
       <p:sp>
         <p:nvSpPr>
-          <p:cNvPr id="9" name="Text 7"/>
-          <p:cNvSpPr txBox="1"/>
-          <p:nvPr/>
-        </p:nvSpPr>
-        <p:spPr>
-          <a:xfrm>
-            <a:off x="6611112" y="2542032"/>
-            <a:ext cx="3657600" cy="274320"/>
-          </a:xfrm>
-          <a:prstGeom prst="rect">
-            <a:avLst/>
-          </a:prstGeom>
-          <a:noFill/>
-          <a:ln/>
-        </p:spPr>
-        <p:txBody>
-          <a:bodyPr wrap="square" lIns="0" tIns="0" rIns="0" bIns="0" rtlCol="0" anchor="ctr"/>
-          <a:lstStyle/>
-          <a:p>
-            <a:pPr indent="0" marL="0">
-              <a:buNone/>
-            </a:pPr>
-            <a:r>
-              <a:rPr lang="en-US" sz="1100" spc="160" kern="0" dirty="0">
-                <a:solidFill>
-                  <a:srgbClr val="6B747C"/>
+          <p:cNvPr id="25" name="Text 23"/>
+          <p:cNvSpPr txBox="1"/>
+          <p:nvPr/>
+        </p:nvSpPr>
+        <p:spPr>
+          <a:xfrm>
+            <a:off x="6217920" y="4645152"/>
+            <a:ext cx="365760" cy="256032"/>
+          </a:xfrm>
+          <a:prstGeom prst="rect">
+            <a:avLst/>
+          </a:prstGeom>
+          <a:noFill/>
+          <a:ln/>
+        </p:spPr>
+        <p:txBody>
+          <a:bodyPr wrap="square" lIns="0" tIns="0" rIns="0" bIns="0" rtlCol="0" anchor="ctr"/>
+          <a:lstStyle/>
+          <a:p>
+            <a:pPr algn="ctr" indent="0" marL="0">
+              <a:buNone/>
+            </a:pPr>
+            <a:r>
+              <a:rPr lang="en-US" sz="1300" b="1" dirty="0">
+                <a:solidFill>
+                  <a:srgbClr val="1B1F24"/>
                 </a:solidFill>
                 <a:latin typeface="Courier New" pitchFamily="34" charset="0"/>
                 <a:ea typeface="Courier New" pitchFamily="34" charset="-122"/>
                 <a:cs typeface="Courier New" pitchFamily="34" charset="-120"/>
               </a:rPr>
-              <a:t>13. HAFTADAN İTİBAREN</a:t>
-            </a:r>
-            <a:endParaRPr lang="en-US" sz="1100" dirty="0"/>
-          </a:p>
-        </p:txBody>
-      </p:sp>
-      <p:sp>
-        <p:nvSpPr>
-          <p:cNvPr id="10" name="Text 8"/>
-          <p:cNvSpPr txBox="1"/>
-          <p:nvPr/>
-        </p:nvSpPr>
-        <p:spPr>
-          <a:xfrm>
-            <a:off x="6611112" y="2880360"/>
-            <a:ext cx="4526280" cy="2194560"/>
-          </a:xfrm>
-          <a:prstGeom prst="rect">
-            <a:avLst/>
-          </a:prstGeom>
-          <a:noFill/>
-          <a:ln/>
-        </p:spPr>
-        <p:txBody>
-          <a:bodyPr wrap="square" lIns="0" tIns="0" rIns="0" bIns="0" rtlCol="0" anchor="ctr"/>
-          <a:lstStyle/>
-          <a:p>
-            <a:pPr marL="342900" indent="-342900">
-              <a:spcAft>
-                <a:spcPts val="700"/>
-              </a:spcAft>
-              <a:buSzPct val="100000"/>
-              <a:buChar char="•"/>
-            </a:pPr>
-            <a:r>
-              <a:rPr lang="en-US" sz="1350" dirty="0">
+              <a:t>6</a:t>
+            </a:r>
+            <a:endParaRPr lang="en-US" sz="1300" dirty="0"/>
+          </a:p>
+        </p:txBody>
+      </p:sp>
+      <p:sp>
+        <p:nvSpPr>
+          <p:cNvPr id="26" name="Text 24"/>
+          <p:cNvSpPr txBox="1"/>
+          <p:nvPr/>
+        </p:nvSpPr>
+        <p:spPr>
+          <a:xfrm>
+            <a:off x="6766560" y="4581144"/>
+            <a:ext cx="4480560" cy="320040"/>
+          </a:xfrm>
+          <a:prstGeom prst="rect">
+            <a:avLst/>
+          </a:prstGeom>
+          <a:noFill/>
+          <a:ln/>
+        </p:spPr>
+        <p:txBody>
+          <a:bodyPr wrap="square" lIns="0" tIns="0" rIns="0" bIns="0" rtlCol="0" anchor="ctr"/>
+          <a:lstStyle/>
+          <a:p>
+            <a:pPr indent="0" marL="0">
+              <a:buNone/>
+            </a:pPr>
+            <a:r>
+              <a:rPr lang="en-US" sz="1650" b="1" dirty="0">
                 <a:solidFill>
                   <a:srgbClr val="1B1F24"/>
                 </a:solidFill>
@@ -20896,20 +21414,41 @@
                 <a:ea typeface="Calibri" pitchFamily="34" charset="-122"/>
                 <a:cs typeface="Calibri" pitchFamily="34" charset="-120"/>
               </a:rPr>
-              <a:t>Kuru boya seti — en az 24 renk; tek renk ailesinde 5 ton bulunacak şekilde</a:t>
-            </a:r>
-            <a:endParaRPr lang="en-US" sz="1350" dirty="0"/>
-          </a:p>
-          <a:p>
-            <a:pPr marL="342900" indent="-342900">
-              <a:spcAft>
-                <a:spcPts val="700"/>
-              </a:spcAft>
-              <a:buSzPct val="100000"/>
-              <a:buChar char="•"/>
-            </a:pPr>
-            <a:r>
-              <a:rPr lang="en-US" sz="1350" dirty="0">
+              <a:t>Teslim çift kanaldan</a:t>
+            </a:r>
+            <a:endParaRPr lang="en-US" sz="1650" dirty="0"/>
+          </a:p>
+        </p:txBody>
+      </p:sp>
+      <p:sp>
+        <p:nvSpPr>
+          <p:cNvPr id="27" name="Text 25"/>
+          <p:cNvSpPr txBox="1"/>
+          <p:nvPr/>
+        </p:nvSpPr>
+        <p:spPr>
+          <a:xfrm>
+            <a:off x="6766560" y="4946904"/>
+            <a:ext cx="4526280" cy="914400"/>
+          </a:xfrm>
+          <a:prstGeom prst="rect">
+            <a:avLst/>
+          </a:prstGeom>
+          <a:noFill/>
+          <a:ln/>
+        </p:spPr>
+        <p:txBody>
+          <a:bodyPr wrap="square" lIns="0" tIns="0" rIns="0" bIns="0" rtlCol="0" anchor="ctr"/>
+          <a:lstStyle/>
+          <a:p>
+            <a:pPr indent="0" marL="0">
+              <a:lnSpc>
+                <a:spcPts val="1800"/>
+              </a:lnSpc>
+              <a:buNone/>
+            </a:pPr>
+            <a:r>
+              <a:rPr lang="en-US" sz="1300" dirty="0">
                 <a:solidFill>
                   <a:srgbClr val="1B1F24"/>
                 </a:solidFill>
@@ -20917,114 +21456,48 @@
                 <a:ea typeface="Calibri" pitchFamily="34" charset="-122"/>
                 <a:cs typeface="Calibri" pitchFamily="34" charset="-120"/>
               </a:rPr>
-              <a:t>Renksiz burnishing kalemi (varsa)</a:t>
-            </a:r>
-            <a:endParaRPr lang="en-US" sz="1350" dirty="0"/>
-          </a:p>
-          <a:p>
-            <a:pPr marL="342900" indent="-342900">
-              <a:spcAft>
-                <a:spcPts val="700"/>
-              </a:spcAft>
-              <a:buSzPct val="100000"/>
-              <a:buChar char="•"/>
-            </a:pPr>
-            <a:r>
-              <a:rPr lang="en-US" sz="1350" dirty="0">
-                <a:solidFill>
-                  <a:srgbClr val="1B1F24"/>
+              <a:t>Her teslim hem fiziksel olarak derse getirilir hem de ders platformuna yüklenir. E-posta ile ödev kabul edilmez.</a:t>
+            </a:r>
+            <a:endParaRPr lang="en-US" sz="1300" dirty="0"/>
+          </a:p>
+        </p:txBody>
+      </p:sp>
+      <p:sp>
+        <p:nvSpPr>
+          <p:cNvPr id="28" name="Text 26"/>
+          <p:cNvSpPr txBox="1"/>
+          <p:nvPr/>
+        </p:nvSpPr>
+        <p:spPr>
+          <a:xfrm>
+            <a:off x="777240" y="6035040"/>
+            <a:ext cx="10634472" cy="320040"/>
+          </a:xfrm>
+          <a:prstGeom prst="rect">
+            <a:avLst/>
+          </a:prstGeom>
+          <a:noFill/>
+          <a:ln/>
+        </p:spPr>
+        <p:txBody>
+          <a:bodyPr wrap="square" lIns="0" tIns="0" rIns="0" bIns="0" rtlCol="0" anchor="ctr"/>
+          <a:lstStyle/>
+          <a:p>
+            <a:pPr indent="0" marL="0">
+              <a:buNone/>
+            </a:pPr>
+            <a:r>
+              <a:rPr lang="en-US" sz="1350" i="1" dirty="0">
+                <a:solidFill>
+                  <a:srgbClr val="6B747C"/>
                 </a:solidFill>
                 <a:latin typeface="Calibri" pitchFamily="34" charset="0"/>
                 <a:ea typeface="Calibri" pitchFamily="34" charset="-122"/>
                 <a:cs typeface="Calibri" pitchFamily="34" charset="-120"/>
               </a:rPr>
-              <a:t>Fon kartonu 160–200 gsm</a:t>
+              <a:t>Telefonlar ders başlamadan sessize alınır. Tablet ve dizüstü yalnızca ders amacıyla kullanılabilir.</a:t>
             </a:r>
             <a:endParaRPr lang="en-US" sz="1350" dirty="0"/>
-          </a:p>
-          <a:p>
-            <a:pPr marL="342900" indent="-342900">
-              <a:spcAft>
-                <a:spcPts val="700"/>
-              </a:spcAft>
-              <a:buSzPct val="100000"/>
-              <a:buChar char="•"/>
-            </a:pPr>
-            <a:r>
-              <a:rPr lang="en-US" sz="1350" dirty="0">
-                <a:solidFill>
-                  <a:srgbClr val="1B1F24"/>
-                </a:solidFill>
-                <a:latin typeface="Calibri" pitchFamily="34" charset="0"/>
-                <a:ea typeface="Calibri" pitchFamily="34" charset="-122"/>
-                <a:cs typeface="Calibri" pitchFamily="34" charset="-120"/>
-              </a:rPr>
-              <a:t>Köpüklü çift taraflı bant</a:t>
-            </a:r>
-            <a:endParaRPr lang="en-US" sz="1350" dirty="0"/>
-          </a:p>
-          <a:p>
-            <a:pPr marL="342900" indent="-342900">
-              <a:spcAft>
-                <a:spcPts val="700"/>
-              </a:spcAft>
-              <a:buSzPct val="100000"/>
-              <a:buChar char="•"/>
-            </a:pPr>
-            <a:r>
-              <a:rPr lang="en-US" sz="1350" dirty="0">
-                <a:solidFill>
-                  <a:srgbClr val="1B1F24"/>
-                </a:solidFill>
-                <a:latin typeface="Calibri" pitchFamily="34" charset="0"/>
-                <a:ea typeface="Calibri" pitchFamily="34" charset="-122"/>
-                <a:cs typeface="Calibri" pitchFamily="34" charset="-120"/>
-              </a:rPr>
-              <a:t>Maket bıçağı + kesim altlığı</a:t>
-            </a:r>
-            <a:endParaRPr lang="en-US" sz="1350" dirty="0"/>
-          </a:p>
-        </p:txBody>
-      </p:sp>
-      <p:sp>
-        <p:nvSpPr>
-          <p:cNvPr id="11" name="Text 9"/>
-          <p:cNvSpPr txBox="1"/>
-          <p:nvPr/>
-        </p:nvSpPr>
-        <p:spPr>
-          <a:xfrm>
-            <a:off x="6611112" y="5166360"/>
-            <a:ext cx="4526280" cy="457200"/>
-          </a:xfrm>
-          <a:prstGeom prst="rect">
-            <a:avLst/>
-          </a:prstGeom>
-          <a:noFill/>
-          <a:ln/>
-        </p:spPr>
-        <p:txBody>
-          <a:bodyPr wrap="square" lIns="0" tIns="0" rIns="0" bIns="0" rtlCol="0" anchor="ctr"/>
-          <a:lstStyle/>
-          <a:p>
-            <a:pPr indent="0" marL="0">
-              <a:lnSpc>
-                <a:spcPts val="1700"/>
-              </a:lnSpc>
-              <a:buNone/>
-            </a:pPr>
-            <a:r>
-              <a:rPr lang="en-US" sz="1250" i="1" dirty="0">
-                <a:solidFill>
-                  <a:srgbClr val="6B747C"/>
-                </a:solidFill>
-                <a:latin typeface="Calibri" pitchFamily="34" charset="0"/>
-                <a:ea typeface="Calibri" pitchFamily="34" charset="-122"/>
-                <a:cs typeface="Calibri" pitchFamily="34" charset="-120"/>
-              </a:rPr>
-              <a:t>Bunları 12. haftada ayrıca hatırlatacağım — şimdi almanıza gerek yok.</a:t>
-            </a:r>
-            <a:endParaRPr lang="en-US" sz="1250" dirty="0"/>
           </a:p>
         </p:txBody>
       </p:sp>
@@ -21039,6 +21512,644 @@
 <file path=ppt/slides/slide32.xml><?xml version="1.0" encoding="utf-8"?>
 <p:sld xmlns:a="http://schemas.openxmlformats.org/drawingml/2006/main" xmlns:r="http://schemas.openxmlformats.org/officeDocument/2006/relationships" xmlns:p="http://schemas.openxmlformats.org/presentationml/2006/main">
   <p:cSld name="Slide 32">
+    <p:bg>
+      <p:bgPr>
+        <a:solidFill>
+          <a:srgbClr val="FFFFFF"/>
+        </a:solidFill>
+      </p:bgPr>
+    </p:bg>
+    <p:spTree>
+      <p:nvGrpSpPr>
+        <p:cNvPr id="1" name=""/>
+        <p:cNvGrpSpPr/>
+        <p:nvPr/>
+      </p:nvGrpSpPr>
+      <p:grpSpPr>
+        <a:xfrm>
+          <a:off x="0" y="0"/>
+          <a:ext cx="0" cy="0"/>
+          <a:chOff x="0" y="0"/>
+          <a:chExt cx="0" cy="0"/>
+        </a:xfrm>
+      </p:grpSpPr>
+      <p:sp>
+        <p:nvSpPr>
+          <p:cNvPr id="2" name="Text 0"/>
+          <p:cNvSpPr txBox="1"/>
+          <p:nvPr/>
+        </p:nvSpPr>
+        <p:spPr>
+          <a:xfrm>
+            <a:off x="777240" y="475488"/>
+            <a:ext cx="10634472" cy="274320"/>
+          </a:xfrm>
+          <a:prstGeom prst="rect">
+            <a:avLst/>
+          </a:prstGeom>
+          <a:noFill/>
+          <a:ln/>
+        </p:spPr>
+        <p:txBody>
+          <a:bodyPr wrap="square" lIns="0" tIns="0" rIns="0" bIns="0" rtlCol="0" anchor="ctr"/>
+          <a:lstStyle/>
+          <a:p>
+            <a:pPr indent="0" marL="0">
+              <a:buNone/>
+            </a:pPr>
+            <a:r>
+              <a:rPr lang="en-US" sz="1100" spc="160" kern="0" dirty="0">
+                <a:solidFill>
+                  <a:srgbClr val="6B747C"/>
+                </a:solidFill>
+                <a:latin typeface="Courier New" pitchFamily="34" charset="0"/>
+                <a:ea typeface="Courier New" pitchFamily="34" charset="-122"/>
+                <a:cs typeface="Courier New" pitchFamily="34" charset="-120"/>
+              </a:rPr>
+              <a:t>BÖLÜM 5 · KURALLAR</a:t>
+            </a:r>
+            <a:endParaRPr lang="en-US" sz="1100" dirty="0"/>
+          </a:p>
+        </p:txBody>
+      </p:sp>
+      <p:sp>
+        <p:nvSpPr>
+          <p:cNvPr id="3" name="Text 1"/>
+          <p:cNvSpPr txBox="1"/>
+          <p:nvPr/>
+        </p:nvSpPr>
+        <p:spPr>
+          <a:xfrm>
+            <a:off x="777240" y="868680"/>
+            <a:ext cx="10634472" cy="914400"/>
+          </a:xfrm>
+          <a:prstGeom prst="rect">
+            <a:avLst/>
+          </a:prstGeom>
+          <a:noFill/>
+          <a:ln/>
+        </p:spPr>
+        <p:txBody>
+          <a:bodyPr wrap="square" lIns="0" tIns="0" rIns="0" bIns="0" rtlCol="0" anchor="ctr"/>
+          <a:lstStyle/>
+          <a:p>
+            <a:pPr indent="0" marL="0">
+              <a:lnSpc>
+                <a:spcPts val="3800"/>
+              </a:lnSpc>
+              <a:buNone/>
+            </a:pPr>
+            <a:r>
+              <a:rPr lang="en-US" sz="3400" b="1" dirty="0">
+                <a:solidFill>
+                  <a:srgbClr val="1B1F24"/>
+                </a:solidFill>
+                <a:latin typeface="Century Schoolbook" pitchFamily="34" charset="0"/>
+                <a:ea typeface="Century Schoolbook" pitchFamily="34" charset="-122"/>
+                <a:cs typeface="Century Schoolbook" pitchFamily="34" charset="-120"/>
+              </a:rPr>
+              <a:t>Malzeme listesi</a:t>
+            </a:r>
+            <a:endParaRPr lang="en-US" sz="3400" dirty="0"/>
+          </a:p>
+        </p:txBody>
+      </p:sp>
+      <p:sp>
+        <p:nvSpPr>
+          <p:cNvPr id="4" name="Text 2"/>
+          <p:cNvSpPr txBox="1"/>
+          <p:nvPr/>
+        </p:nvSpPr>
+        <p:spPr>
+          <a:xfrm>
+            <a:off x="777240" y="1755648"/>
+            <a:ext cx="10634472" cy="502920"/>
+          </a:xfrm>
+          <a:prstGeom prst="rect">
+            <a:avLst/>
+          </a:prstGeom>
+          <a:noFill/>
+          <a:ln/>
+        </p:spPr>
+        <p:txBody>
+          <a:bodyPr wrap="square" lIns="0" tIns="0" rIns="0" bIns="0" rtlCol="0" anchor="ctr"/>
+          <a:lstStyle/>
+          <a:p>
+            <a:pPr indent="0" marL="0">
+              <a:buNone/>
+            </a:pPr>
+            <a:r>
+              <a:rPr lang="en-US" sz="1500" dirty="0">
+                <a:solidFill>
+                  <a:srgbClr val="6B747C"/>
+                </a:solidFill>
+                <a:latin typeface="Calibri" pitchFamily="34" charset="0"/>
+                <a:ea typeface="Calibri" pitchFamily="34" charset="-122"/>
+                <a:cs typeface="Calibri" pitchFamily="34" charset="-120"/>
+              </a:rPr>
+              <a:t>Gelecek haftaya kadar temin edilmeli. İlk beş hafta tek bir 2B kalem ve defterle de geçilebilir — kimse malzeme yüzünden geri kalmasın.</a:t>
+            </a:r>
+            <a:endParaRPr lang="en-US" sz="1500" dirty="0"/>
+          </a:p>
+        </p:txBody>
+      </p:sp>
+      <p:sp>
+        <p:nvSpPr>
+          <p:cNvPr id="5" name="Shape 3"/>
+          <p:cNvSpPr/>
+          <p:nvPr/>
+        </p:nvSpPr>
+        <p:spPr>
+          <a:xfrm>
+            <a:off x="777240" y="2286000"/>
+            <a:ext cx="5148072" cy="3383280"/>
+          </a:xfrm>
+          <a:prstGeom prst="rect">
+            <a:avLst/>
+          </a:prstGeom>
+          <a:solidFill>
+            <a:srgbClr val="F1F3F4"/>
+          </a:solidFill>
+          <a:ln w="12700">
+            <a:solidFill>
+              <a:srgbClr val="F1F3F4"/>
+            </a:solidFill>
+            <a:prstDash val="solid"/>
+          </a:ln>
+        </p:spPr>
+      </p:sp>
+      <p:sp>
+        <p:nvSpPr>
+          <p:cNvPr id="6" name="Text 4"/>
+          <p:cNvSpPr txBox="1"/>
+          <p:nvPr/>
+        </p:nvSpPr>
+        <p:spPr>
+          <a:xfrm>
+            <a:off x="1124712" y="2542032"/>
+            <a:ext cx="2743200" cy="274320"/>
+          </a:xfrm>
+          <a:prstGeom prst="rect">
+            <a:avLst/>
+          </a:prstGeom>
+          <a:noFill/>
+          <a:ln/>
+        </p:spPr>
+        <p:txBody>
+          <a:bodyPr wrap="square" lIns="0" tIns="0" rIns="0" bIns="0" rtlCol="0" anchor="ctr"/>
+          <a:lstStyle/>
+          <a:p>
+            <a:pPr indent="0" marL="0">
+              <a:buNone/>
+            </a:pPr>
+            <a:r>
+              <a:rPr lang="en-US" sz="1100" spc="160" kern="0" dirty="0">
+                <a:solidFill>
+                  <a:srgbClr val="2A6289"/>
+                </a:solidFill>
+                <a:latin typeface="Courier New" pitchFamily="34" charset="0"/>
+                <a:ea typeface="Courier New" pitchFamily="34" charset="-122"/>
+                <a:cs typeface="Courier New" pitchFamily="34" charset="-120"/>
+              </a:rPr>
+              <a:t>ZORUNLU</a:t>
+            </a:r>
+            <a:endParaRPr lang="en-US" sz="1100" dirty="0"/>
+          </a:p>
+        </p:txBody>
+      </p:sp>
+      <p:sp>
+        <p:nvSpPr>
+          <p:cNvPr id="7" name="Text 5"/>
+          <p:cNvSpPr txBox="1"/>
+          <p:nvPr/>
+        </p:nvSpPr>
+        <p:spPr>
+          <a:xfrm>
+            <a:off x="1124712" y="2880360"/>
+            <a:ext cx="4526280" cy="2606040"/>
+          </a:xfrm>
+          <a:prstGeom prst="rect">
+            <a:avLst/>
+          </a:prstGeom>
+          <a:noFill/>
+          <a:ln/>
+        </p:spPr>
+        <p:txBody>
+          <a:bodyPr wrap="square" lIns="0" tIns="0" rIns="0" bIns="0" rtlCol="0" anchor="ctr"/>
+          <a:lstStyle/>
+          <a:p>
+            <a:pPr marL="342900" indent="-342900">
+              <a:spcAft>
+                <a:spcPts val="700"/>
+              </a:spcAft>
+              <a:buSzPct val="100000"/>
+              <a:buChar char="•"/>
+            </a:pPr>
+            <a:r>
+              <a:rPr lang="en-US" sz="1350" dirty="0">
+                <a:solidFill>
+                  <a:srgbClr val="1B1F24"/>
+                </a:solidFill>
+                <a:latin typeface="Calibri" pitchFamily="34" charset="0"/>
+                <a:ea typeface="Calibri" pitchFamily="34" charset="-122"/>
+                <a:cs typeface="Calibri" pitchFamily="34" charset="-120"/>
+              </a:rPr>
+              <a:t>A4 dikişli eskiz defteri + A3 eskiz bloğu</a:t>
+            </a:r>
+            <a:endParaRPr lang="en-US" sz="1350" dirty="0"/>
+          </a:p>
+          <a:p>
+            <a:pPr marL="342900" indent="-342900">
+              <a:spcAft>
+                <a:spcPts val="700"/>
+              </a:spcAft>
+              <a:buSzPct val="100000"/>
+              <a:buChar char="•"/>
+            </a:pPr>
+            <a:r>
+              <a:rPr lang="en-US" sz="1350" dirty="0">
+                <a:solidFill>
+                  <a:srgbClr val="1B1F24"/>
+                </a:solidFill>
+                <a:latin typeface="Calibri" pitchFamily="34" charset="0"/>
+                <a:ea typeface="Calibri" pitchFamily="34" charset="-122"/>
+                <a:cs typeface="Calibri" pitchFamily="34" charset="-120"/>
+              </a:rPr>
+              <a:t>Kurşun kalem: 2H, HB, 2B, 4B, 6B</a:t>
+            </a:r>
+            <a:endParaRPr lang="en-US" sz="1350" dirty="0"/>
+          </a:p>
+          <a:p>
+            <a:pPr marL="342900" indent="-342900">
+              <a:spcAft>
+                <a:spcPts val="700"/>
+              </a:spcAft>
+              <a:buSzPct val="100000"/>
+              <a:buChar char="•"/>
+            </a:pPr>
+            <a:r>
+              <a:rPr lang="en-US" sz="1350" dirty="0">
+                <a:solidFill>
+                  <a:srgbClr val="1B1F24"/>
+                </a:solidFill>
+                <a:latin typeface="Calibri" pitchFamily="34" charset="0"/>
+                <a:ea typeface="Calibri" pitchFamily="34" charset="-122"/>
+                <a:cs typeface="Calibri" pitchFamily="34" charset="-120"/>
+              </a:rPr>
+              <a:t>İnce kömür kalem + kömür çubuk</a:t>
+            </a:r>
+            <a:endParaRPr lang="en-US" sz="1350" dirty="0"/>
+          </a:p>
+          <a:p>
+            <a:pPr marL="342900" indent="-342900">
+              <a:spcAft>
+                <a:spcPts val="700"/>
+              </a:spcAft>
+              <a:buSzPct val="100000"/>
+              <a:buChar char="•"/>
+            </a:pPr>
+            <a:r>
+              <a:rPr lang="en-US" sz="1350" dirty="0">
+                <a:solidFill>
+                  <a:srgbClr val="1B1F24"/>
+                </a:solidFill>
+                <a:latin typeface="Calibri" pitchFamily="34" charset="0"/>
+                <a:ea typeface="Calibri" pitchFamily="34" charset="-122"/>
+                <a:cs typeface="Calibri" pitchFamily="34" charset="-120"/>
+              </a:rPr>
+              <a:t>Fineliner 0.1 / 0.3 / 0.5, siyah</a:t>
+            </a:r>
+            <a:endParaRPr lang="en-US" sz="1350" dirty="0"/>
+          </a:p>
+          <a:p>
+            <a:pPr marL="342900" indent="-342900">
+              <a:spcAft>
+                <a:spcPts val="700"/>
+              </a:spcAft>
+              <a:buSzPct val="100000"/>
+              <a:buChar char="•"/>
+            </a:pPr>
+            <a:r>
+              <a:rPr lang="en-US" sz="1350" dirty="0">
+                <a:solidFill>
+                  <a:srgbClr val="1B1F24"/>
+                </a:solidFill>
+                <a:latin typeface="Calibri" pitchFamily="34" charset="0"/>
+                <a:ea typeface="Calibri" pitchFamily="34" charset="-122"/>
+                <a:cs typeface="Calibri" pitchFamily="34" charset="-120"/>
+              </a:rPr>
+              <a:t>Gri marker seti, 3 ton</a:t>
+            </a:r>
+            <a:endParaRPr lang="en-US" sz="1350" dirty="0"/>
+          </a:p>
+          <a:p>
+            <a:pPr marL="342900" indent="-342900">
+              <a:spcAft>
+                <a:spcPts val="700"/>
+              </a:spcAft>
+              <a:buSzPct val="100000"/>
+              <a:buChar char="•"/>
+            </a:pPr>
+            <a:r>
+              <a:rPr lang="en-US" sz="1350" dirty="0">
+                <a:solidFill>
+                  <a:srgbClr val="1B1F24"/>
+                </a:solidFill>
+                <a:latin typeface="Calibri" pitchFamily="34" charset="0"/>
+                <a:ea typeface="Calibri" pitchFamily="34" charset="-122"/>
+                <a:cs typeface="Calibri" pitchFamily="34" charset="-120"/>
+              </a:rPr>
+              <a:t>Hamur silgi + normal silgi + kalemtıraş</a:t>
+            </a:r>
+            <a:endParaRPr lang="en-US" sz="1350" dirty="0"/>
+          </a:p>
+          <a:p>
+            <a:pPr marL="342900" indent="-342900">
+              <a:spcAft>
+                <a:spcPts val="700"/>
+              </a:spcAft>
+              <a:buSzPct val="100000"/>
+              <a:buChar char="•"/>
+            </a:pPr>
+            <a:r>
+              <a:rPr lang="en-US" sz="1350" dirty="0">
+                <a:solidFill>
+                  <a:srgbClr val="1B1F24"/>
+                </a:solidFill>
+                <a:latin typeface="Calibri" pitchFamily="34" charset="0"/>
+                <a:ea typeface="Calibri" pitchFamily="34" charset="-122"/>
+                <a:cs typeface="Calibri" pitchFamily="34" charset="-120"/>
+              </a:rPr>
+              <a:t>Kâğıt kıskacı ve A3 çizim altlığı</a:t>
+            </a:r>
+            <a:endParaRPr lang="en-US" sz="1350" dirty="0"/>
+          </a:p>
+        </p:txBody>
+      </p:sp>
+      <p:sp>
+        <p:nvSpPr>
+          <p:cNvPr id="8" name="Shape 6"/>
+          <p:cNvSpPr/>
+          <p:nvPr/>
+        </p:nvSpPr>
+        <p:spPr>
+          <a:xfrm>
+            <a:off x="6263640" y="2286000"/>
+            <a:ext cx="5148072" cy="3383280"/>
+          </a:xfrm>
+          <a:prstGeom prst="rect">
+            <a:avLst/>
+          </a:prstGeom>
+          <a:solidFill>
+            <a:srgbClr val="F1F3F4"/>
+          </a:solidFill>
+          <a:ln w="12700">
+            <a:solidFill>
+              <a:srgbClr val="F1F3F4"/>
+            </a:solidFill>
+            <a:prstDash val="solid"/>
+          </a:ln>
+        </p:spPr>
+      </p:sp>
+      <p:sp>
+        <p:nvSpPr>
+          <p:cNvPr id="9" name="Text 7"/>
+          <p:cNvSpPr txBox="1"/>
+          <p:nvPr/>
+        </p:nvSpPr>
+        <p:spPr>
+          <a:xfrm>
+            <a:off x="6611112" y="2542032"/>
+            <a:ext cx="3657600" cy="274320"/>
+          </a:xfrm>
+          <a:prstGeom prst="rect">
+            <a:avLst/>
+          </a:prstGeom>
+          <a:noFill/>
+          <a:ln/>
+        </p:spPr>
+        <p:txBody>
+          <a:bodyPr wrap="square" lIns="0" tIns="0" rIns="0" bIns="0" rtlCol="0" anchor="ctr"/>
+          <a:lstStyle/>
+          <a:p>
+            <a:pPr indent="0" marL="0">
+              <a:buNone/>
+            </a:pPr>
+            <a:r>
+              <a:rPr lang="en-US" sz="1100" spc="160" kern="0" dirty="0">
+                <a:solidFill>
+                  <a:srgbClr val="6B747C"/>
+                </a:solidFill>
+                <a:latin typeface="Courier New" pitchFamily="34" charset="0"/>
+                <a:ea typeface="Courier New" pitchFamily="34" charset="-122"/>
+                <a:cs typeface="Courier New" pitchFamily="34" charset="-120"/>
+              </a:rPr>
+              <a:t>13. HAFTADAN İTİBAREN</a:t>
+            </a:r>
+            <a:endParaRPr lang="en-US" sz="1100" dirty="0"/>
+          </a:p>
+        </p:txBody>
+      </p:sp>
+      <p:sp>
+        <p:nvSpPr>
+          <p:cNvPr id="10" name="Text 8"/>
+          <p:cNvSpPr txBox="1"/>
+          <p:nvPr/>
+        </p:nvSpPr>
+        <p:spPr>
+          <a:xfrm>
+            <a:off x="6611112" y="2880360"/>
+            <a:ext cx="4526280" cy="2194560"/>
+          </a:xfrm>
+          <a:prstGeom prst="rect">
+            <a:avLst/>
+          </a:prstGeom>
+          <a:noFill/>
+          <a:ln/>
+        </p:spPr>
+        <p:txBody>
+          <a:bodyPr wrap="square" lIns="0" tIns="0" rIns="0" bIns="0" rtlCol="0" anchor="ctr"/>
+          <a:lstStyle/>
+          <a:p>
+            <a:pPr marL="342900" indent="-342900">
+              <a:spcAft>
+                <a:spcPts val="700"/>
+              </a:spcAft>
+              <a:buSzPct val="100000"/>
+              <a:buChar char="•"/>
+            </a:pPr>
+            <a:r>
+              <a:rPr lang="en-US" sz="1350" dirty="0">
+                <a:solidFill>
+                  <a:srgbClr val="1B1F24"/>
+                </a:solidFill>
+                <a:latin typeface="Calibri" pitchFamily="34" charset="0"/>
+                <a:ea typeface="Calibri" pitchFamily="34" charset="-122"/>
+                <a:cs typeface="Calibri" pitchFamily="34" charset="-120"/>
+              </a:rPr>
+              <a:t>Kuru boya seti — en az 24 renk; tek renk ailesinde 5 ton bulunacak şekilde</a:t>
+            </a:r>
+            <a:endParaRPr lang="en-US" sz="1350" dirty="0"/>
+          </a:p>
+          <a:p>
+            <a:pPr marL="342900" indent="-342900">
+              <a:spcAft>
+                <a:spcPts val="700"/>
+              </a:spcAft>
+              <a:buSzPct val="100000"/>
+              <a:buChar char="•"/>
+            </a:pPr>
+            <a:r>
+              <a:rPr lang="en-US" sz="1350" dirty="0">
+                <a:solidFill>
+                  <a:srgbClr val="1B1F24"/>
+                </a:solidFill>
+                <a:latin typeface="Calibri" pitchFamily="34" charset="0"/>
+                <a:ea typeface="Calibri" pitchFamily="34" charset="-122"/>
+                <a:cs typeface="Calibri" pitchFamily="34" charset="-120"/>
+              </a:rPr>
+              <a:t>Renksiz burnishing kalemi (varsa)</a:t>
+            </a:r>
+            <a:endParaRPr lang="en-US" sz="1350" dirty="0"/>
+          </a:p>
+          <a:p>
+            <a:pPr marL="342900" indent="-342900">
+              <a:spcAft>
+                <a:spcPts val="700"/>
+              </a:spcAft>
+              <a:buSzPct val="100000"/>
+              <a:buChar char="•"/>
+            </a:pPr>
+            <a:r>
+              <a:rPr lang="en-US" sz="1350" dirty="0">
+                <a:solidFill>
+                  <a:srgbClr val="1B1F24"/>
+                </a:solidFill>
+                <a:latin typeface="Calibri" pitchFamily="34" charset="0"/>
+                <a:ea typeface="Calibri" pitchFamily="34" charset="-122"/>
+                <a:cs typeface="Calibri" pitchFamily="34" charset="-120"/>
+              </a:rPr>
+              <a:t>Fon kartonu 160–200 gsm</a:t>
+            </a:r>
+            <a:endParaRPr lang="en-US" sz="1350" dirty="0"/>
+          </a:p>
+          <a:p>
+            <a:pPr marL="342900" indent="-342900">
+              <a:spcAft>
+                <a:spcPts val="700"/>
+              </a:spcAft>
+              <a:buSzPct val="100000"/>
+              <a:buChar char="•"/>
+            </a:pPr>
+            <a:r>
+              <a:rPr lang="en-US" sz="1350" dirty="0">
+                <a:solidFill>
+                  <a:srgbClr val="1B1F24"/>
+                </a:solidFill>
+                <a:latin typeface="Calibri" pitchFamily="34" charset="0"/>
+                <a:ea typeface="Calibri" pitchFamily="34" charset="-122"/>
+                <a:cs typeface="Calibri" pitchFamily="34" charset="-120"/>
+              </a:rPr>
+              <a:t>Köpüklü çift taraflı bant</a:t>
+            </a:r>
+            <a:endParaRPr lang="en-US" sz="1350" dirty="0"/>
+          </a:p>
+          <a:p>
+            <a:pPr marL="342900" indent="-342900">
+              <a:spcAft>
+                <a:spcPts val="700"/>
+              </a:spcAft>
+              <a:buSzPct val="100000"/>
+              <a:buChar char="•"/>
+            </a:pPr>
+            <a:r>
+              <a:rPr lang="en-US" sz="1350" dirty="0">
+                <a:solidFill>
+                  <a:srgbClr val="1B1F24"/>
+                </a:solidFill>
+                <a:latin typeface="Calibri" pitchFamily="34" charset="0"/>
+                <a:ea typeface="Calibri" pitchFamily="34" charset="-122"/>
+                <a:cs typeface="Calibri" pitchFamily="34" charset="-120"/>
+              </a:rPr>
+              <a:t>Maket bıçağı + kesim altlığı</a:t>
+            </a:r>
+            <a:endParaRPr lang="en-US" sz="1350" dirty="0"/>
+          </a:p>
+        </p:txBody>
+      </p:sp>
+      <p:sp>
+        <p:nvSpPr>
+          <p:cNvPr id="11" name="Text 9"/>
+          <p:cNvSpPr txBox="1"/>
+          <p:nvPr/>
+        </p:nvSpPr>
+        <p:spPr>
+          <a:xfrm>
+            <a:off x="6611112" y="5212080"/>
+            <a:ext cx="4526280" cy="548640"/>
+          </a:xfrm>
+          <a:prstGeom prst="rect">
+            <a:avLst/>
+          </a:prstGeom>
+          <a:noFill/>
+          <a:ln/>
+        </p:spPr>
+        <p:txBody>
+          <a:bodyPr wrap="square" lIns="0" tIns="0" rIns="0" bIns="0" rtlCol="0" anchor="ctr"/>
+          <a:lstStyle/>
+          <a:p>
+            <a:pPr indent="0" marL="0">
+              <a:lnSpc>
+                <a:spcPts val="1700"/>
+              </a:lnSpc>
+              <a:buNone/>
+            </a:pPr>
+            <a:r>
+              <a:rPr lang="en-US" sz="1250" i="1" dirty="0">
+                <a:solidFill>
+                  <a:srgbClr val="6B747C"/>
+                </a:solidFill>
+                <a:latin typeface="Calibri" pitchFamily="34" charset="0"/>
+                <a:ea typeface="Calibri" pitchFamily="34" charset="-122"/>
+                <a:cs typeface="Calibri" pitchFamily="34" charset="-120"/>
+              </a:rPr>
+              <a:t>Bunları 12. haftada hatırlatacağım.</a:t>
+            </a:r>
+            <a:endParaRPr lang="en-US" sz="1250" dirty="0"/>
+          </a:p>
+          <a:p>
+            <a:pPr indent="0" marL="0">
+              <a:lnSpc>
+                <a:spcPts val="1700"/>
+              </a:lnSpc>
+              <a:buNone/>
+            </a:pPr>
+            <a:r>
+              <a:rPr lang="en-US" sz="1250" i="1" dirty="0">
+                <a:solidFill>
+                  <a:srgbClr val="6B747C"/>
+                </a:solidFill>
+                <a:latin typeface="Calibri" pitchFamily="34" charset="0"/>
+                <a:ea typeface="Calibri" pitchFamily="34" charset="-122"/>
+                <a:cs typeface="Calibri" pitchFamily="34" charset="-120"/>
+              </a:rPr>
+              <a:t>Bugün için tek bir kurşun kalem yeterli.</a:t>
+            </a:r>
+            <a:endParaRPr lang="en-US" sz="1250" dirty="0"/>
+          </a:p>
+        </p:txBody>
+      </p:sp>
+    </p:spTree>
+  </p:cSld>
+  <p:clrMapOvr>
+    <a:masterClrMapping/>
+  </p:clrMapOvr>
+</p:sld>
+</file>
+
+<file path=ppt/slides/slide33.xml><?xml version="1.0" encoding="utf-8"?>
+<p:sld xmlns:a="http://schemas.openxmlformats.org/drawingml/2006/main" xmlns:r="http://schemas.openxmlformats.org/officeDocument/2006/relationships" xmlns:p="http://schemas.openxmlformats.org/presentationml/2006/main">
+  <p:cSld name="Slide 33">
     <p:bg>
       <p:bgPr>
         <a:solidFill>
@@ -21208,9 +22319,9 @@
 </p:sld>
 </file>
 
-<file path=ppt/slides/slide33.xml><?xml version="1.0" encoding="utf-8"?>
+<file path=ppt/slides/slide34.xml><?xml version="1.0" encoding="utf-8"?>
 <p:sld xmlns:a="http://schemas.openxmlformats.org/drawingml/2006/main" xmlns:r="http://schemas.openxmlformats.org/officeDocument/2006/relationships" xmlns:p="http://schemas.openxmlformats.org/presentationml/2006/main">
-  <p:cSld name="Slide 33">
+  <p:cSld name="Slide 34">
     <p:bg>
       <p:bgPr>
         <a:solidFill>
@@ -21307,7 +22418,7 @@
                 <a:ea typeface="Century Schoolbook" pitchFamily="34" charset="-122"/>
                 <a:cs typeface="Century Schoolbook" pitchFamily="34" charset="-120"/>
               </a:rPr>
-              <a:t>Dışarı çıkıyoruz</a:t>
+              <a:t>Ustaların çizgileri</a:t>
             </a:r>
             <a:endParaRPr lang="en-US" sz="3400" dirty="0"/>
           </a:p>
@@ -21346,7 +22457,7 @@
                 <a:ea typeface="Century Schoolbook" pitchFamily="34" charset="-122"/>
                 <a:cs typeface="Century Schoolbook" pitchFamily="34" charset="-120"/>
               </a:rPr>
-              <a:t>Dersin son 60 dakikası</a:t>
+              <a:t>Bugünün son 20 dakikası</a:t>
             </a:r>
             <a:endParaRPr lang="en-US" sz="2600" dirty="0"/>
           </a:p>
@@ -21360,24 +22471,66 @@
         </p:nvSpPr>
         <p:spPr>
           <a:xfrm>
-            <a:off x="777240" y="2395728"/>
-            <a:ext cx="822960" cy="292608"/>
-          </a:xfrm>
-          <a:prstGeom prst="rect">
-            <a:avLst/>
-          </a:prstGeom>
-          <a:noFill/>
-          <a:ln/>
-        </p:spPr>
-        <p:txBody>
-          <a:bodyPr wrap="square" lIns="0" tIns="0" rIns="0" bIns="0" rtlCol="0" anchor="ctr"/>
-          <a:lstStyle/>
-          <a:p>
-            <a:pPr indent="0" marL="0">
-              <a:buNone/>
-            </a:pPr>
-            <a:r>
-              <a:rPr lang="en-US" sz="1300" b="1" dirty="0">
+            <a:off x="777240" y="2331720"/>
+            <a:ext cx="5852160" cy="685800"/>
+          </a:xfrm>
+          <a:prstGeom prst="rect">
+            <a:avLst/>
+          </a:prstGeom>
+          <a:noFill/>
+          <a:ln/>
+        </p:spPr>
+        <p:txBody>
+          <a:bodyPr wrap="square" lIns="0" tIns="0" rIns="0" bIns="0" rtlCol="0" anchor="ctr"/>
+          <a:lstStyle/>
+          <a:p>
+            <a:pPr indent="0" marL="0">
+              <a:lnSpc>
+                <a:spcPts val="2100"/>
+              </a:lnSpc>
+              <a:buNone/>
+            </a:pPr>
+            <a:r>
+              <a:rPr lang="en-US" sz="1500" dirty="0">
+                <a:solidFill>
+                  <a:srgbClr val="1B1F24"/>
+                </a:solidFill>
+                <a:latin typeface="Calibri" pitchFamily="34" charset="0"/>
+                <a:ea typeface="Calibri" pitchFamily="34" charset="-122"/>
+                <a:cs typeface="Calibri" pitchFamily="34" charset="-120"/>
+              </a:rPr>
+              <a:t>Sayfanızı üç katla sekize bölün. Bugün ilk iki kutuyu dolduruyoruz; kalan altısını gelecek hafta yapacağız.</a:t>
+            </a:r>
+            <a:endParaRPr lang="en-US" sz="1500" dirty="0"/>
+          </a:p>
+        </p:txBody>
+      </p:sp>
+      <p:sp>
+        <p:nvSpPr>
+          <p:cNvPr id="6" name="Text 4"/>
+          <p:cNvSpPr txBox="1"/>
+          <p:nvPr/>
+        </p:nvSpPr>
+        <p:spPr>
+          <a:xfrm>
+            <a:off x="777240" y="3200400"/>
+            <a:ext cx="457200" cy="384048"/>
+          </a:xfrm>
+          <a:prstGeom prst="rect">
+            <a:avLst/>
+          </a:prstGeom>
+          <a:noFill/>
+          <a:ln/>
+        </p:spPr>
+        <p:txBody>
+          <a:bodyPr wrap="square" lIns="0" tIns="0" rIns="0" bIns="0" rtlCol="0" anchor="ctr"/>
+          <a:lstStyle/>
+          <a:p>
+            <a:pPr indent="0" marL="0">
+              <a:buNone/>
+            </a:pPr>
+            <a:r>
+              <a:rPr lang="en-US" sz="2200" b="1" dirty="0">
                 <a:solidFill>
                   <a:srgbClr val="2A6289"/>
                 </a:solidFill>
@@ -21385,41 +22538,38 @@
                 <a:ea typeface="Courier New" pitchFamily="34" charset="-122"/>
                 <a:cs typeface="Courier New" pitchFamily="34" charset="-120"/>
               </a:rPr>
-              <a:t>15 dk</a:t>
-            </a:r>
-            <a:endParaRPr lang="en-US" sz="1300" dirty="0"/>
-          </a:p>
-        </p:txBody>
-      </p:sp>
-      <p:sp>
-        <p:nvSpPr>
-          <p:cNvPr id="6" name="Text 4"/>
-          <p:cNvSpPr txBox="1"/>
-          <p:nvPr/>
-        </p:nvSpPr>
-        <p:spPr>
-          <a:xfrm>
-            <a:off x="1737360" y="2377440"/>
-            <a:ext cx="5029200" cy="786384"/>
-          </a:xfrm>
-          <a:prstGeom prst="rect">
-            <a:avLst/>
-          </a:prstGeom>
-          <a:noFill/>
-          <a:ln/>
-        </p:spPr>
-        <p:txBody>
-          <a:bodyPr wrap="square" lIns="0" tIns="0" rIns="0" bIns="0" rtlCol="0" anchor="ctr"/>
-          <a:lstStyle/>
-          <a:p>
-            <a:pPr indent="0" marL="0">
-              <a:lnSpc>
-                <a:spcPts val="2000"/>
-              </a:lnSpc>
-              <a:buNone/>
-            </a:pPr>
-            <a:r>
-              <a:rPr lang="en-US" sz="1450" dirty="0">
+              <a:t>1</a:t>
+            </a:r>
+            <a:endParaRPr lang="en-US" sz="2200" dirty="0"/>
+          </a:p>
+        </p:txBody>
+      </p:sp>
+      <p:sp>
+        <p:nvSpPr>
+          <p:cNvPr id="7" name="Text 5"/>
+          <p:cNvSpPr txBox="1"/>
+          <p:nvPr/>
+        </p:nvSpPr>
+        <p:spPr>
+          <a:xfrm>
+            <a:off x="1344168" y="3218688"/>
+            <a:ext cx="2743200" cy="310896"/>
+          </a:xfrm>
+          <a:prstGeom prst="rect">
+            <a:avLst/>
+          </a:prstGeom>
+          <a:noFill/>
+          <a:ln/>
+        </p:spPr>
+        <p:txBody>
+          <a:bodyPr wrap="square" lIns="0" tIns="0" rIns="0" bIns="0" rtlCol="0" anchor="ctr"/>
+          <a:lstStyle/>
+          <a:p>
+            <a:pPr indent="0" marL="0">
+              <a:buNone/>
+            </a:pPr>
+            <a:r>
+              <a:rPr lang="en-US" sz="1700" b="1" dirty="0">
                 <a:solidFill>
                   <a:srgbClr val="1B1F24"/>
                 </a:solidFill>
@@ -21427,37 +22577,9 @@
                 <a:ea typeface="Calibri" pitchFamily="34" charset="-122"/>
                 <a:cs typeface="Calibri" pitchFamily="34" charset="-120"/>
               </a:rPr>
-              <a:t>Birlikte dışarı çıkıyoruz. Herkes kendine bir nesne seçiyor — bir bank, bir bisiklet, bir korkuluk, bir ağaç kökü.</a:t>
-            </a:r>
-            <a:endParaRPr lang="en-US" sz="1450" dirty="0"/>
-          </a:p>
-        </p:txBody>
-      </p:sp>
-      <p:sp>
-        <p:nvSpPr>
-          <p:cNvPr id="7" name="Text 5"/>
-          <p:cNvSpPr txBox="1"/>
-          <p:nvPr/>
-        </p:nvSpPr>
-        <p:spPr>
-          <a:xfrm>
-            <a:off x="777240" y="3200400"/>
-            <a:ext cx="822960" cy="292608"/>
-          </a:xfrm>
-          <a:prstGeom prst="rect">
-            <a:avLst/>
-          </a:prstGeom>
-          <a:noFill/>
-          <a:ln/>
-        </p:spPr>
-        <p:txBody>
-          <a:bodyPr wrap="square" lIns="0" tIns="0" rIns="0" bIns="0" rtlCol="0" anchor="ctr"/>
-          <a:lstStyle/>
-          <a:p>
-            <a:pPr indent="0" marL="0">
-              <a:buNone/>
-            </a:pPr>
-            <a:endParaRPr lang="en-US" sz="1300" dirty="0"/>
+              <a:t>CY TWOMBLY</a:t>
+            </a:r>
+            <a:endParaRPr lang="en-US" sz="1700" dirty="0"/>
           </a:p>
         </p:txBody>
       </p:sp>
@@ -21469,8 +22591,47 @@
         </p:nvSpPr>
         <p:spPr>
           <a:xfrm>
-            <a:off x="1737360" y="3182112"/>
-            <a:ext cx="5029200" cy="786384"/>
+            <a:off x="4160520" y="3255264"/>
+            <a:ext cx="1280160" cy="274320"/>
+          </a:xfrm>
+          <a:prstGeom prst="rect">
+            <a:avLst/>
+          </a:prstGeom>
+          <a:noFill/>
+          <a:ln/>
+        </p:spPr>
+        <p:txBody>
+          <a:bodyPr wrap="square" lIns="0" tIns="0" rIns="0" bIns="0" rtlCol="0" anchor="ctr"/>
+          <a:lstStyle/>
+          <a:p>
+            <a:pPr indent="0" marL="0">
+              <a:buNone/>
+            </a:pPr>
+            <a:r>
+              <a:rPr lang="en-US" sz="1200" dirty="0">
+                <a:solidFill>
+                  <a:srgbClr val="2A6289"/>
+                </a:solidFill>
+                <a:latin typeface="Courier New" pitchFamily="34" charset="0"/>
+                <a:ea typeface="Courier New" pitchFamily="34" charset="-122"/>
+                <a:cs typeface="Courier New" pitchFamily="34" charset="-120"/>
+              </a:rPr>
+              <a:t>180 BPM</a:t>
+            </a:r>
+            <a:endParaRPr lang="en-US" sz="1200" dirty="0"/>
+          </a:p>
+        </p:txBody>
+      </p:sp>
+      <p:sp>
+        <p:nvSpPr>
+          <p:cNvPr id="9" name="Text 7"/>
+          <p:cNvSpPr txBox="1"/>
+          <p:nvPr/>
+        </p:nvSpPr>
+        <p:spPr>
+          <a:xfrm>
+            <a:off x="1344168" y="3584448"/>
+            <a:ext cx="5120640" cy="777240"/>
           </a:xfrm>
           <a:prstGeom prst="rect">
             <a:avLst/>
@@ -21484,51 +22645,51 @@
           <a:p>
             <a:pPr indent="0" marL="0">
               <a:lnSpc>
-                <a:spcPts val="2000"/>
+                <a:spcPts val="1900"/>
               </a:lnSpc>
               <a:buNone/>
             </a:pPr>
             <a:r>
-              <a:rPr lang="en-US" sz="1450" dirty="0">
-                <a:solidFill>
-                  <a:srgbClr val="1B1F24"/>
+              <a:rPr lang="en-US" sz="1350" dirty="0">
+                <a:solidFill>
+                  <a:srgbClr val="6B747C"/>
                 </a:solidFill>
                 <a:latin typeface="Calibri" pitchFamily="34" charset="0"/>
                 <a:ea typeface="Calibri" pitchFamily="34" charset="-122"/>
                 <a:cs typeface="Calibri" pitchFamily="34" charset="-120"/>
               </a:rPr>
-              <a:t>Defter ve kalem çantada kalıyor. Yalnızca bakıyoruz.</a:t>
-            </a:r>
-            <a:endParaRPr lang="en-US" sz="1450" dirty="0"/>
-          </a:p>
-        </p:txBody>
-      </p:sp>
-      <p:sp>
-        <p:nvSpPr>
-          <p:cNvPr id="9" name="Text 7"/>
-          <p:cNvSpPr txBox="1"/>
-          <p:nvPr/>
-        </p:nvSpPr>
-        <p:spPr>
-          <a:xfrm>
-            <a:off x="777240" y="4005072"/>
-            <a:ext cx="822960" cy="292608"/>
-          </a:xfrm>
-          <a:prstGeom prst="rect">
-            <a:avLst/>
-          </a:prstGeom>
-          <a:noFill/>
-          <a:ln/>
-        </p:spPr>
-        <p:txBody>
-          <a:bodyPr wrap="square" lIns="0" tIns="0" rIns="0" bIns="0" rtlCol="0" anchor="ctr"/>
-          <a:lstStyle/>
-          <a:p>
-            <a:pPr indent="0" marL="0">
-              <a:buNone/>
-            </a:pPr>
-            <a:r>
-              <a:rPr lang="en-US" sz="1300" b="1" dirty="0">
+              <a:t>Ne çizdiğini düşünme. Elini bırak, kâğıdın üstünde gezdir. Çok hafif bastır, sayfanın yarısı boş kalsın.</a:t>
+            </a:r>
+            <a:endParaRPr lang="en-US" sz="1350" dirty="0"/>
+          </a:p>
+        </p:txBody>
+      </p:sp>
+      <p:sp>
+        <p:nvSpPr>
+          <p:cNvPr id="10" name="Text 8"/>
+          <p:cNvSpPr txBox="1"/>
+          <p:nvPr/>
+        </p:nvSpPr>
+        <p:spPr>
+          <a:xfrm>
+            <a:off x="777240" y="4498848"/>
+            <a:ext cx="457200" cy="384048"/>
+          </a:xfrm>
+          <a:prstGeom prst="rect">
+            <a:avLst/>
+          </a:prstGeom>
+          <a:noFill/>
+          <a:ln/>
+        </p:spPr>
+        <p:txBody>
+          <a:bodyPr wrap="square" lIns="0" tIns="0" rIns="0" bIns="0" rtlCol="0" anchor="ctr"/>
+          <a:lstStyle/>
+          <a:p>
+            <a:pPr indent="0" marL="0">
+              <a:buNone/>
+            </a:pPr>
+            <a:r>
+              <a:rPr lang="en-US" sz="2200" b="1" dirty="0">
                 <a:solidFill>
                   <a:srgbClr val="2A6289"/>
                 </a:solidFill>
@@ -21536,41 +22697,38 @@
                 <a:ea typeface="Courier New" pitchFamily="34" charset="-122"/>
                 <a:cs typeface="Courier New" pitchFamily="34" charset="-120"/>
               </a:rPr>
-              <a:t>30 dk</a:t>
-            </a:r>
-            <a:endParaRPr lang="en-US" sz="1300" dirty="0"/>
-          </a:p>
-        </p:txBody>
-      </p:sp>
-      <p:sp>
-        <p:nvSpPr>
-          <p:cNvPr id="10" name="Text 8"/>
-          <p:cNvSpPr txBox="1"/>
-          <p:nvPr/>
-        </p:nvSpPr>
-        <p:spPr>
-          <a:xfrm>
-            <a:off x="1737360" y="3986784"/>
-            <a:ext cx="5029200" cy="786384"/>
-          </a:xfrm>
-          <a:prstGeom prst="rect">
-            <a:avLst/>
-          </a:prstGeom>
-          <a:noFill/>
-          <a:ln/>
-        </p:spPr>
-        <p:txBody>
-          <a:bodyPr wrap="square" lIns="0" tIns="0" rIns="0" bIns="0" rtlCol="0" anchor="ctr"/>
-          <a:lstStyle/>
-          <a:p>
-            <a:pPr indent="0" marL="0">
-              <a:lnSpc>
-                <a:spcPts val="2000"/>
-              </a:lnSpc>
-              <a:buNone/>
-            </a:pPr>
-            <a:r>
-              <a:rPr lang="en-US" sz="1450" dirty="0">
+              <a:t>2</a:t>
+            </a:r>
+            <a:endParaRPr lang="en-US" sz="2200" dirty="0"/>
+          </a:p>
+        </p:txBody>
+      </p:sp>
+      <p:sp>
+        <p:nvSpPr>
+          <p:cNvPr id="11" name="Text 9"/>
+          <p:cNvSpPr txBox="1"/>
+          <p:nvPr/>
+        </p:nvSpPr>
+        <p:spPr>
+          <a:xfrm>
+            <a:off x="1344168" y="4517136"/>
+            <a:ext cx="2743200" cy="310896"/>
+          </a:xfrm>
+          <a:prstGeom prst="rect">
+            <a:avLst/>
+          </a:prstGeom>
+          <a:noFill/>
+          <a:ln/>
+        </p:spPr>
+        <p:txBody>
+          <a:bodyPr wrap="square" lIns="0" tIns="0" rIns="0" bIns="0" rtlCol="0" anchor="ctr"/>
+          <a:lstStyle/>
+          <a:p>
+            <a:pPr indent="0" marL="0">
+              <a:buNone/>
+            </a:pPr>
+            <a:r>
+              <a:rPr lang="en-US" sz="1700" b="1" dirty="0">
                 <a:solidFill>
                   <a:srgbClr val="1B1F24"/>
                 </a:solidFill>
@@ -21578,38 +22736,38 @@
                 <a:ea typeface="Calibri" pitchFamily="34" charset="-122"/>
                 <a:cs typeface="Calibri" pitchFamily="34" charset="-120"/>
               </a:rPr>
-              <a:t>Sınıfa dönüyoruz. Nesneye bakmadan, hafızadan çiziyoruz.</a:t>
-            </a:r>
-            <a:endParaRPr lang="en-US" sz="1450" dirty="0"/>
-          </a:p>
-        </p:txBody>
-      </p:sp>
-      <p:sp>
-        <p:nvSpPr>
-          <p:cNvPr id="11" name="Text 9"/>
-          <p:cNvSpPr txBox="1"/>
-          <p:nvPr/>
-        </p:nvSpPr>
-        <p:spPr>
-          <a:xfrm>
-            <a:off x="777240" y="4809744"/>
-            <a:ext cx="822960" cy="292608"/>
-          </a:xfrm>
-          <a:prstGeom prst="rect">
-            <a:avLst/>
-          </a:prstGeom>
-          <a:noFill/>
-          <a:ln/>
-        </p:spPr>
-        <p:txBody>
-          <a:bodyPr wrap="square" lIns="0" tIns="0" rIns="0" bIns="0" rtlCol="0" anchor="ctr"/>
-          <a:lstStyle/>
-          <a:p>
-            <a:pPr indent="0" marL="0">
-              <a:buNone/>
-            </a:pPr>
-            <a:r>
-              <a:rPr lang="en-US" sz="1300" b="1" dirty="0">
+              <a:t>HOKUSAI</a:t>
+            </a:r>
+            <a:endParaRPr lang="en-US" sz="1700" dirty="0"/>
+          </a:p>
+        </p:txBody>
+      </p:sp>
+      <p:sp>
+        <p:nvSpPr>
+          <p:cNvPr id="12" name="Text 10"/>
+          <p:cNvSpPr txBox="1"/>
+          <p:nvPr/>
+        </p:nvSpPr>
+        <p:spPr>
+          <a:xfrm>
+            <a:off x="4160520" y="4553712"/>
+            <a:ext cx="1280160" cy="274320"/>
+          </a:xfrm>
+          <a:prstGeom prst="rect">
+            <a:avLst/>
+          </a:prstGeom>
+          <a:noFill/>
+          <a:ln/>
+        </p:spPr>
+        <p:txBody>
+          <a:bodyPr wrap="square" lIns="0" tIns="0" rIns="0" bIns="0" rtlCol="0" anchor="ctr"/>
+          <a:lstStyle/>
+          <a:p>
+            <a:pPr indent="0" marL="0">
+              <a:buNone/>
+            </a:pPr>
+            <a:r>
+              <a:rPr lang="en-US" sz="1200" dirty="0">
                 <a:solidFill>
                   <a:srgbClr val="2A6289"/>
                 </a:solidFill>
@@ -21617,22 +22775,22 @@
                 <a:ea typeface="Courier New" pitchFamily="34" charset="-122"/>
                 <a:cs typeface="Courier New" pitchFamily="34" charset="-120"/>
               </a:rPr>
-              <a:t>15 dk</a:t>
-            </a:r>
-            <a:endParaRPr lang="en-US" sz="1300" dirty="0"/>
-          </a:p>
-        </p:txBody>
-      </p:sp>
-      <p:sp>
-        <p:nvSpPr>
-          <p:cNvPr id="12" name="Text 10"/>
-          <p:cNvSpPr txBox="1"/>
-          <p:nvPr/>
-        </p:nvSpPr>
-        <p:spPr>
-          <a:xfrm>
-            <a:off x="1737360" y="4791456"/>
-            <a:ext cx="5029200" cy="786384"/>
+              <a:t>150 BPM</a:t>
+            </a:r>
+            <a:endParaRPr lang="en-US" sz="1200" dirty="0"/>
+          </a:p>
+        </p:txBody>
+      </p:sp>
+      <p:sp>
+        <p:nvSpPr>
+          <p:cNvPr id="13" name="Text 11"/>
+          <p:cNvSpPr txBox="1"/>
+          <p:nvPr/>
+        </p:nvSpPr>
+        <p:spPr>
+          <a:xfrm>
+            <a:off x="1344168" y="4882896"/>
+            <a:ext cx="5120640" cy="777240"/>
           </a:xfrm>
           <a:prstGeom prst="rect">
             <a:avLst/>
@@ -21646,35 +22804,35 @@
           <a:p>
             <a:pPr indent="0" marL="0">
               <a:lnSpc>
-                <a:spcPts val="2000"/>
+                <a:spcPts val="1900"/>
               </a:lnSpc>
               <a:buNone/>
             </a:pPr>
             <a:r>
-              <a:rPr lang="en-US" sz="1450" dirty="0">
-                <a:solidFill>
-                  <a:srgbClr val="1B1F24"/>
+              <a:rPr lang="en-US" sz="1350" dirty="0">
+                <a:solidFill>
+                  <a:srgbClr val="6B747C"/>
                 </a:solidFill>
                 <a:latin typeface="Calibri" pitchFamily="34" charset="0"/>
                 <a:ea typeface="Calibri" pitchFamily="34" charset="-122"/>
                 <a:cs typeface="Calibri" pitchFamily="34" charset="-120"/>
               </a:rPr>
-              <a:t>Çizimleri yan yana asıyoruz. Tek soru: hafıza neyi tuttu, neyi attı?</a:t>
-            </a:r>
-            <a:endParaRPr lang="en-US" sz="1450" dirty="0"/>
-          </a:p>
-        </p:txBody>
-      </p:sp>
-      <p:sp>
-        <p:nvSpPr>
-          <p:cNvPr id="13" name="Text 11"/>
-          <p:cNvSpPr txBox="1"/>
-          <p:nvPr/>
-        </p:nvSpPr>
-        <p:spPr>
-          <a:xfrm>
-            <a:off x="777240" y="5715000"/>
-            <a:ext cx="5852160" cy="411480"/>
+              <a:t>Bastırarak başla, hareket ederken gevşet. Kenarı yuvarlatma — kır, basamak yap. Tek vuruş, tek karar.</a:t>
+            </a:r>
+            <a:endParaRPr lang="en-US" sz="1350" dirty="0"/>
+          </a:p>
+        </p:txBody>
+      </p:sp>
+      <p:sp>
+        <p:nvSpPr>
+          <p:cNvPr id="14" name="Text 12"/>
+          <p:cNvSpPr txBox="1"/>
+          <p:nvPr/>
+        </p:nvSpPr>
+        <p:spPr>
+          <a:xfrm>
+            <a:off x="777240" y="5870448"/>
+            <a:ext cx="5852160" cy="365760"/>
           </a:xfrm>
           <a:prstGeom prst="rect">
             <a:avLst/>
@@ -21698,7 +22856,7 @@
                 <a:ea typeface="Calibri" pitchFamily="34" charset="-122"/>
                 <a:cs typeface="Calibri" pitchFamily="34" charset="-120"/>
               </a:rPr>
-              <a:t>Bu çizimi 14. haftaya kadar saklıyorum.</a:t>
+              <a:t>Kutulara hiçbir nesne çizilmez — yalnızca iz.</a:t>
             </a:r>
             <a:endParaRPr lang="en-US" sz="1600" dirty="0"/>
           </a:p>
@@ -21706,7 +22864,7 @@
       </p:sp>
       <p:sp>
         <p:nvSpPr>
-          <p:cNvPr id="14" name="Shape 12"/>
+          <p:cNvPr id="15" name="Shape 13"/>
           <p:cNvSpPr/>
           <p:nvPr/>
         </p:nvSpPr>
@@ -21731,7 +22889,7 @@
       </p:sp>
       <p:sp>
         <p:nvSpPr>
-          <p:cNvPr id="15" name="Text 13"/>
+          <p:cNvPr id="16" name="Text 14"/>
           <p:cNvSpPr txBox="1"/>
           <p:nvPr/>
         </p:nvSpPr>
@@ -21770,7 +22928,7 @@
       </p:sp>
       <p:sp>
         <p:nvSpPr>
-          <p:cNvPr id="16" name="Text 14"/>
+          <p:cNvPr id="17" name="Text 15"/>
           <p:cNvSpPr txBox="1"/>
           <p:nvPr/>
         </p:nvSpPr>
@@ -21804,7 +22962,7 @@
                 <a:ea typeface="Calibri" pitchFamily="34" charset="-122"/>
                 <a:cs typeface="Calibri" pitchFamily="34" charset="-120"/>
               </a:rPr>
-              <a:t>Son haftada aynı şeyi bir kez daha yapacağız: dışarı çıkıp bir nesne seçip hafızadan çizeceğiz.</a:t>
+              <a:t>Bugün elinizde tek bir çizgi var: yavaş, ürkek, arayan bir çizgi. Dönem sonunda sekiz olacak.</a:t>
             </a:r>
             <a:endParaRPr lang="en-US" sz="1400" dirty="0"/>
           </a:p>
@@ -21845,11 +23003,8 @@
                 <a:ea typeface="Calibri" pitchFamily="34" charset="-122"/>
                 <a:cs typeface="Calibri" pitchFamily="34" charset="-120"/>
               </a:rPr>
-              <a:t>Sonra bugünkü çiziminizi size geri vereceğim. İkisini yan yana koyup final dosyanızın ilk sayfası yapacaksınız.</a:t>
-            </a:r>
-            <a:endParaRPr lang="en-US" sz="1400" dirty="0"/>
-          </a:p>
-          <a:p>
+              <a:t>Kopyaladığımız şey görüntü değil </a:t>
+            </a:r>
             <a:pPr indent="0" marL="0">
               <a:lnSpc>
                 <a:spcPts val="2000"/>
@@ -21857,7 +23012,7 @@
               <a:buNone/>
             </a:pPr>
             <a:r>
-              <a:rPr lang="en-US" sz="800" dirty="0">
+              <a:rPr lang="en-US" sz="1400" b="1" dirty="0">
                 <a:solidFill>
                   <a:srgbClr val="1B1F24"/>
                 </a:solidFill>
@@ -21865,12 +23020,8 @@
                 <a:ea typeface="Calibri" pitchFamily="34" charset="-122"/>
                 <a:cs typeface="Calibri" pitchFamily="34" charset="-120"/>
               </a:rPr>
-              <a:t>
-</a:t>
-            </a:r>
-            <a:endParaRPr lang="en-US" sz="1400" dirty="0"/>
-          </a:p>
-          <a:p>
+              <a:t>hareket</a:t>
+            </a:r>
             <a:pPr indent="0" marL="0">
               <a:lnSpc>
                 <a:spcPts val="2000"/>
@@ -21886,8 +23037,11 @@
                 <a:ea typeface="Calibri" pitchFamily="34" charset="-122"/>
                 <a:cs typeface="Calibri" pitchFamily="34" charset="-120"/>
               </a:rPr>
-              <a:t>Bugün çiziminizin “kötü” olması sorun değil — </a:t>
-            </a:r>
+              <a:t>. Sanatçının çizimini değil, elini çalışıyoruz.</a:t>
+            </a:r>
+            <a:endParaRPr lang="en-US" sz="1400" dirty="0"/>
+          </a:p>
+          <a:p>
             <a:pPr indent="0" marL="0">
               <a:lnSpc>
                 <a:spcPts val="2000"/>
@@ -21895,7 +23049,7 @@
               <a:buNone/>
             </a:pPr>
             <a:r>
-              <a:rPr lang="en-US" sz="1400" b="1" dirty="0">
+              <a:rPr lang="en-US" sz="800" dirty="0">
                 <a:solidFill>
                   <a:srgbClr val="1B1F24"/>
                 </a:solidFill>
@@ -21903,7 +23057,28 @@
                 <a:ea typeface="Calibri" pitchFamily="34" charset="-122"/>
                 <a:cs typeface="Calibri" pitchFamily="34" charset="-120"/>
               </a:rPr>
-              <a:t>işimize yarayan şey o.</a:t>
+              <a:t>
+</a:t>
+            </a:r>
+            <a:endParaRPr lang="en-US" sz="1400" dirty="0"/>
+          </a:p>
+          <a:p>
+            <a:pPr indent="0" marL="0">
+              <a:lnSpc>
+                <a:spcPts val="2000"/>
+              </a:lnSpc>
+              <a:buNone/>
+            </a:pPr>
+            <a:r>
+              <a:rPr lang="en-US" sz="1400" b="1" dirty="0">
+                <a:solidFill>
+                  <a:srgbClr val="1B1F24"/>
+                </a:solidFill>
+                <a:latin typeface="Calibri" pitchFamily="34" charset="0"/>
+                <a:ea typeface="Calibri" pitchFamily="34" charset="-122"/>
+                <a:cs typeface="Calibri" pitchFamily="34" charset="-120"/>
+              </a:rPr>
+              <a:t>İz bir alettir, imza değil.</a:t>
             </a:r>
             <a:endParaRPr lang="en-US" sz="1400" dirty="0"/>
           </a:p>
@@ -21917,9 +23092,9 @@
 </p:sld>
 </file>
 
-<file path=ppt/slides/slide34.xml><?xml version="1.0" encoding="utf-8"?>
+<file path=ppt/slides/slide35.xml><?xml version="1.0" encoding="utf-8"?>
 <p:sld xmlns:a="http://schemas.openxmlformats.org/drawingml/2006/main" xmlns:r="http://schemas.openxmlformats.org/officeDocument/2006/relationships" xmlns:p="http://schemas.openxmlformats.org/presentationml/2006/main">
-  <p:cSld name="Slide 34">
+  <p:cSld name="Slide 35">
     <p:bg>
       <p:bgPr>
         <a:solidFill>
@@ -22089,8 +23264,47 @@
         </p:nvSpPr>
         <p:spPr>
           <a:xfrm>
-            <a:off x="777240" y="4709160"/>
-            <a:ext cx="7315200" cy="822960"/>
+            <a:off x="777240" y="4526280"/>
+            <a:ext cx="7315200" cy="274320"/>
+          </a:xfrm>
+          <a:prstGeom prst="rect">
+            <a:avLst/>
+          </a:prstGeom>
+          <a:noFill/>
+          <a:ln/>
+        </p:spPr>
+        <p:txBody>
+          <a:bodyPr wrap="square" lIns="0" tIns="0" rIns="0" bIns="0" rtlCol="0" anchor="ctr"/>
+          <a:lstStyle/>
+          <a:p>
+            <a:pPr indent="0" marL="0">
+              <a:buNone/>
+            </a:pPr>
+            <a:r>
+              <a:rPr lang="en-US" sz="1200" spc="160" kern="0" dirty="0">
+                <a:solidFill>
+                  <a:srgbClr val="2A6289"/>
+                </a:solidFill>
+                <a:latin typeface="Courier New" pitchFamily="34" charset="0"/>
+                <a:ea typeface="Courier New" pitchFamily="34" charset="-122"/>
+                <a:cs typeface="Courier New" pitchFamily="34" charset="-120"/>
+              </a:rPr>
+              <a:t>BU HAFTANIN ÖDEVİ</a:t>
+            </a:r>
+            <a:endParaRPr lang="en-US" sz="1200" dirty="0"/>
+          </a:p>
+        </p:txBody>
+      </p:sp>
+      <p:sp>
+        <p:nvSpPr>
+          <p:cNvPr id="6" name="Text 4"/>
+          <p:cNvSpPr txBox="1"/>
+          <p:nvPr/>
+        </p:nvSpPr>
+        <p:spPr>
+          <a:xfrm>
+            <a:off x="777240" y="4892040"/>
+            <a:ext cx="9692640" cy="822960"/>
           </a:xfrm>
           <a:prstGeom prst="rect">
             <a:avLst/>
@@ -22104,12 +23318,12 @@
           <a:p>
             <a:pPr indent="0" marL="0">
               <a:lnSpc>
-                <a:spcPts val="2900"/>
+                <a:spcPts val="2700"/>
               </a:lnSpc>
               <a:buNone/>
             </a:pPr>
             <a:r>
-              <a:rPr lang="en-US" sz="2000" dirty="0">
+              <a:rPr lang="en-US" sz="1800" dirty="0">
                 <a:solidFill>
                   <a:srgbClr val="C9CCCE"/>
                 </a:solidFill>
@@ -22117,19 +23331,19 @@
                 <a:ea typeface="Calibri" pitchFamily="34" charset="-122"/>
                 <a:cs typeface="Calibri" pitchFamily="34" charset="-120"/>
               </a:rPr>
-              <a:t>Gelecek hafta: nokta ve çizgi.</a:t>
-            </a:r>
-            <a:endParaRPr lang="en-US" sz="2000" dirty="0"/>
+              <a:t>Dışarıda bir nesne seçin. On dakika ona bakın — kalem çantada.</a:t>
+            </a:r>
+            <a:endParaRPr lang="en-US" sz="1800" dirty="0"/>
           </a:p>
           <a:p>
             <a:pPr indent="0" marL="0">
               <a:lnSpc>
-                <a:spcPts val="2900"/>
+                <a:spcPts val="2700"/>
               </a:lnSpc>
               <a:buNone/>
             </a:pPr>
             <a:r>
-              <a:rPr lang="en-US" sz="2000" dirty="0">
+              <a:rPr lang="en-US" sz="1800" dirty="0">
                 <a:solidFill>
                   <a:srgbClr val="C9CCCE"/>
                 </a:solidFill>
@@ -22137,21 +23351,60 @@
                 <a:ea typeface="Calibri" pitchFamily="34" charset="-122"/>
                 <a:cs typeface="Calibri" pitchFamily="34" charset="-120"/>
               </a:rPr>
-              <a:t>Ev tekrarınızı ve kalemlerinizi getirin.</a:t>
-            </a:r>
-            <a:endParaRPr lang="en-US" sz="2000" dirty="0"/>
-          </a:p>
-        </p:txBody>
-      </p:sp>
-      <p:sp>
-        <p:nvSpPr>
-          <p:cNvPr id="6" name="Text 4"/>
-          <p:cNvSpPr txBox="1"/>
-          <p:nvPr/>
-        </p:nvSpPr>
-        <p:spPr>
-          <a:xfrm>
-            <a:off x="777240" y="6035040"/>
+              <a:t>Sonra eve gidip, ona bakmadan, hafızadan çizin. Gelecek hafta getirin.</a:t>
+            </a:r>
+            <a:endParaRPr lang="en-US" sz="1800" dirty="0"/>
+          </a:p>
+        </p:txBody>
+      </p:sp>
+      <p:sp>
+        <p:nvSpPr>
+          <p:cNvPr id="7" name="Text 5"/>
+          <p:cNvSpPr txBox="1"/>
+          <p:nvPr/>
+        </p:nvSpPr>
+        <p:spPr>
+          <a:xfrm>
+            <a:off x="777240" y="5779008"/>
+            <a:ext cx="7315200" cy="320040"/>
+          </a:xfrm>
+          <a:prstGeom prst="rect">
+            <a:avLst/>
+          </a:prstGeom>
+          <a:noFill/>
+          <a:ln/>
+        </p:spPr>
+        <p:txBody>
+          <a:bodyPr wrap="square" lIns="0" tIns="0" rIns="0" bIns="0" rtlCol="0" anchor="ctr"/>
+          <a:lstStyle/>
+          <a:p>
+            <a:pPr indent="0" marL="0">
+              <a:buNone/>
+            </a:pPr>
+            <a:r>
+              <a:rPr lang="en-US" sz="1600" b="1" dirty="0">
+                <a:solidFill>
+                  <a:srgbClr val="FFFFFF"/>
+                </a:solidFill>
+                <a:latin typeface="Calibri" pitchFamily="34" charset="0"/>
+                <a:ea typeface="Calibri" pitchFamily="34" charset="-122"/>
+                <a:cs typeface="Calibri" pitchFamily="34" charset="-120"/>
+              </a:rPr>
+              <a:t>Gelecek hafta: nokta ve çizgi.</a:t>
+            </a:r>
+            <a:endParaRPr lang="en-US" sz="1600" dirty="0"/>
+          </a:p>
+        </p:txBody>
+      </p:sp>
+      <p:sp>
+        <p:nvSpPr>
+          <p:cNvPr id="8" name="Text 6"/>
+          <p:cNvSpPr txBox="1"/>
+          <p:nvPr/>
+        </p:nvSpPr>
+        <p:spPr>
+          <a:xfrm>
+            <a:off x="777240" y="6291072"/>
             <a:ext cx="7315200" cy="274320"/>
           </a:xfrm>
           <a:prstGeom prst="rect">
@@ -22176,7 +23429,7 @@
                 <a:ea typeface="Courier New" pitchFamily="34" charset="-122"/>
                 <a:cs typeface="Courier New" pitchFamily="34" charset="-120"/>
               </a:rPr>
-              <a:t>Serbest Çizim Teknikleri  ·  1. Hafta</a:t>
+              <a:t>IMC321 Serbest Çizim Teknikleri  ·  2026–27 Güz  ·  1. Hafta</a:t>
             </a:r>
             <a:endParaRPr lang="en-US" sz="1100" dirty="0"/>
           </a:p>
